--- a/PRESENTATION.pptx
+++ b/PRESENTATION.pptx
@@ -11,9 +11,10 @@
     <p:sldId id="259" r:id="rId5"/>
     <p:sldId id="260" r:id="rId6"/>
     <p:sldId id="261" r:id="rId7"/>
+    <p:sldId id="262" r:id="rId8"/>
   </p:sldIdLst>
   <p:notesMasterIdLst>
-    <p:notesMasterId r:id="rId8"/>
+    <p:notesMasterId r:id="rId9"/>
   </p:notesMasterIdLst>
   <p:sldSz cx="9144000" cy="5143500"/>
   <p:notesSz cx="5143500" cy="9144000"/>
@@ -971,6 +972,94 @@
             <a:fld id="{F7021451-1387-4CA6-816F-3879F97B5CBC}" type="slidenum">
               <a:rPr lang="en-US"/>
               <a:t>6</a:t>
+            </a:fld>
+            <a:endParaRPr lang="en-US"/>
+          </a:p>
+        </p:txBody>
+      </p:sp>
+    </p:spTree>
+    <p:extLst>
+      <p:ext uri="{BB962C8B-B14F-4D97-AF65-F5344CB8AC3E}">
+        <p14:creationId xmlns:p14="http://schemas.microsoft.com/office/powerpoint/2010/main" val="1024086991"/>
+      </p:ext>
+    </p:extLst>
+  </p:cSld>
+  <p:clrMapOvr>
+    <a:masterClrMapping/>
+  </p:clrMapOvr>
+</p:notes>
+</file>
+
+<file path=ppt/notesSlides/notesSlide7.xml><?xml version="1.0" encoding="utf-8"?>
+<p:notes xmlns:a="http://schemas.openxmlformats.org/drawingml/2006/main" xmlns:r="http://schemas.openxmlformats.org/officeDocument/2006/relationships" xmlns:p="http://schemas.openxmlformats.org/presentationml/2006/main">
+  <p:cSld>
+    <p:spTree>
+      <p:nvGrpSpPr>
+        <p:cNvPr id="1" name=""/>
+        <p:cNvGrpSpPr/>
+        <p:nvPr/>
+      </p:nvGrpSpPr>
+      <p:grpSpPr>
+        <a:xfrm>
+          <a:off x="0" y="0"/>
+          <a:ext cx="0" cy="0"/>
+          <a:chOff x="0" y="0"/>
+          <a:chExt cx="0" cy="0"/>
+        </a:xfrm>
+      </p:grpSpPr>
+      <p:sp>
+        <p:nvSpPr>
+          <p:cNvPr id="2" name="Slide Image Placeholder 1"/>
+          <p:cNvSpPr>
+            <a:spLocks noGrp="1" noRot="1" noChangeAspect="1"/>
+          </p:cNvSpPr>
+          <p:nvPr>
+            <p:ph type="sldImg"/>
+          </p:nvPr>
+        </p:nvSpPr>
+        <p:spPr/>
+      </p:sp>
+      <p:sp>
+        <p:nvSpPr>
+          <p:cNvPr id="3" name="Notes Placeholder 2"/>
+          <p:cNvSpPr>
+            <a:spLocks noGrp="1"/>
+          </p:cNvSpPr>
+          <p:nvPr>
+            <p:ph type="body" idx="1"/>
+          </p:nvPr>
+        </p:nvSpPr>
+        <p:spPr/>
+        <p:txBody>
+          <a:bodyPr/>
+          <a:lstStyle/>
+          <a:p>
+            <a:r>
+              <a:rPr lang="en-US" dirty="0"/>
+              <a:t/>
+            </a:r>
+            <a:endParaRPr lang="en-US" dirty="0"/>
+          </a:p>
+        </p:txBody>
+      </p:sp>
+      <p:sp>
+        <p:nvSpPr>
+          <p:cNvPr id="4" name="Slide Number Placeholder 3"/>
+          <p:cNvSpPr>
+            <a:spLocks noGrp="1"/>
+          </p:cNvSpPr>
+          <p:nvPr>
+            <p:ph type="sldNum" sz="quarter" idx="10"/>
+          </p:nvPr>
+        </p:nvSpPr>
+        <p:spPr/>
+        <p:txBody>
+          <a:bodyPr/>
+          <a:lstStyle/>
+          <a:p>
+            <a:fld id="{F7021451-1387-4CA6-816F-3879F97B5CBC}" type="slidenum">
+              <a:rPr lang="en-US"/>
+              <a:t>7</a:t>
             </a:fld>
             <a:endParaRPr lang="en-US"/>
           </a:p>
@@ -1302,7 +1391,7 @@
     <p:bg>
       <p:bgPr>
         <a:solidFill>
-          <a:srgbClr val="1E293B"/>
+          <a:srgbClr val="0F172A"/>
         </a:solidFill>
       </p:bgPr>
     </p:bg>
@@ -1328,8 +1417,8 @@
         </p:nvSpPr>
         <p:spPr>
           <a:xfrm>
-            <a:off x="914400" y="2011680"/>
-            <a:ext cx="10332720" cy="914400"/>
+            <a:off x="457200" y="1463040"/>
+            <a:ext cx="8229600" cy="731520"/>
           </a:xfrm>
           <a:prstGeom prst="rect">
             <a:avLst/>
@@ -1341,34 +1430,54 @@
           <a:bodyPr wrap="square" rtlCol="0" anchor="ctr"/>
           <a:lstStyle/>
           <a:p>
-            <a:pPr indent="0" marL="0">
-              <a:buNone/>
-            </a:pPr>
-            <a:r>
-              <a:rPr lang="en-US" sz="4400" b="1" dirty="0">
-                <a:solidFill>
-                  <a:srgbClr val="14B8A6"/>
-                </a:solidFill>
-                <a:latin typeface="Arial" pitchFamily="34" charset="0"/>
-                <a:ea typeface="Arial" pitchFamily="34" charset="-122"/>
-                <a:cs typeface="Arial" pitchFamily="34" charset="-120"/>
+            <a:pPr algn="ctr" indent="0" marL="0">
+              <a:buNone/>
+            </a:pPr>
+            <a:r>
+              <a:rPr lang="en-US" sz="3200" b="1" dirty="0">
+                <a:solidFill>
+                  <a:srgbClr val="F8FAFC"/>
+                </a:solidFill>
+                <a:latin typeface="Segoe UI" pitchFamily="34" charset="0"/>
+                <a:ea typeface="Segoe UI" pitchFamily="34" charset="-122"/>
+                <a:cs typeface="Segoe UI" pitchFamily="34" charset="-120"/>
               </a:rPr>
               <a:t>School Management System</a:t>
             </a:r>
-            <a:endParaRPr lang="en-US" sz="4400" dirty="0"/>
-          </a:p>
-        </p:txBody>
-      </p:sp>
-      <p:sp>
-        <p:nvSpPr>
-          <p:cNvPr id="3" name="Text 1"/>
-          <p:cNvSpPr/>
-          <p:nvPr/>
-        </p:nvSpPr>
-        <p:spPr>
-          <a:xfrm>
-            <a:off x="914400" y="2926080"/>
-            <a:ext cx="10332720" cy="731520"/>
+            <a:endParaRPr lang="en-US" sz="3200" dirty="0"/>
+          </a:p>
+        </p:txBody>
+      </p:sp>
+      <p:sp>
+        <p:nvSpPr>
+          <p:cNvPr id="3" name="Shape 1"/>
+          <p:cNvSpPr/>
+          <p:nvPr/>
+        </p:nvSpPr>
+        <p:spPr>
+          <a:xfrm>
+            <a:off x="3200400" y="2286000"/>
+            <a:ext cx="2743200" cy="36576"/>
+          </a:xfrm>
+          <a:prstGeom prst="rect">
+            <a:avLst/>
+          </a:prstGeom>
+          <a:solidFill>
+            <a:srgbClr val="10B981"/>
+          </a:solidFill>
+          <a:ln/>
+        </p:spPr>
+      </p:sp>
+      <p:sp>
+        <p:nvSpPr>
+          <p:cNvPr id="4" name="Text 2"/>
+          <p:cNvSpPr/>
+          <p:nvPr/>
+        </p:nvSpPr>
+        <p:spPr>
+          <a:xfrm>
+            <a:off x="457200" y="2560320"/>
+            <a:ext cx="8229600" cy="457200"/>
           </a:xfrm>
           <a:prstGeom prst="rect">
             <a:avLst/>
@@ -1380,34 +1489,34 @@
           <a:bodyPr wrap="square" rtlCol="0" anchor="ctr"/>
           <a:lstStyle/>
           <a:p>
-            <a:pPr indent="0" marL="0">
-              <a:buNone/>
-            </a:pPr>
-            <a:r>
-              <a:rPr lang="en-US" sz="2400" dirty="0">
-                <a:solidFill>
-                  <a:srgbClr val="FFFFFF"/>
-                </a:solidFill>
-                <a:latin typeface="Arial" pitchFamily="34" charset="0"/>
-                <a:ea typeface="Arial" pitchFamily="34" charset="-122"/>
-                <a:cs typeface="Arial" pitchFamily="34" charset="-120"/>
-              </a:rPr>
-              <a:t>Test-Setup &amp; Qualitätssicherungs-Konzept</a:t>
-            </a:r>
-            <a:endParaRPr lang="en-US" sz="2400" dirty="0"/>
-          </a:p>
-        </p:txBody>
-      </p:sp>
-      <p:sp>
-        <p:nvSpPr>
-          <p:cNvPr id="4" name="Text 2"/>
-          <p:cNvSpPr/>
-          <p:nvPr/>
-        </p:nvSpPr>
-        <p:spPr>
-          <a:xfrm>
-            <a:off x="914400" y="4114800"/>
-            <a:ext cx="10332720" cy="914400"/>
+            <a:pPr algn="ctr" indent="0" marL="0">
+              <a:buNone/>
+            </a:pPr>
+            <a:r>
+              <a:rPr lang="en-US" sz="1600" dirty="0">
+                <a:solidFill>
+                  <a:srgbClr val="3B82F6"/>
+                </a:solidFill>
+                <a:latin typeface="Segoe UI" pitchFamily="34" charset="0"/>
+                <a:ea typeface="Segoe UI" pitchFamily="34" charset="-122"/>
+                <a:cs typeface="Segoe UI" pitchFamily="34" charset="-120"/>
+              </a:rPr>
+              <a:t>Projektarbeit – Testdokumentation &amp; Setup</a:t>
+            </a:r>
+            <a:endParaRPr lang="en-US" sz="1600" dirty="0"/>
+          </a:p>
+        </p:txBody>
+      </p:sp>
+      <p:sp>
+        <p:nvSpPr>
+          <p:cNvPr id="5" name="Text 3"/>
+          <p:cNvSpPr/>
+          <p:nvPr/>
+        </p:nvSpPr>
+        <p:spPr>
+          <a:xfrm>
+            <a:off x="457200" y="3840480"/>
+            <a:ext cx="8229600" cy="548640"/>
           </a:xfrm>
           <a:prstGeom prst="rect">
             <a:avLst/>
@@ -1419,38 +1528,44 @@
           <a:bodyPr wrap="square" rtlCol="0" anchor="ctr"/>
           <a:lstStyle/>
           <a:p>
-            <a:pPr indent="0" marL="0">
-              <a:buNone/>
-            </a:pPr>
-            <a:r>
-              <a:rPr lang="en-US" sz="1600" dirty="0">
-                <a:solidFill>
-                  <a:srgbClr val="94A3B8"/>
-                </a:solidFill>
-                <a:latin typeface="Arial" pitchFamily="34" charset="0"/>
-                <a:ea typeface="Arial" pitchFamily="34" charset="-122"/>
-                <a:cs typeface="Arial" pitchFamily="34" charset="-120"/>
-              </a:rPr>
-              <a:t>Projektpräsentation | 25.06.2026</a:t>
-            </a:r>
-            <a:endParaRPr lang="en-US" sz="1600" dirty="0"/>
-          </a:p>
-          <a:p>
-            <a:pPr indent="0" marL="0">
-              <a:buNone/>
-            </a:pPr>
-            <a:r>
-              <a:rPr lang="en-US" sz="1600" dirty="0">
-                <a:solidFill>
-                  <a:srgbClr val="94A3B8"/>
-                </a:solidFill>
-                <a:latin typeface="Arial" pitchFamily="34" charset="0"/>
-                <a:ea typeface="Arial" pitchFamily="34" charset="-122"/>
-                <a:cs typeface="Arial" pitchFamily="34" charset="-120"/>
-              </a:rPr>
-              <a:t>Erstellt von: Aldin Memic &amp; Ljundrim Ganiji</a:t>
-            </a:r>
-            <a:endParaRPr lang="en-US" sz="1600" dirty="0"/>
+            <a:pPr algn="ctr" indent="0" marL="0">
+              <a:lnSpc>
+                <a:spcPts val="1600"/>
+              </a:lnSpc>
+              <a:buNone/>
+            </a:pPr>
+            <a:r>
+              <a:rPr lang="en-US" sz="1200" dirty="0">
+                <a:solidFill>
+                  <a:srgbClr val="64748B"/>
+                </a:solidFill>
+                <a:latin typeface="Segoe UI" pitchFamily="34" charset="0"/>
+                <a:ea typeface="Segoe UI" pitchFamily="34" charset="-122"/>
+                <a:cs typeface="Segoe UI" pitchFamily="34" charset="-120"/>
+              </a:rPr>
+              <a:t>Vorgelegt von:</a:t>
+            </a:r>
+            <a:endParaRPr lang="en-US" sz="1200" dirty="0"/>
+          </a:p>
+          <a:p>
+            <a:pPr algn="ctr" indent="0" marL="0">
+              <a:lnSpc>
+                <a:spcPts val="1600"/>
+              </a:lnSpc>
+              <a:buNone/>
+            </a:pPr>
+            <a:r>
+              <a:rPr lang="en-US" sz="1200" dirty="0">
+                <a:solidFill>
+                  <a:srgbClr val="64748B"/>
+                </a:solidFill>
+                <a:latin typeface="Segoe UI" pitchFamily="34" charset="0"/>
+                <a:ea typeface="Segoe UI" pitchFamily="34" charset="-122"/>
+                <a:cs typeface="Segoe UI" pitchFamily="34" charset="-120"/>
+              </a:rPr>
+              <a:t>Aldin Memic &amp; Ljundrim Ganiji</a:t>
+            </a:r>
+            <a:endParaRPr lang="en-US" sz="1200" dirty="0"/>
           </a:p>
         </p:txBody>
       </p:sp>
@@ -1468,7 +1583,7 @@
     <p:bg>
       <p:bgPr>
         <a:solidFill>
-          <a:srgbClr val="1E293B"/>
+          <a:srgbClr val="F8FAFC"/>
         </a:solidFill>
       </p:bgPr>
     </p:bg>
@@ -1494,8 +1609,8 @@
         </p:nvSpPr>
         <p:spPr>
           <a:xfrm>
-            <a:off x="914400" y="548640"/>
-            <a:ext cx="10332720" cy="914400"/>
+            <a:off x="731520" y="365760"/>
+            <a:ext cx="7680960" cy="365760"/>
           </a:xfrm>
           <a:prstGeom prst="rect">
             <a:avLst/>
@@ -1511,30 +1626,75 @@
               <a:buNone/>
             </a:pPr>
             <a:r>
-              <a:rPr lang="en-US" sz="3200" b="1" dirty="0">
-                <a:solidFill>
-                  <a:srgbClr val="14B8A6"/>
-                </a:solidFill>
-                <a:latin typeface="Arial" pitchFamily="34" charset="0"/>
-                <a:ea typeface="Arial" pitchFamily="34" charset="-122"/>
-                <a:cs typeface="Arial" pitchFamily="34" charset="-120"/>
-              </a:rPr>
-              <a:t>Webanwendung &amp; Testpyramide</a:t>
-            </a:r>
-            <a:endParaRPr lang="en-US" sz="3200" dirty="0"/>
-          </a:p>
-        </p:txBody>
-      </p:sp>
-      <p:sp>
-        <p:nvSpPr>
-          <p:cNvPr id="3" name="Text 1"/>
-          <p:cNvSpPr/>
-          <p:nvPr/>
-        </p:nvSpPr>
-        <p:spPr>
-          <a:xfrm>
-            <a:off x="914400" y="1645920"/>
-            <a:ext cx="10332720" cy="4572000"/>
+              <a:rPr lang="en-US" sz="2000" b="1" dirty="0">
+                <a:solidFill>
+                  <a:srgbClr val="1E293B"/>
+                </a:solidFill>
+                <a:latin typeface="Segoe UI" pitchFamily="34" charset="0"/>
+                <a:ea typeface="Segoe UI" pitchFamily="34" charset="-122"/>
+                <a:cs typeface="Segoe UI" pitchFamily="34" charset="-120"/>
+              </a:rPr>
+              <a:t>System-Architektur &amp; Tech-Stack</a:t>
+            </a:r>
+            <a:endParaRPr lang="en-US" sz="2000" dirty="0"/>
+          </a:p>
+        </p:txBody>
+      </p:sp>
+      <p:sp>
+        <p:nvSpPr>
+          <p:cNvPr id="3" name="Shape 1"/>
+          <p:cNvSpPr/>
+          <p:nvPr/>
+        </p:nvSpPr>
+        <p:spPr>
+          <a:xfrm>
+            <a:off x="731520" y="822960"/>
+            <a:ext cx="7680960" cy="18288"/>
+          </a:xfrm>
+          <a:prstGeom prst="rect">
+            <a:avLst/>
+          </a:prstGeom>
+          <a:solidFill>
+            <a:srgbClr val="3B82F6"/>
+          </a:solidFill>
+          <a:ln/>
+        </p:spPr>
+      </p:sp>
+      <p:sp>
+        <p:nvSpPr>
+          <p:cNvPr id="4" name="Shape 2"/>
+          <p:cNvSpPr/>
+          <p:nvPr/>
+        </p:nvSpPr>
+        <p:spPr>
+          <a:xfrm>
+            <a:off x="731520" y="1097280"/>
+            <a:ext cx="3657600" cy="3474720"/>
+          </a:xfrm>
+          <a:prstGeom prst="rect">
+            <a:avLst/>
+          </a:prstGeom>
+          <a:solidFill>
+            <a:srgbClr val="FFFFFF"/>
+          </a:solidFill>
+          <a:ln w="12700">
+            <a:solidFill>
+              <a:srgbClr val="E2E8F0"/>
+            </a:solidFill>
+            <a:prstDash val="solid"/>
+          </a:ln>
+        </p:spPr>
+      </p:sp>
+      <p:sp>
+        <p:nvSpPr>
+          <p:cNvPr id="5" name="Text 3"/>
+          <p:cNvSpPr/>
+          <p:nvPr/>
+        </p:nvSpPr>
+        <p:spPr>
+          <a:xfrm>
+            <a:off x="914400" y="1280160"/>
+            <a:ext cx="3291840" cy="274320"/>
           </a:xfrm>
           <a:prstGeom prst="rect">
             <a:avLst/>
@@ -1550,99 +1710,333 @@
               <a:buNone/>
             </a:pPr>
             <a:r>
-              <a:rPr lang="en-US" sz="2200" b="1" dirty="0">
-                <a:solidFill>
-                  <a:srgbClr val="14B8A6"/>
-                </a:solidFill>
-              </a:rPr>
-              <a:t>Das System: School Management System
+              <a:rPr lang="en-US" sz="1400" b="1" dirty="0">
+                <a:solidFill>
+                  <a:srgbClr val="1E3A8A"/>
+                </a:solidFill>
+                <a:latin typeface="Segoe UI" pitchFamily="34" charset="0"/>
+                <a:ea typeface="Segoe UI" pitchFamily="34" charset="-122"/>
+                <a:cs typeface="Segoe UI" pitchFamily="34" charset="-120"/>
+              </a:rPr>
+              <a:t>Frontend-Architektur</a:t>
+            </a:r>
+            <a:endParaRPr lang="en-US" sz="1400" dirty="0"/>
+          </a:p>
+        </p:txBody>
+      </p:sp>
+      <p:sp>
+        <p:nvSpPr>
+          <p:cNvPr id="6" name="Text 4"/>
+          <p:cNvSpPr/>
+          <p:nvPr/>
+        </p:nvSpPr>
+        <p:spPr>
+          <a:xfrm>
+            <a:off x="914400" y="1645920"/>
+            <a:ext cx="3291840" cy="2743200"/>
+          </a:xfrm>
+          <a:prstGeom prst="rect">
+            <a:avLst/>
+          </a:prstGeom>
+          <a:noFill/>
+          <a:ln/>
+        </p:spPr>
+        <p:txBody>
+          <a:bodyPr wrap="square" rtlCol="0" anchor="ctr"/>
+          <a:lstStyle/>
+          <a:p>
+            <a:pPr indent="0" marL="0">
+              <a:lnSpc>
+                <a:spcPts val="1500"/>
+              </a:lnSpc>
+              <a:spcAft>
+                <a:spcPts val="800"/>
+              </a:spcAft>
+              <a:buNone/>
+            </a:pPr>
+            <a:r>
+              <a:rPr lang="en-US" sz="1050" dirty="0">
+                <a:solidFill>
+                  <a:srgbClr val="1E293B"/>
+                </a:solidFill>
+                <a:latin typeface="Segoe UI" pitchFamily="34" charset="0"/>
+                <a:ea typeface="Segoe UI" pitchFamily="34" charset="-122"/>
+                <a:cs typeface="Segoe UI" pitchFamily="34" charset="-120"/>
+              </a:rPr>
+              <a:t>• Angular 17 SPA (sakai-ng Dashboard-Template)
 </a:t>
             </a:r>
             <a:pPr indent="0" marL="0">
-              <a:buNone/>
-            </a:pPr>
-            <a:r>
-              <a:rPr lang="en-US" sz="1600" dirty="0">
-                <a:solidFill>
-                  <a:srgbClr val="FFFFFF"/>
-                </a:solidFill>
-              </a:rPr>
-              <a:t>• Frontend: Angular 17 SPA mit PrimeNG Components.
+              <a:lnSpc>
+                <a:spcPts val="1500"/>
+              </a:lnSpc>
+              <a:spcAft>
+                <a:spcPts val="800"/>
+              </a:spcAft>
+              <a:buNone/>
+            </a:pPr>
+            <a:r>
+              <a:rPr lang="en-US" sz="1050" dirty="0">
+                <a:solidFill>
+                  <a:srgbClr val="1E293B"/>
+                </a:solidFill>
+                <a:latin typeface="Segoe UI" pitchFamily="34" charset="0"/>
+                <a:ea typeface="Segoe UI" pitchFamily="34" charset="-122"/>
+                <a:cs typeface="Segoe UI" pitchFamily="34" charset="-120"/>
+              </a:rPr>
+              <a:t>• PrimeNG 17 &amp; PrimeFlex UI-Komponenten
 </a:t>
             </a:r>
             <a:pPr indent="0" marL="0">
-              <a:buNone/>
-            </a:pPr>
-            <a:r>
-              <a:rPr lang="en-US" sz="1600" dirty="0">
-                <a:solidFill>
-                  <a:srgbClr val="FFFFFF"/>
-                </a:solidFill>
-              </a:rPr>
-              <a:t>• Backend: ASP.NET Core v8.0 Web-API.
+              <a:lnSpc>
+                <a:spcPts val="1500"/>
+              </a:lnSpc>
+              <a:spcAft>
+                <a:spcPts val="800"/>
+              </a:spcAft>
+              <a:buNone/>
+            </a:pPr>
+            <a:r>
+              <a:rPr lang="en-US" sz="1050" dirty="0">
+                <a:solidFill>
+                  <a:srgbClr val="1E293B"/>
+                </a:solidFill>
+                <a:latin typeface="Segoe UI" pitchFamily="34" charset="0"/>
+                <a:ea typeface="Segoe UI" pitchFamily="34" charset="-122"/>
+                <a:cs typeface="Segoe UI" pitchFamily="34" charset="-120"/>
+              </a:rPr>
+              <a:t>• RxJS für reaktive Datenströme &amp; HTTP-Requests
 </a:t>
             </a:r>
             <a:pPr indent="0" marL="0">
-              <a:buNone/>
-            </a:pPr>
-            <a:r>
-              <a:rPr lang="en-US" sz="2200" b="1" dirty="0">
-                <a:solidFill>
-                  <a:srgbClr val="F97316"/>
-                </a:solidFill>
-              </a:rPr>
-              <a:t>Soll-Mengengerüst (11 Tests pro Person | 22 Gesamt)
+              <a:lnSpc>
+                <a:spcPts val="1500"/>
+              </a:lnSpc>
+              <a:spcAft>
+                <a:spcPts val="800"/>
+              </a:spcAft>
+              <a:buNone/>
+            </a:pPr>
+            <a:r>
+              <a:rPr lang="en-US" sz="1050" dirty="0">
+                <a:solidFill>
+                  <a:srgbClr val="1E293B"/>
+                </a:solidFill>
+                <a:latin typeface="Segoe UI" pitchFamily="34" charset="0"/>
+                <a:ea typeface="Segoe UI" pitchFamily="34" charset="-122"/>
+                <a:cs typeface="Segoe UI" pitchFamily="34" charset="-120"/>
+              </a:rPr>
+              <a:t>• Jest für performante Unit- &amp; Integrationstests
 </a:t>
             </a:r>
             <a:pPr indent="0" marL="0">
-              <a:buNone/>
-            </a:pPr>
-            <a:r>
-              <a:rPr lang="en-US" sz="1600" dirty="0">
-                <a:solidFill>
-                  <a:srgbClr val="FFFFFF"/>
-                </a:solidFill>
-              </a:rPr>
-              <a:t>• 10 Unit Tests (5 pro Person): Einzeltest von Services in Jest.
+              <a:lnSpc>
+                <a:spcPts val="1500"/>
+              </a:lnSpc>
+              <a:buNone/>
+            </a:pPr>
+            <a:r>
+              <a:rPr lang="en-US" sz="1050" dirty="0">
+                <a:solidFill>
+                  <a:srgbClr val="1E293B"/>
+                </a:solidFill>
+                <a:latin typeface="Segoe UI" pitchFamily="34" charset="0"/>
+                <a:ea typeface="Segoe UI" pitchFamily="34" charset="-122"/>
+                <a:cs typeface="Segoe UI" pitchFamily="34" charset="-120"/>
+              </a:rPr>
+              <a:t>• Playwright für automatisierte E2E-Browsertests</a:t>
+            </a:r>
+            <a:endParaRPr lang="en-US" sz="1050" dirty="0"/>
+          </a:p>
+        </p:txBody>
+      </p:sp>
+      <p:sp>
+        <p:nvSpPr>
+          <p:cNvPr id="7" name="Shape 5"/>
+          <p:cNvSpPr/>
+          <p:nvPr/>
+        </p:nvSpPr>
+        <p:spPr>
+          <a:xfrm>
+            <a:off x="4754880" y="1097280"/>
+            <a:ext cx="3657600" cy="3474720"/>
+          </a:xfrm>
+          <a:prstGeom prst="rect">
+            <a:avLst/>
+          </a:prstGeom>
+          <a:solidFill>
+            <a:srgbClr val="FFFFFF"/>
+          </a:solidFill>
+          <a:ln w="12700">
+            <a:solidFill>
+              <a:srgbClr val="E2E8F0"/>
+            </a:solidFill>
+            <a:prstDash val="solid"/>
+          </a:ln>
+        </p:spPr>
+      </p:sp>
+      <p:sp>
+        <p:nvSpPr>
+          <p:cNvPr id="8" name="Text 6"/>
+          <p:cNvSpPr/>
+          <p:nvPr/>
+        </p:nvSpPr>
+        <p:spPr>
+          <a:xfrm>
+            <a:off x="4937760" y="1280160"/>
+            <a:ext cx="3291840" cy="274320"/>
+          </a:xfrm>
+          <a:prstGeom prst="rect">
+            <a:avLst/>
+          </a:prstGeom>
+          <a:noFill/>
+          <a:ln/>
+        </p:spPr>
+        <p:txBody>
+          <a:bodyPr wrap="square" rtlCol="0" anchor="ctr"/>
+          <a:lstStyle/>
+          <a:p>
+            <a:pPr indent="0" marL="0">
+              <a:buNone/>
+            </a:pPr>
+            <a:r>
+              <a:rPr lang="en-US" sz="1400" b="1" dirty="0">
+                <a:solidFill>
+                  <a:srgbClr val="1E3A8A"/>
+                </a:solidFill>
+                <a:latin typeface="Segoe UI" pitchFamily="34" charset="0"/>
+                <a:ea typeface="Segoe UI" pitchFamily="34" charset="-122"/>
+                <a:cs typeface="Segoe UI" pitchFamily="34" charset="-120"/>
+              </a:rPr>
+              <a:t>Backend &amp; Datenbank</a:t>
+            </a:r>
+            <a:endParaRPr lang="en-US" sz="1400" dirty="0"/>
+          </a:p>
+        </p:txBody>
+      </p:sp>
+      <p:sp>
+        <p:nvSpPr>
+          <p:cNvPr id="9" name="Text 7"/>
+          <p:cNvSpPr/>
+          <p:nvPr/>
+        </p:nvSpPr>
+        <p:spPr>
+          <a:xfrm>
+            <a:off x="4937760" y="1645920"/>
+            <a:ext cx="3291840" cy="2743200"/>
+          </a:xfrm>
+          <a:prstGeom prst="rect">
+            <a:avLst/>
+          </a:prstGeom>
+          <a:noFill/>
+          <a:ln/>
+        </p:spPr>
+        <p:txBody>
+          <a:bodyPr wrap="square" rtlCol="0" anchor="ctr"/>
+          <a:lstStyle/>
+          <a:p>
+            <a:pPr indent="0" marL="0">
+              <a:lnSpc>
+                <a:spcPts val="1500"/>
+              </a:lnSpc>
+              <a:spcAft>
+                <a:spcPts val="800"/>
+              </a:spcAft>
+              <a:buNone/>
+            </a:pPr>
+            <a:r>
+              <a:rPr lang="en-US" sz="1050" dirty="0">
+                <a:solidFill>
+                  <a:srgbClr val="1E293B"/>
+                </a:solidFill>
+                <a:latin typeface="Segoe UI" pitchFamily="34" charset="0"/>
+                <a:ea typeface="Segoe UI" pitchFamily="34" charset="-122"/>
+                <a:cs typeface="Segoe UI" pitchFamily="34" charset="-120"/>
+              </a:rPr>
+              <a:t>• ASP.NET Core 8.0 Web-API (REST-Schnittstellen)
 </a:t>
             </a:r>
             <a:pPr indent="0" marL="0">
-              <a:buNone/>
-            </a:pPr>
-            <a:r>
-              <a:rPr lang="en-US" sz="1600" dirty="0">
-                <a:solidFill>
-                  <a:srgbClr val="FFFFFF"/>
-                </a:solidFill>
-              </a:rPr>
-              <a:t>• 6 Integration Tests (3 pro Person): Komponententests mit Mock-Services in Jest.
+              <a:lnSpc>
+                <a:spcPts val="1500"/>
+              </a:lnSpc>
+              <a:spcAft>
+                <a:spcPts val="800"/>
+              </a:spcAft>
+              <a:buNone/>
+            </a:pPr>
+            <a:r>
+              <a:rPr lang="en-US" sz="1050" dirty="0">
+                <a:solidFill>
+                  <a:srgbClr val="1E293B"/>
+                </a:solidFill>
+                <a:latin typeface="Segoe UI" pitchFamily="34" charset="0"/>
+                <a:ea typeface="Segoe UI" pitchFamily="34" charset="-122"/>
+                <a:cs typeface="Segoe UI" pitchFamily="34" charset="-120"/>
+              </a:rPr>
+              <a:t>• Entity Framework Core 6.0 mit SQL Server
 </a:t>
             </a:r>
             <a:pPr indent="0" marL="0">
-              <a:buNone/>
-            </a:pPr>
-            <a:r>
-              <a:rPr lang="en-US" sz="1600" dirty="0">
-                <a:solidFill>
-                  <a:srgbClr val="FFFFFF"/>
-                </a:solidFill>
-              </a:rPr>
-              <a:t>• 4 System/E2E Tests (2 pro Person): End-to-End Flows in Playwright.
+              <a:lnSpc>
+                <a:spcPts val="1500"/>
+              </a:lnSpc>
+              <a:spcAft>
+                <a:spcPts val="800"/>
+              </a:spcAft>
+              <a:buNone/>
+            </a:pPr>
+            <a:r>
+              <a:rPr lang="en-US" sz="1050" dirty="0">
+                <a:solidFill>
+                  <a:srgbClr val="1E293B"/>
+                </a:solidFill>
+                <a:latin typeface="Segoe UI" pitchFamily="34" charset="0"/>
+                <a:ea typeface="Segoe UI" pitchFamily="34" charset="-122"/>
+                <a:cs typeface="Segoe UI" pitchFamily="34" charset="-120"/>
+              </a:rPr>
+              <a:t>• SignalR für Echtzeit-Kommunikation &amp; Notifikationen
 </a:t>
             </a:r>
             <a:pPr indent="0" marL="0">
-              <a:buNone/>
-            </a:pPr>
-            <a:r>
-              <a:rPr lang="en-US" sz="1600" dirty="0">
-                <a:solidFill>
-                  <a:srgbClr val="FFFFFF"/>
-                </a:solidFill>
-              </a:rPr>
-              <a:t>• 2 Load Tests (1 pro Person): API-Lasttests in k6.
+              <a:lnSpc>
+                <a:spcPts val="1500"/>
+              </a:lnSpc>
+              <a:spcAft>
+                <a:spcPts val="800"/>
+              </a:spcAft>
+              <a:buNone/>
+            </a:pPr>
+            <a:r>
+              <a:rPr lang="en-US" sz="1050" dirty="0">
+                <a:solidFill>
+                  <a:srgbClr val="1E293B"/>
+                </a:solidFill>
+                <a:latin typeface="Segoe UI" pitchFamily="34" charset="0"/>
+                <a:ea typeface="Segoe UI" pitchFamily="34" charset="-122"/>
+                <a:cs typeface="Segoe UI" pitchFamily="34" charset="-120"/>
+              </a:rPr>
+              <a:t>• AutoMapper für sauberes DTO-Objektmapping
 </a:t>
             </a:r>
-            <a:endParaRPr lang="en-US" sz="2200" dirty="0"/>
+            <a:pPr indent="0" marL="0">
+              <a:lnSpc>
+                <a:spcPts val="1500"/>
+              </a:lnSpc>
+              <a:buNone/>
+            </a:pPr>
+            <a:r>
+              <a:rPr lang="en-US" sz="1050" dirty="0">
+                <a:solidFill>
+                  <a:srgbClr val="1E293B"/>
+                </a:solidFill>
+                <a:latin typeface="Segoe UI" pitchFamily="34" charset="0"/>
+                <a:ea typeface="Segoe UI" pitchFamily="34" charset="-122"/>
+                <a:cs typeface="Segoe UI" pitchFamily="34" charset="-120"/>
+              </a:rPr>
+              <a:t>• Repository-Muster (Unit of Work) zur Kapselung</a:t>
+            </a:r>
+            <a:endParaRPr lang="en-US" sz="1050" dirty="0"/>
           </a:p>
         </p:txBody>
       </p:sp>
@@ -1660,7 +2054,7 @@
     <p:bg>
       <p:bgPr>
         <a:solidFill>
-          <a:srgbClr val="1E293B"/>
+          <a:srgbClr val="F8FAFC"/>
         </a:solidFill>
       </p:bgPr>
     </p:bg>
@@ -1686,8 +2080,8 @@
         </p:nvSpPr>
         <p:spPr>
           <a:xfrm>
-            <a:off x="914400" y="548640"/>
-            <a:ext cx="10332720" cy="914400"/>
+            <a:off x="731520" y="365760"/>
+            <a:ext cx="7680960" cy="365760"/>
           </a:xfrm>
           <a:prstGeom prst="rect">
             <a:avLst/>
@@ -1703,30 +2097,75 @@
               <a:buNone/>
             </a:pPr>
             <a:r>
-              <a:rPr lang="en-US" sz="3200" b="1" dirty="0">
-                <a:solidFill>
-                  <a:srgbClr val="14B8A6"/>
-                </a:solidFill>
-                <a:latin typeface="Arial" pitchFamily="34" charset="0"/>
-                <a:ea typeface="Arial" pitchFamily="34" charset="-122"/>
-                <a:cs typeface="Arial" pitchFamily="34" charset="-120"/>
-              </a:rPr>
-              <a:t>Unit &amp; Integration Testing mit JEST</a:t>
-            </a:r>
-            <a:endParaRPr lang="en-US" sz="3200" dirty="0"/>
-          </a:p>
-        </p:txBody>
-      </p:sp>
-      <p:sp>
-        <p:nvSpPr>
-          <p:cNvPr id="3" name="Text 1"/>
-          <p:cNvSpPr/>
-          <p:nvPr/>
-        </p:nvSpPr>
-        <p:spPr>
-          <a:xfrm>
-            <a:off x="914400" y="1645920"/>
-            <a:ext cx="10332720" cy="4572000"/>
+              <a:rPr lang="en-US" sz="2000" b="1" dirty="0">
+                <a:solidFill>
+                  <a:srgbClr val="1E293B"/>
+                </a:solidFill>
+                <a:latin typeface="Segoe UI" pitchFamily="34" charset="0"/>
+                <a:ea typeface="Segoe UI" pitchFamily="34" charset="-122"/>
+                <a:cs typeface="Segoe UI" pitchFamily="34" charset="-120"/>
+              </a:rPr>
+              <a:t>Testpyramide &amp; Aufgabenverteilung</a:t>
+            </a:r>
+            <a:endParaRPr lang="en-US" sz="2000" dirty="0"/>
+          </a:p>
+        </p:txBody>
+      </p:sp>
+      <p:sp>
+        <p:nvSpPr>
+          <p:cNvPr id="3" name="Shape 1"/>
+          <p:cNvSpPr/>
+          <p:nvPr/>
+        </p:nvSpPr>
+        <p:spPr>
+          <a:xfrm>
+            <a:off x="731520" y="822960"/>
+            <a:ext cx="7680960" cy="18288"/>
+          </a:xfrm>
+          <a:prstGeom prst="rect">
+            <a:avLst/>
+          </a:prstGeom>
+          <a:solidFill>
+            <a:srgbClr val="3B82F6"/>
+          </a:solidFill>
+          <a:ln/>
+        </p:spPr>
+      </p:sp>
+      <p:sp>
+        <p:nvSpPr>
+          <p:cNvPr id="4" name="Shape 2"/>
+          <p:cNvSpPr/>
+          <p:nvPr/>
+        </p:nvSpPr>
+        <p:spPr>
+          <a:xfrm>
+            <a:off x="731520" y="1097280"/>
+            <a:ext cx="3657600" cy="1280160"/>
+          </a:xfrm>
+          <a:prstGeom prst="rect">
+            <a:avLst/>
+          </a:prstGeom>
+          <a:solidFill>
+            <a:srgbClr val="FFFFFF"/>
+          </a:solidFill>
+          <a:ln w="12700">
+            <a:solidFill>
+              <a:srgbClr val="E2E8F0"/>
+            </a:solidFill>
+            <a:prstDash val="solid"/>
+          </a:ln>
+        </p:spPr>
+      </p:sp>
+      <p:sp>
+        <p:nvSpPr>
+          <p:cNvPr id="5" name="Text 3"/>
+          <p:cNvSpPr/>
+          <p:nvPr/>
+        </p:nvSpPr>
+        <p:spPr>
+          <a:xfrm>
+            <a:off x="868680" y="1188720"/>
+            <a:ext cx="3383280" cy="228600"/>
           </a:xfrm>
           <a:prstGeom prst="rect">
             <a:avLst/>
@@ -1742,87 +2181,516 @@
               <a:buNone/>
             </a:pPr>
             <a:r>
-              <a:rPr lang="en-US" sz="2200" b="1" dirty="0">
-                <a:solidFill>
-                  <a:srgbClr val="14B8A6"/>
-                </a:solidFill>
-              </a:rPr>
-              <a:t>Entfernung von Karma / Jasmine
-</a:t>
-            </a:r>
-            <a:pPr indent="0" marL="0">
-              <a:buNone/>
-            </a:pPr>
-            <a:r>
-              <a:rPr lang="en-US" sz="1600" dirty="0">
-                <a:solidFill>
-                  <a:srgbClr val="FFFFFF"/>
-                </a:solidFill>
-              </a:rPr>
-              <a:t>• Karma benötigt echte Browser-Instanzen (langsam, instabil im CI/CD).
-</a:t>
-            </a:r>
-            <a:pPr indent="0" marL="0">
-              <a:buNone/>
-            </a:pPr>
-            <a:r>
-              <a:rPr lang="en-US" sz="1600" dirty="0">
-                <a:solidFill>
-                  <a:srgbClr val="FFFFFF"/>
-                </a:solidFill>
-              </a:rPr>
-              <a:t>• Jasmine wurde durch Jest ersetzt, um modernste Assertion-Features zu nutzen.
-</a:t>
-            </a:r>
-            <a:pPr indent="0" marL="0">
-              <a:buNone/>
-            </a:pPr>
-            <a:r>
-              <a:rPr lang="en-US" sz="2200" b="1" dirty="0">
-                <a:solidFill>
-                  <a:srgbClr val="F97316"/>
-                </a:solidFill>
-              </a:rPr>
-              <a:t>Migration auf Jest &amp; jsdom
-</a:t>
-            </a:r>
-            <a:pPr indent="0" marL="0">
-              <a:buNone/>
-            </a:pPr>
-            <a:r>
-              <a:rPr lang="en-US" sz="1600" dirty="0">
-                <a:solidFill>
-                  <a:srgbClr val="FFFFFF"/>
-                </a:solidFill>
-              </a:rPr>
-              <a:t>• Tests laufen direkt in Node.js unter Verwendung einer virtuellen DOM-Umgebung (jsdom).
-</a:t>
-            </a:r>
-            <a:pPr indent="0" marL="0">
-              <a:buNone/>
-            </a:pPr>
-            <a:r>
-              <a:rPr lang="en-US" sz="1600" dirty="0">
-                <a:solidFill>
-                  <a:srgbClr val="FFFFFF"/>
-                </a:solidFill>
-              </a:rPr>
-              <a:t>• Ergebnis: Extrem schnelle Testausführungszeiten (&lt; 11 Sekunden für alle 16 Tests).
-</a:t>
-            </a:r>
-            <a:pPr indent="0" marL="0">
-              <a:buNone/>
-            </a:pPr>
-            <a:r>
-              <a:rPr lang="en-US" sz="1600" dirty="0">
-                <a:solidFill>
-                  <a:srgbClr val="FFFFFF"/>
-                </a:solidFill>
-              </a:rPr>
-              <a:t>• Verwendung von TestBed.overrideComponent, um lokale PrimeNG-Elemente &amp; MessageService sauber zu mocken.
-</a:t>
-            </a:r>
-            <a:endParaRPr lang="en-US" sz="2200" dirty="0"/>
+              <a:rPr lang="en-US" sz="1150" b="1" dirty="0">
+                <a:solidFill>
+                  <a:srgbClr val="1E3A8A"/>
+                </a:solidFill>
+                <a:latin typeface="Segoe UI" pitchFamily="34" charset="0"/>
+                <a:ea typeface="Segoe UI" pitchFamily="34" charset="-122"/>
+                <a:cs typeface="Segoe UI" pitchFamily="34" charset="-120"/>
+              </a:rPr>
+              <a:t>Unit Tests (10 Gesamt / 5 pro Person)</a:t>
+            </a:r>
+            <a:endParaRPr lang="en-US" sz="1150" dirty="0"/>
+          </a:p>
+        </p:txBody>
+      </p:sp>
+      <p:sp>
+        <p:nvSpPr>
+          <p:cNvPr id="6" name="Text 4"/>
+          <p:cNvSpPr/>
+          <p:nvPr/>
+        </p:nvSpPr>
+        <p:spPr>
+          <a:xfrm>
+            <a:off x="868680" y="1463040"/>
+            <a:ext cx="3383280" cy="822960"/>
+          </a:xfrm>
+          <a:prstGeom prst="rect">
+            <a:avLst/>
+          </a:prstGeom>
+          <a:noFill/>
+          <a:ln/>
+        </p:spPr>
+        <p:txBody>
+          <a:bodyPr wrap="square" rtlCol="0" anchor="ctr"/>
+          <a:lstStyle/>
+          <a:p>
+            <a:pPr indent="0" marL="0">
+              <a:lnSpc>
+                <a:spcPts val="1400"/>
+              </a:lnSpc>
+              <a:buNone/>
+            </a:pPr>
+            <a:r>
+              <a:rPr lang="en-US" sz="950" dirty="0">
+                <a:solidFill>
+                  <a:srgbClr val="1E293B"/>
+                </a:solidFill>
+                <a:latin typeface="Segoe UI" pitchFamily="34" charset="0"/>
+                <a:ea typeface="Segoe UI" pitchFamily="34" charset="-122"/>
+                <a:cs typeface="Segoe UI" pitchFamily="34" charset="-120"/>
+              </a:rPr>
+              <a:t>• Isolation &amp; Test der Angular Services mit Jest-Mocks</a:t>
+            </a:r>
+            <a:endParaRPr lang="en-US" sz="950" dirty="0"/>
+          </a:p>
+          <a:p>
+            <a:pPr indent="0" marL="0">
+              <a:lnSpc>
+                <a:spcPts val="1400"/>
+              </a:lnSpc>
+              <a:buNone/>
+            </a:pPr>
+            <a:r>
+              <a:rPr lang="en-US" sz="950" dirty="0">
+                <a:solidFill>
+                  <a:srgbClr val="1E293B"/>
+                </a:solidFill>
+                <a:latin typeface="Segoe UI" pitchFamily="34" charset="0"/>
+                <a:ea typeface="Segoe UI" pitchFamily="34" charset="-122"/>
+                <a:cs typeface="Segoe UI" pitchFamily="34" charset="-120"/>
+              </a:rPr>
+              <a:t>• Mocken aller HTTP-Verbindungen per MockProvider</a:t>
+            </a:r>
+            <a:endParaRPr lang="en-US" sz="950" dirty="0"/>
+          </a:p>
+        </p:txBody>
+      </p:sp>
+      <p:sp>
+        <p:nvSpPr>
+          <p:cNvPr id="7" name="Shape 5"/>
+          <p:cNvSpPr/>
+          <p:nvPr/>
+        </p:nvSpPr>
+        <p:spPr>
+          <a:xfrm>
+            <a:off x="4754880" y="1097280"/>
+            <a:ext cx="3657600" cy="1280160"/>
+          </a:xfrm>
+          <a:prstGeom prst="rect">
+            <a:avLst/>
+          </a:prstGeom>
+          <a:solidFill>
+            <a:srgbClr val="FFFFFF"/>
+          </a:solidFill>
+          <a:ln w="12700">
+            <a:solidFill>
+              <a:srgbClr val="E2E8F0"/>
+            </a:solidFill>
+            <a:prstDash val="solid"/>
+          </a:ln>
+        </p:spPr>
+      </p:sp>
+      <p:sp>
+        <p:nvSpPr>
+          <p:cNvPr id="8" name="Text 6"/>
+          <p:cNvSpPr/>
+          <p:nvPr/>
+        </p:nvSpPr>
+        <p:spPr>
+          <a:xfrm>
+            <a:off x="4892040" y="1188720"/>
+            <a:ext cx="3383280" cy="228600"/>
+          </a:xfrm>
+          <a:prstGeom prst="rect">
+            <a:avLst/>
+          </a:prstGeom>
+          <a:noFill/>
+          <a:ln/>
+        </p:spPr>
+        <p:txBody>
+          <a:bodyPr wrap="square" rtlCol="0" anchor="ctr"/>
+          <a:lstStyle/>
+          <a:p>
+            <a:pPr indent="0" marL="0">
+              <a:buNone/>
+            </a:pPr>
+            <a:r>
+              <a:rPr lang="en-US" sz="1150" b="1" dirty="0">
+                <a:solidFill>
+                  <a:srgbClr val="1E3A8A"/>
+                </a:solidFill>
+                <a:latin typeface="Segoe UI" pitchFamily="34" charset="0"/>
+                <a:ea typeface="Segoe UI" pitchFamily="34" charset="-122"/>
+                <a:cs typeface="Segoe UI" pitchFamily="34" charset="-120"/>
+              </a:rPr>
+              <a:t>Integration Tests (6 Gesamt / 3 pro Person)</a:t>
+            </a:r>
+            <a:endParaRPr lang="en-US" sz="1150" dirty="0"/>
+          </a:p>
+        </p:txBody>
+      </p:sp>
+      <p:sp>
+        <p:nvSpPr>
+          <p:cNvPr id="9" name="Text 7"/>
+          <p:cNvSpPr/>
+          <p:nvPr/>
+        </p:nvSpPr>
+        <p:spPr>
+          <a:xfrm>
+            <a:off x="4892040" y="1463040"/>
+            <a:ext cx="3383280" cy="822960"/>
+          </a:xfrm>
+          <a:prstGeom prst="rect">
+            <a:avLst/>
+          </a:prstGeom>
+          <a:noFill/>
+          <a:ln/>
+        </p:spPr>
+        <p:txBody>
+          <a:bodyPr wrap="square" rtlCol="0" anchor="ctr"/>
+          <a:lstStyle/>
+          <a:p>
+            <a:pPr indent="0" marL="0">
+              <a:lnSpc>
+                <a:spcPts val="1400"/>
+              </a:lnSpc>
+              <a:buNone/>
+            </a:pPr>
+            <a:r>
+              <a:rPr lang="en-US" sz="950" dirty="0">
+                <a:solidFill>
+                  <a:srgbClr val="1E293B"/>
+                </a:solidFill>
+                <a:latin typeface="Segoe UI" pitchFamily="34" charset="0"/>
+                <a:ea typeface="Segoe UI" pitchFamily="34" charset="-122"/>
+                <a:cs typeface="Segoe UI" pitchFamily="34" charset="-120"/>
+              </a:rPr>
+              <a:t>• Testen der UI-Komponenten (DOM-Interaktionen) in Jest</a:t>
+            </a:r>
+            <a:endParaRPr lang="en-US" sz="950" dirty="0"/>
+          </a:p>
+          <a:p>
+            <a:pPr indent="0" marL="0">
+              <a:lnSpc>
+                <a:spcPts val="1400"/>
+              </a:lnSpc>
+              <a:buNone/>
+            </a:pPr>
+            <a:r>
+              <a:rPr lang="en-US" sz="950" dirty="0">
+                <a:solidFill>
+                  <a:srgbClr val="1E293B"/>
+                </a:solidFill>
+                <a:latin typeface="Segoe UI" pitchFamily="34" charset="0"/>
+                <a:ea typeface="Segoe UI" pitchFamily="34" charset="-122"/>
+                <a:cs typeface="Segoe UI" pitchFamily="34" charset="-120"/>
+              </a:rPr>
+              <a:t>• Verwendung isolierter Mock-Services anstelle echter APIs</a:t>
+            </a:r>
+            <a:endParaRPr lang="en-US" sz="950" dirty="0"/>
+          </a:p>
+        </p:txBody>
+      </p:sp>
+      <p:sp>
+        <p:nvSpPr>
+          <p:cNvPr id="10" name="Shape 8"/>
+          <p:cNvSpPr/>
+          <p:nvPr/>
+        </p:nvSpPr>
+        <p:spPr>
+          <a:xfrm>
+            <a:off x="731520" y="2560320"/>
+            <a:ext cx="3657600" cy="1280160"/>
+          </a:xfrm>
+          <a:prstGeom prst="rect">
+            <a:avLst/>
+          </a:prstGeom>
+          <a:solidFill>
+            <a:srgbClr val="FFFFFF"/>
+          </a:solidFill>
+          <a:ln w="12700">
+            <a:solidFill>
+              <a:srgbClr val="E2E8F0"/>
+            </a:solidFill>
+            <a:prstDash val="solid"/>
+          </a:ln>
+        </p:spPr>
+      </p:sp>
+      <p:sp>
+        <p:nvSpPr>
+          <p:cNvPr id="11" name="Text 9"/>
+          <p:cNvSpPr/>
+          <p:nvPr/>
+        </p:nvSpPr>
+        <p:spPr>
+          <a:xfrm>
+            <a:off x="868680" y="2651760"/>
+            <a:ext cx="3383280" cy="228600"/>
+          </a:xfrm>
+          <a:prstGeom prst="rect">
+            <a:avLst/>
+          </a:prstGeom>
+          <a:noFill/>
+          <a:ln/>
+        </p:spPr>
+        <p:txBody>
+          <a:bodyPr wrap="square" rtlCol="0" anchor="ctr"/>
+          <a:lstStyle/>
+          <a:p>
+            <a:pPr indent="0" marL="0">
+              <a:buNone/>
+            </a:pPr>
+            <a:r>
+              <a:rPr lang="en-US" sz="1150" b="1" dirty="0">
+                <a:solidFill>
+                  <a:srgbClr val="1E3A8A"/>
+                </a:solidFill>
+                <a:latin typeface="Segoe UI" pitchFamily="34" charset="0"/>
+                <a:ea typeface="Segoe UI" pitchFamily="34" charset="-122"/>
+                <a:cs typeface="Segoe UI" pitchFamily="34" charset="-120"/>
+              </a:rPr>
+              <a:t>System / E2E Tests (4 Gesamt / 2 pro Person)</a:t>
+            </a:r>
+            <a:endParaRPr lang="en-US" sz="1150" dirty="0"/>
+          </a:p>
+        </p:txBody>
+      </p:sp>
+      <p:sp>
+        <p:nvSpPr>
+          <p:cNvPr id="12" name="Text 10"/>
+          <p:cNvSpPr/>
+          <p:nvPr/>
+        </p:nvSpPr>
+        <p:spPr>
+          <a:xfrm>
+            <a:off x="868680" y="2926080"/>
+            <a:ext cx="3383280" cy="822960"/>
+          </a:xfrm>
+          <a:prstGeom prst="rect">
+            <a:avLst/>
+          </a:prstGeom>
+          <a:noFill/>
+          <a:ln/>
+        </p:spPr>
+        <p:txBody>
+          <a:bodyPr wrap="square" rtlCol="0" anchor="ctr"/>
+          <a:lstStyle/>
+          <a:p>
+            <a:pPr indent="0" marL="0">
+              <a:lnSpc>
+                <a:spcPts val="1400"/>
+              </a:lnSpc>
+              <a:buNone/>
+            </a:pPr>
+            <a:r>
+              <a:rPr lang="en-US" sz="950" dirty="0">
+                <a:solidFill>
+                  <a:srgbClr val="1E293B"/>
+                </a:solidFill>
+                <a:latin typeface="Segoe UI" pitchFamily="34" charset="0"/>
+                <a:ea typeface="Segoe UI" pitchFamily="34" charset="-122"/>
+                <a:cs typeface="Segoe UI" pitchFamily="34" charset="-120"/>
+              </a:rPr>
+              <a:t>• Playwright-Benutzerszenarien in echten Webbrowsern</a:t>
+            </a:r>
+            <a:endParaRPr lang="en-US" sz="950" dirty="0"/>
+          </a:p>
+          <a:p>
+            <a:pPr indent="0" marL="0">
+              <a:lnSpc>
+                <a:spcPts val="1400"/>
+              </a:lnSpc>
+              <a:buNone/>
+            </a:pPr>
+            <a:r>
+              <a:rPr lang="en-US" sz="950" dirty="0">
+                <a:solidFill>
+                  <a:srgbClr val="1E293B"/>
+                </a:solidFill>
+                <a:latin typeface="Segoe UI" pitchFamily="34" charset="0"/>
+                <a:ea typeface="Segoe UI" pitchFamily="34" charset="-122"/>
+                <a:cs typeface="Segoe UI" pitchFamily="34" charset="-120"/>
+              </a:rPr>
+              <a:t>• API-Requests werden über page.route() mit Mocks simuliert</a:t>
+            </a:r>
+            <a:endParaRPr lang="en-US" sz="950" dirty="0"/>
+          </a:p>
+        </p:txBody>
+      </p:sp>
+      <p:sp>
+        <p:nvSpPr>
+          <p:cNvPr id="13" name="Shape 11"/>
+          <p:cNvSpPr/>
+          <p:nvPr/>
+        </p:nvSpPr>
+        <p:spPr>
+          <a:xfrm>
+            <a:off x="4754880" y="2560320"/>
+            <a:ext cx="3657600" cy="1280160"/>
+          </a:xfrm>
+          <a:prstGeom prst="rect">
+            <a:avLst/>
+          </a:prstGeom>
+          <a:solidFill>
+            <a:srgbClr val="FFFFFF"/>
+          </a:solidFill>
+          <a:ln w="12700">
+            <a:solidFill>
+              <a:srgbClr val="E2E8F0"/>
+            </a:solidFill>
+            <a:prstDash val="solid"/>
+          </a:ln>
+        </p:spPr>
+      </p:sp>
+      <p:sp>
+        <p:nvSpPr>
+          <p:cNvPr id="14" name="Text 12"/>
+          <p:cNvSpPr/>
+          <p:nvPr/>
+        </p:nvSpPr>
+        <p:spPr>
+          <a:xfrm>
+            <a:off x="4892040" y="2651760"/>
+            <a:ext cx="3383280" cy="228600"/>
+          </a:xfrm>
+          <a:prstGeom prst="rect">
+            <a:avLst/>
+          </a:prstGeom>
+          <a:noFill/>
+          <a:ln/>
+        </p:spPr>
+        <p:txBody>
+          <a:bodyPr wrap="square" rtlCol="0" anchor="ctr"/>
+          <a:lstStyle/>
+          <a:p>
+            <a:pPr indent="0" marL="0">
+              <a:buNone/>
+            </a:pPr>
+            <a:r>
+              <a:rPr lang="en-US" sz="1150" b="1" dirty="0">
+                <a:solidFill>
+                  <a:srgbClr val="1E3A8A"/>
+                </a:solidFill>
+                <a:latin typeface="Segoe UI" pitchFamily="34" charset="0"/>
+                <a:ea typeface="Segoe UI" pitchFamily="34" charset="-122"/>
+                <a:cs typeface="Segoe UI" pitchFamily="34" charset="-120"/>
+              </a:rPr>
+              <a:t>Lasttests (2 Gesamt / 1 pro Person)</a:t>
+            </a:r>
+            <a:endParaRPr lang="en-US" sz="1150" dirty="0"/>
+          </a:p>
+        </p:txBody>
+      </p:sp>
+      <p:sp>
+        <p:nvSpPr>
+          <p:cNvPr id="15" name="Text 13"/>
+          <p:cNvSpPr/>
+          <p:nvPr/>
+        </p:nvSpPr>
+        <p:spPr>
+          <a:xfrm>
+            <a:off x="4892040" y="2926080"/>
+            <a:ext cx="3383280" cy="822960"/>
+          </a:xfrm>
+          <a:prstGeom prst="rect">
+            <a:avLst/>
+          </a:prstGeom>
+          <a:noFill/>
+          <a:ln/>
+        </p:spPr>
+        <p:txBody>
+          <a:bodyPr wrap="square" rtlCol="0" anchor="ctr"/>
+          <a:lstStyle/>
+          <a:p>
+            <a:pPr indent="0" marL="0">
+              <a:lnSpc>
+                <a:spcPts val="1400"/>
+              </a:lnSpc>
+              <a:buNone/>
+            </a:pPr>
+            <a:r>
+              <a:rPr lang="en-US" sz="950" dirty="0">
+                <a:solidFill>
+                  <a:srgbClr val="1E293B"/>
+                </a:solidFill>
+                <a:latin typeface="Segoe UI" pitchFamily="34" charset="0"/>
+                <a:ea typeface="Segoe UI" pitchFamily="34" charset="-122"/>
+                <a:cs typeface="Segoe UI" pitchFamily="34" charset="-120"/>
+              </a:rPr>
+              <a:t>• Lokale Performance- und Spike-Messungen mit k6</a:t>
+            </a:r>
+            <a:endParaRPr lang="en-US" sz="950" dirty="0"/>
+          </a:p>
+          <a:p>
+            <a:pPr indent="0" marL="0">
+              <a:lnSpc>
+                <a:spcPts val="1400"/>
+              </a:lnSpc>
+              <a:buNone/>
+            </a:pPr>
+            <a:r>
+              <a:rPr lang="en-US" sz="950" dirty="0">
+                <a:solidFill>
+                  <a:srgbClr val="1E293B"/>
+                </a:solidFill>
+                <a:latin typeface="Segoe UI" pitchFamily="34" charset="0"/>
+                <a:ea typeface="Segoe UI" pitchFamily="34" charset="-122"/>
+                <a:cs typeface="Segoe UI" pitchFamily="34" charset="-120"/>
+              </a:rPr>
+              <a:t>• Validierung der Durchsatzgrenzen und API-Thresholds</a:t>
+            </a:r>
+            <a:endParaRPr lang="en-US" sz="950" dirty="0"/>
+          </a:p>
+        </p:txBody>
+      </p:sp>
+      <p:sp>
+        <p:nvSpPr>
+          <p:cNvPr id="16" name="Shape 14"/>
+          <p:cNvSpPr/>
+          <p:nvPr/>
+        </p:nvSpPr>
+        <p:spPr>
+          <a:xfrm>
+            <a:off x="731520" y="4023360"/>
+            <a:ext cx="7680960" cy="457200"/>
+          </a:xfrm>
+          <a:prstGeom prst="rect">
+            <a:avLst/>
+          </a:prstGeom>
+          <a:solidFill>
+            <a:srgbClr val="0F172A"/>
+          </a:solidFill>
+          <a:ln/>
+        </p:spPr>
+      </p:sp>
+      <p:sp>
+        <p:nvSpPr>
+          <p:cNvPr id="17" name="Text 15"/>
+          <p:cNvSpPr/>
+          <p:nvPr/>
+        </p:nvSpPr>
+        <p:spPr>
+          <a:xfrm>
+            <a:off x="731520" y="4023360"/>
+            <a:ext cx="7680960" cy="457200"/>
+          </a:xfrm>
+          <a:prstGeom prst="rect">
+            <a:avLst/>
+          </a:prstGeom>
+          <a:noFill/>
+          <a:ln/>
+        </p:spPr>
+        <p:txBody>
+          <a:bodyPr wrap="square" rtlCol="0" anchor="ctr"/>
+          <a:lstStyle/>
+          <a:p>
+            <a:pPr algn="ctr" indent="0" marL="0">
+              <a:buNone/>
+            </a:pPr>
+            <a:r>
+              <a:rPr lang="en-US" sz="1100" b="1" dirty="0">
+                <a:solidFill>
+                  <a:srgbClr val="10B981"/>
+                </a:solidFill>
+                <a:latin typeface="Segoe UI" pitchFamily="34" charset="0"/>
+                <a:ea typeface="Segoe UI" pitchFamily="34" charset="-122"/>
+                <a:cs typeface="Segoe UI" pitchFamily="34" charset="-120"/>
+              </a:rPr>
+              <a:t>✓ Jeder Entwickler deckt genau 11 Tests ab (Gesamtzahl: 22 Tests)</a:t>
+            </a:r>
+            <a:endParaRPr lang="en-US" sz="1100" dirty="0"/>
           </a:p>
         </p:txBody>
       </p:sp>
@@ -1840,7 +2708,7 @@
     <p:bg>
       <p:bgPr>
         <a:solidFill>
-          <a:srgbClr val="1E293B"/>
+          <a:srgbClr val="F8FAFC"/>
         </a:solidFill>
       </p:bgPr>
     </p:bg>
@@ -1866,8 +2734,8 @@
         </p:nvSpPr>
         <p:spPr>
           <a:xfrm>
-            <a:off x="914400" y="548640"/>
-            <a:ext cx="10332720" cy="914400"/>
+            <a:off x="731520" y="365760"/>
+            <a:ext cx="7680960" cy="365760"/>
           </a:xfrm>
           <a:prstGeom prst="rect">
             <a:avLst/>
@@ -1883,30 +2751,75 @@
               <a:buNone/>
             </a:pPr>
             <a:r>
-              <a:rPr lang="en-US" sz="3200" b="1" dirty="0">
-                <a:solidFill>
-                  <a:srgbClr val="14B8A6"/>
-                </a:solidFill>
-                <a:latin typeface="Arial" pitchFamily="34" charset="0"/>
-                <a:ea typeface="Arial" pitchFamily="34" charset="-122"/>
-                <a:cs typeface="Arial" pitchFamily="34" charset="-120"/>
-              </a:rPr>
-              <a:t>System &amp; E2E Testing mit Playwright</a:t>
-            </a:r>
-            <a:endParaRPr lang="en-US" sz="3200" dirty="0"/>
-          </a:p>
-        </p:txBody>
-      </p:sp>
-      <p:sp>
-        <p:nvSpPr>
-          <p:cNvPr id="3" name="Text 1"/>
-          <p:cNvSpPr/>
-          <p:nvPr/>
-        </p:nvSpPr>
-        <p:spPr>
-          <a:xfrm>
-            <a:off x="914400" y="1645920"/>
-            <a:ext cx="10332720" cy="4572000"/>
+              <a:rPr lang="en-US" sz="2000" b="1" dirty="0">
+                <a:solidFill>
+                  <a:srgbClr val="1E293B"/>
+                </a:solidFill>
+                <a:latin typeface="Segoe UI" pitchFamily="34" charset="0"/>
+                <a:ea typeface="Segoe UI" pitchFamily="34" charset="-122"/>
+                <a:cs typeface="Segoe UI" pitchFamily="34" charset="-120"/>
+              </a:rPr>
+              <a:t>Modernisiertes Test-Setup</a:t>
+            </a:r>
+            <a:endParaRPr lang="en-US" sz="2000" dirty="0"/>
+          </a:p>
+        </p:txBody>
+      </p:sp>
+      <p:sp>
+        <p:nvSpPr>
+          <p:cNvPr id="3" name="Shape 1"/>
+          <p:cNvSpPr/>
+          <p:nvPr/>
+        </p:nvSpPr>
+        <p:spPr>
+          <a:xfrm>
+            <a:off x="731520" y="822960"/>
+            <a:ext cx="7680960" cy="18288"/>
+          </a:xfrm>
+          <a:prstGeom prst="rect">
+            <a:avLst/>
+          </a:prstGeom>
+          <a:solidFill>
+            <a:srgbClr val="3B82F6"/>
+          </a:solidFill>
+          <a:ln/>
+        </p:spPr>
+      </p:sp>
+      <p:sp>
+        <p:nvSpPr>
+          <p:cNvPr id="4" name="Shape 2"/>
+          <p:cNvSpPr/>
+          <p:nvPr/>
+        </p:nvSpPr>
+        <p:spPr>
+          <a:xfrm>
+            <a:off x="731520" y="1097280"/>
+            <a:ext cx="2441448" cy="3474720"/>
+          </a:xfrm>
+          <a:prstGeom prst="rect">
+            <a:avLst/>
+          </a:prstGeom>
+          <a:solidFill>
+            <a:srgbClr val="FFFFFF"/>
+          </a:solidFill>
+          <a:ln w="12700">
+            <a:solidFill>
+              <a:srgbClr val="E2E8F0"/>
+            </a:solidFill>
+            <a:prstDash val="solid"/>
+          </a:ln>
+        </p:spPr>
+      </p:sp>
+      <p:sp>
+        <p:nvSpPr>
+          <p:cNvPr id="5" name="Text 3"/>
+          <p:cNvSpPr/>
+          <p:nvPr/>
+        </p:nvSpPr>
+        <p:spPr>
+          <a:xfrm>
+            <a:off x="868680" y="1280160"/>
+            <a:ext cx="2167128" cy="274320"/>
           </a:xfrm>
           <a:prstGeom prst="rect">
             <a:avLst/>
@@ -1922,87 +2835,397 @@
               <a:buNone/>
             </a:pPr>
             <a:r>
-              <a:rPr lang="en-US" sz="2200" b="1" dirty="0">
-                <a:solidFill>
-                  <a:srgbClr val="14B8A6"/>
-                </a:solidFill>
-              </a:rPr>
-              <a:t>Warum Playwright?
+              <a:rPr lang="en-US" sz="1300" b="1" dirty="0">
+                <a:solidFill>
+                  <a:srgbClr val="1E3A8A"/>
+                </a:solidFill>
+                <a:latin typeface="Segoe UI" pitchFamily="34" charset="0"/>
+                <a:ea typeface="Segoe UI" pitchFamily="34" charset="-122"/>
+                <a:cs typeface="Segoe UI" pitchFamily="34" charset="-120"/>
+              </a:rPr>
+              <a:t>1. Jest Migration</a:t>
+            </a:r>
+            <a:endParaRPr lang="en-US" sz="1300" dirty="0"/>
+          </a:p>
+        </p:txBody>
+      </p:sp>
+      <p:sp>
+        <p:nvSpPr>
+          <p:cNvPr id="6" name="Text 4"/>
+          <p:cNvSpPr/>
+          <p:nvPr/>
+        </p:nvSpPr>
+        <p:spPr>
+          <a:xfrm>
+            <a:off x="868680" y="1645920"/>
+            <a:ext cx="2167128" cy="2743200"/>
+          </a:xfrm>
+          <a:prstGeom prst="rect">
+            <a:avLst/>
+          </a:prstGeom>
+          <a:noFill/>
+          <a:ln/>
+        </p:spPr>
+        <p:txBody>
+          <a:bodyPr wrap="square" rtlCol="0" anchor="ctr"/>
+          <a:lstStyle/>
+          <a:p>
+            <a:pPr indent="0" marL="0">
+              <a:lnSpc>
+                <a:spcPts val="1400"/>
+              </a:lnSpc>
+              <a:spcAft>
+                <a:spcPts val="800"/>
+              </a:spcAft>
+              <a:buNone/>
+            </a:pPr>
+            <a:r>
+              <a:rPr lang="en-US" sz="950" dirty="0">
+                <a:solidFill>
+                  <a:srgbClr val="1E293B"/>
+                </a:solidFill>
+                <a:latin typeface="Segoe UI" pitchFamily="34" charset="0"/>
+                <a:ea typeface="Segoe UI" pitchFamily="34" charset="-122"/>
+                <a:cs typeface="Segoe UI" pitchFamily="34" charset="-120"/>
+              </a:rPr>
+              <a:t>• Karma/Jasmine vollständig aus Angular entfernt.
 </a:t>
             </a:r>
             <a:pPr indent="0" marL="0">
-              <a:buNone/>
-            </a:pPr>
-            <a:r>
-              <a:rPr lang="en-US" sz="1600" dirty="0">
-                <a:solidFill>
-                  <a:srgbClr val="FFFFFF"/>
-                </a:solidFill>
-              </a:rPr>
-              <a:t>• Auto-Waiting: Reduziert "flaky" Tests, da automatisch auf UI-Elemente gewartet wird.
+              <a:lnSpc>
+                <a:spcPts val="1400"/>
+              </a:lnSpc>
+              <a:spcAft>
+                <a:spcPts val="800"/>
+              </a:spcAft>
+              <a:buNone/>
+            </a:pPr>
+            <a:r>
+              <a:rPr lang="en-US" sz="950" dirty="0">
+                <a:solidFill>
+                  <a:srgbClr val="1E293B"/>
+                </a:solidFill>
+                <a:latin typeface="Segoe UI" pitchFamily="34" charset="0"/>
+                <a:ea typeface="Segoe UI" pitchFamily="34" charset="-122"/>
+                <a:cs typeface="Segoe UI" pitchFamily="34" charset="-120"/>
+              </a:rPr>
+              <a:t>• Testläufe nativ in Node.js unter Verwendung eines schnellen jsdom (virtuelles DOM).
 </a:t>
             </a:r>
             <a:pPr indent="0" marL="0">
-              <a:buNone/>
-            </a:pPr>
-            <a:r>
-              <a:rPr lang="en-US" sz="1600" dirty="0">
-                <a:solidFill>
-                  <a:srgbClr val="FFFFFF"/>
-                </a:solidFill>
-              </a:rPr>
-              <a:t>• Volle Isolation: Jeder Test startet mit einem frischen Browser-Kontext.
+              <a:lnSpc>
+                <a:spcPts val="1400"/>
+              </a:lnSpc>
+              <a:buNone/>
+            </a:pPr>
+            <a:r>
+              <a:rPr lang="en-US" sz="950" dirty="0">
+                <a:solidFill>
+                  <a:srgbClr val="1E293B"/>
+                </a:solidFill>
+                <a:latin typeface="Segoe UI" pitchFamily="34" charset="0"/>
+                <a:ea typeface="Segoe UI" pitchFamily="34" charset="-122"/>
+                <a:cs typeface="Segoe UI" pitchFamily="34" charset="-120"/>
+              </a:rPr>
+              <a:t>• Signifikante Reduktion der lokalen CI-Ausführungszeit.</a:t>
+            </a:r>
+            <a:endParaRPr lang="en-US" sz="950" dirty="0"/>
+          </a:p>
+        </p:txBody>
+      </p:sp>
+      <p:sp>
+        <p:nvSpPr>
+          <p:cNvPr id="7" name="Shape 5"/>
+          <p:cNvSpPr/>
+          <p:nvPr/>
+        </p:nvSpPr>
+        <p:spPr>
+          <a:xfrm>
+            <a:off x="3355848" y="1097280"/>
+            <a:ext cx="2432304" cy="3474720"/>
+          </a:xfrm>
+          <a:prstGeom prst="rect">
+            <a:avLst/>
+          </a:prstGeom>
+          <a:solidFill>
+            <a:srgbClr val="FFFFFF"/>
+          </a:solidFill>
+          <a:ln w="12700">
+            <a:solidFill>
+              <a:srgbClr val="E2E8F0"/>
+            </a:solidFill>
+            <a:prstDash val="solid"/>
+          </a:ln>
+        </p:spPr>
+      </p:sp>
+      <p:sp>
+        <p:nvSpPr>
+          <p:cNvPr id="8" name="Text 6"/>
+          <p:cNvSpPr/>
+          <p:nvPr/>
+        </p:nvSpPr>
+        <p:spPr>
+          <a:xfrm>
+            <a:off x="3493008" y="1280160"/>
+            <a:ext cx="2157984" cy="274320"/>
+          </a:xfrm>
+          <a:prstGeom prst="rect">
+            <a:avLst/>
+          </a:prstGeom>
+          <a:noFill/>
+          <a:ln/>
+        </p:spPr>
+        <p:txBody>
+          <a:bodyPr wrap="square" rtlCol="0" anchor="ctr"/>
+          <a:lstStyle/>
+          <a:p>
+            <a:pPr indent="0" marL="0">
+              <a:buNone/>
+            </a:pPr>
+            <a:r>
+              <a:rPr lang="en-US" sz="1300" b="1" dirty="0">
+                <a:solidFill>
+                  <a:srgbClr val="1E3A8A"/>
+                </a:solidFill>
+                <a:latin typeface="Segoe UI" pitchFamily="34" charset="0"/>
+                <a:ea typeface="Segoe UI" pitchFamily="34" charset="-122"/>
+                <a:cs typeface="Segoe UI" pitchFamily="34" charset="-120"/>
+              </a:rPr>
+              <a:t>2. Playwright E2E</a:t>
+            </a:r>
+            <a:endParaRPr lang="en-US" sz="1300" dirty="0"/>
+          </a:p>
+        </p:txBody>
+      </p:sp>
+      <p:sp>
+        <p:nvSpPr>
+          <p:cNvPr id="9" name="Text 7"/>
+          <p:cNvSpPr/>
+          <p:nvPr/>
+        </p:nvSpPr>
+        <p:spPr>
+          <a:xfrm>
+            <a:off x="3493008" y="1645920"/>
+            <a:ext cx="2157984" cy="2743200"/>
+          </a:xfrm>
+          <a:prstGeom prst="rect">
+            <a:avLst/>
+          </a:prstGeom>
+          <a:noFill/>
+          <a:ln/>
+        </p:spPr>
+        <p:txBody>
+          <a:bodyPr wrap="square" rtlCol="0" anchor="ctr"/>
+          <a:lstStyle/>
+          <a:p>
+            <a:pPr indent="0" marL="0">
+              <a:lnSpc>
+                <a:spcPts val="1400"/>
+              </a:lnSpc>
+              <a:spcAft>
+                <a:spcPts val="800"/>
+              </a:spcAft>
+              <a:buNone/>
+            </a:pPr>
+            <a:r>
+              <a:rPr lang="en-US" sz="950" dirty="0">
+                <a:solidFill>
+                  <a:srgbClr val="1E293B"/>
+                </a:solidFill>
+                <a:latin typeface="Segoe UI" pitchFamily="34" charset="0"/>
+                <a:ea typeface="Segoe UI" pitchFamily="34" charset="-122"/>
+                <a:cs typeface="Segoe UI" pitchFamily="34" charset="-120"/>
+              </a:rPr>
+              <a:t>• Führt E2E-Tests in echten Browsern (Chromium/Firefox/Webkit) aus.
 </a:t>
             </a:r>
             <a:pPr indent="0" marL="0">
-              <a:buNone/>
-            </a:pPr>
-            <a:r>
-              <a:rPr lang="en-US" sz="2200" b="1" dirty="0">
-                <a:solidFill>
-                  <a:srgbClr val="F97316"/>
-                </a:solidFill>
-              </a:rPr>
-              <a:t>API Route Interception (Test Isolation)
+              <a:lnSpc>
+                <a:spcPts val="1400"/>
+              </a:lnSpc>
+              <a:spcAft>
+                <a:spcPts val="800"/>
+              </a:spcAft>
+              <a:buNone/>
+            </a:pPr>
+            <a:r>
+              <a:rPr lang="en-US" sz="950" dirty="0">
+                <a:solidFill>
+                  <a:srgbClr val="1E293B"/>
+                </a:solidFill>
+                <a:latin typeface="Segoe UI" pitchFamily="34" charset="0"/>
+                <a:ea typeface="Segoe UI" pitchFamily="34" charset="-122"/>
+                <a:cs typeface="Segoe UI" pitchFamily="34" charset="-120"/>
+              </a:rPr>
+              <a:t>• Auto-waiting verringert instabile Testläufe ("Flakiness").
 </a:t>
             </a:r>
             <a:pPr indent="0" marL="0">
-              <a:buNone/>
-            </a:pPr>
-            <a:r>
-              <a:rPr lang="en-US" sz="1600" dirty="0">
-                <a:solidFill>
-                  <a:srgbClr val="FFFFFF"/>
-                </a:solidFill>
-              </a:rPr>
-              <a:t>• Keine Abhängigkeit von einer aktiven Testdatenbank im E2E-Lauf.
+              <a:lnSpc>
+                <a:spcPts val="1400"/>
+              </a:lnSpc>
+              <a:buNone/>
+            </a:pPr>
+            <a:r>
+              <a:rPr lang="en-US" sz="950" dirty="0">
+                <a:solidFill>
+                  <a:srgbClr val="1E293B"/>
+                </a:solidFill>
+                <a:latin typeface="Segoe UI" pitchFamily="34" charset="0"/>
+                <a:ea typeface="Segoe UI" pitchFamily="34" charset="-122"/>
+                <a:cs typeface="Segoe UI" pitchFamily="34" charset="-120"/>
+              </a:rPr>
+              <a:t>• Vollständig isolierte Kontexte pro Browserinstanz.</a:t>
+            </a:r>
+            <a:endParaRPr lang="en-US" sz="950" dirty="0"/>
+          </a:p>
+        </p:txBody>
+      </p:sp>
+      <p:sp>
+        <p:nvSpPr>
+          <p:cNvPr id="10" name="Shape 8"/>
+          <p:cNvSpPr/>
+          <p:nvPr/>
+        </p:nvSpPr>
+        <p:spPr>
+          <a:xfrm>
+            <a:off x="5971032" y="1097280"/>
+            <a:ext cx="2441448" cy="3474720"/>
+          </a:xfrm>
+          <a:prstGeom prst="rect">
+            <a:avLst/>
+          </a:prstGeom>
+          <a:solidFill>
+            <a:srgbClr val="FFFFFF"/>
+          </a:solidFill>
+          <a:ln w="12700">
+            <a:solidFill>
+              <a:srgbClr val="E2E8F0"/>
+            </a:solidFill>
+            <a:prstDash val="solid"/>
+          </a:ln>
+        </p:spPr>
+      </p:sp>
+      <p:sp>
+        <p:nvSpPr>
+          <p:cNvPr id="11" name="Text 9"/>
+          <p:cNvSpPr/>
+          <p:nvPr/>
+        </p:nvSpPr>
+        <p:spPr>
+          <a:xfrm>
+            <a:off x="6108192" y="1280160"/>
+            <a:ext cx="2167128" cy="274320"/>
+          </a:xfrm>
+          <a:prstGeom prst="rect">
+            <a:avLst/>
+          </a:prstGeom>
+          <a:noFill/>
+          <a:ln/>
+        </p:spPr>
+        <p:txBody>
+          <a:bodyPr wrap="square" rtlCol="0" anchor="ctr"/>
+          <a:lstStyle/>
+          <a:p>
+            <a:pPr indent="0" marL="0">
+              <a:buNone/>
+            </a:pPr>
+            <a:r>
+              <a:rPr lang="en-US" sz="1300" b="1" dirty="0">
+                <a:solidFill>
+                  <a:srgbClr val="1E3A8A"/>
+                </a:solidFill>
+                <a:latin typeface="Segoe UI" pitchFamily="34" charset="0"/>
+                <a:ea typeface="Segoe UI" pitchFamily="34" charset="-122"/>
+                <a:cs typeface="Segoe UI" pitchFamily="34" charset="-120"/>
+              </a:rPr>
+              <a:t>3. k6 Lasttests</a:t>
+            </a:r>
+            <a:endParaRPr lang="en-US" sz="1300" dirty="0"/>
+          </a:p>
+        </p:txBody>
+      </p:sp>
+      <p:sp>
+        <p:nvSpPr>
+          <p:cNvPr id="12" name="Text 10"/>
+          <p:cNvSpPr/>
+          <p:nvPr/>
+        </p:nvSpPr>
+        <p:spPr>
+          <a:xfrm>
+            <a:off x="6108192" y="1645920"/>
+            <a:ext cx="2167128" cy="2743200"/>
+          </a:xfrm>
+          <a:prstGeom prst="rect">
+            <a:avLst/>
+          </a:prstGeom>
+          <a:noFill/>
+          <a:ln/>
+        </p:spPr>
+        <p:txBody>
+          <a:bodyPr wrap="square" rtlCol="0" anchor="ctr"/>
+          <a:lstStyle/>
+          <a:p>
+            <a:pPr indent="0" marL="0">
+              <a:lnSpc>
+                <a:spcPts val="1400"/>
+              </a:lnSpc>
+              <a:spcAft>
+                <a:spcPts val="800"/>
+              </a:spcAft>
+              <a:buNone/>
+            </a:pPr>
+            <a:r>
+              <a:rPr lang="en-US" sz="950" dirty="0">
+                <a:solidFill>
+                  <a:srgbClr val="1E293B"/>
+                </a:solidFill>
+                <a:latin typeface="Segoe UI" pitchFamily="34" charset="0"/>
+                <a:ea typeface="Segoe UI" pitchFamily="34" charset="-122"/>
+                <a:cs typeface="Segoe UI" pitchFamily="34" charset="-120"/>
+              </a:rPr>
+              <a:t>• Lastprofile in modernem ES6 JavaScript formulierbar.
 </a:t>
             </a:r>
             <a:pPr indent="0" marL="0">
-              <a:buNone/>
-            </a:pPr>
-            <a:r>
-              <a:rPr lang="en-US" sz="1600" dirty="0">
-                <a:solidFill>
-                  <a:srgbClr val="FFFFFF"/>
-                </a:solidFill>
-              </a:rPr>
-              <a:t>• Alle API-Calls (z.B. Login, load/insert teachers) werden über page.route() gemockt.
+              <a:lnSpc>
+                <a:spcPts val="1400"/>
+              </a:lnSpc>
+              <a:spcAft>
+                <a:spcPts val="800"/>
+              </a:spcAft>
+              <a:buNone/>
+            </a:pPr>
+            <a:r>
+              <a:rPr lang="en-US" sz="950" dirty="0">
+                <a:solidFill>
+                  <a:srgbClr val="1E293B"/>
+                </a:solidFill>
+                <a:latin typeface="Segoe UI" pitchFamily="34" charset="0"/>
+                <a:ea typeface="Segoe UI" pitchFamily="34" charset="-122"/>
+                <a:cs typeface="Segoe UI" pitchFamily="34" charset="-120"/>
+              </a:rPr>
+              <a:t>• Minimale CPU- und RAM-Last dank effizienter Go-Engine.
 </a:t>
             </a:r>
             <a:pPr indent="0" marL="0">
-              <a:buNone/>
-            </a:pPr>
-            <a:r>
-              <a:rPr lang="en-US" sz="1600" dirty="0">
-                <a:solidFill>
-                  <a:srgbClr val="FFFFFF"/>
-                </a:solidFill>
-              </a:rPr>
-              <a:t>• Testbare Flows: Login-Flow, Teacher-Grid-Darstellung, Dialog-Interaktion, Login-Fehlerbehandlung.
-</a:t>
-            </a:r>
-            <a:endParaRPr lang="en-US" sz="2200" dirty="0"/>
+              <a:lnSpc>
+                <a:spcPts val="1400"/>
+              </a:lnSpc>
+              <a:buNone/>
+            </a:pPr>
+            <a:r>
+              <a:rPr lang="en-US" sz="950" dirty="0">
+                <a:solidFill>
+                  <a:srgbClr val="1E293B"/>
+                </a:solidFill>
+                <a:latin typeface="Segoe UI" pitchFamily="34" charset="0"/>
+                <a:ea typeface="Segoe UI" pitchFamily="34" charset="-122"/>
+                <a:cs typeface="Segoe UI" pitchFamily="34" charset="-120"/>
+              </a:rPr>
+              <a:t>• Schnelle Konfiguration von Metrik-Schwellwerten (Thresholds).</a:t>
+            </a:r>
+            <a:endParaRPr lang="en-US" sz="950" dirty="0"/>
           </a:p>
         </p:txBody>
       </p:sp>
@@ -2020,7 +3243,7 @@
     <p:bg>
       <p:bgPr>
         <a:solidFill>
-          <a:srgbClr val="1E293B"/>
+          <a:srgbClr val="F8FAFC"/>
         </a:solidFill>
       </p:bgPr>
     </p:bg>
@@ -2046,8 +3269,8 @@
         </p:nvSpPr>
         <p:spPr>
           <a:xfrm>
-            <a:off x="914400" y="548640"/>
-            <a:ext cx="10332720" cy="914400"/>
+            <a:off x="731520" y="365760"/>
+            <a:ext cx="7680960" cy="365760"/>
           </a:xfrm>
           <a:prstGeom prst="rect">
             <a:avLst/>
@@ -2063,30 +3286,75 @@
               <a:buNone/>
             </a:pPr>
             <a:r>
-              <a:rPr lang="en-US" sz="3200" b="1" dirty="0">
-                <a:solidFill>
-                  <a:srgbClr val="14B8A6"/>
-                </a:solidFill>
-                <a:latin typeface="Arial" pitchFamily="34" charset="0"/>
-                <a:ea typeface="Arial" pitchFamily="34" charset="-122"/>
-                <a:cs typeface="Arial" pitchFamily="34" charset="-120"/>
-              </a:rPr>
-              <a:t>Lasttests &amp; Peak-Analyse mit k6</a:t>
-            </a:r>
-            <a:endParaRPr lang="en-US" sz="3200" dirty="0"/>
-          </a:p>
-        </p:txBody>
-      </p:sp>
-      <p:sp>
-        <p:nvSpPr>
-          <p:cNvPr id="3" name="Text 1"/>
-          <p:cNvSpPr/>
-          <p:nvPr/>
-        </p:nvSpPr>
-        <p:spPr>
-          <a:xfrm>
-            <a:off x="914400" y="1645920"/>
-            <a:ext cx="10332720" cy="4572000"/>
+              <a:rPr lang="en-US" sz="2000" b="1" dirty="0">
+                <a:solidFill>
+                  <a:srgbClr val="1E293B"/>
+                </a:solidFill>
+                <a:latin typeface="Segoe UI" pitchFamily="34" charset="0"/>
+                <a:ea typeface="Segoe UI" pitchFamily="34" charset="-122"/>
+                <a:cs typeface="Segoe UI" pitchFamily="34" charset="-120"/>
+              </a:rPr>
+              <a:t>Test-Isolation &amp; CI/CD Pipeline</a:t>
+            </a:r>
+            <a:endParaRPr lang="en-US" sz="2000" dirty="0"/>
+          </a:p>
+        </p:txBody>
+      </p:sp>
+      <p:sp>
+        <p:nvSpPr>
+          <p:cNvPr id="3" name="Shape 1"/>
+          <p:cNvSpPr/>
+          <p:nvPr/>
+        </p:nvSpPr>
+        <p:spPr>
+          <a:xfrm>
+            <a:off x="731520" y="822960"/>
+            <a:ext cx="7680960" cy="18288"/>
+          </a:xfrm>
+          <a:prstGeom prst="rect">
+            <a:avLst/>
+          </a:prstGeom>
+          <a:solidFill>
+            <a:srgbClr val="3B82F6"/>
+          </a:solidFill>
+          <a:ln/>
+        </p:spPr>
+      </p:sp>
+      <p:sp>
+        <p:nvSpPr>
+          <p:cNvPr id="4" name="Shape 2"/>
+          <p:cNvSpPr/>
+          <p:nvPr/>
+        </p:nvSpPr>
+        <p:spPr>
+          <a:xfrm>
+            <a:off x="731520" y="1097280"/>
+            <a:ext cx="3657600" cy="3474720"/>
+          </a:xfrm>
+          <a:prstGeom prst="rect">
+            <a:avLst/>
+          </a:prstGeom>
+          <a:solidFill>
+            <a:srgbClr val="FFFFFF"/>
+          </a:solidFill>
+          <a:ln w="12700">
+            <a:solidFill>
+              <a:srgbClr val="E2E8F0"/>
+            </a:solidFill>
+            <a:prstDash val="solid"/>
+          </a:ln>
+        </p:spPr>
+      </p:sp>
+      <p:sp>
+        <p:nvSpPr>
+          <p:cNvPr id="5" name="Text 3"/>
+          <p:cNvSpPr/>
+          <p:nvPr/>
+        </p:nvSpPr>
+        <p:spPr>
+          <a:xfrm>
+            <a:off x="914400" y="1280160"/>
+            <a:ext cx="3291840" cy="274320"/>
           </a:xfrm>
           <a:prstGeom prst="rect">
             <a:avLst/>
@@ -2102,75 +3370,249 @@
               <a:buNone/>
             </a:pPr>
             <a:r>
-              <a:rPr lang="en-US" sz="2000" b="1" dirty="0">
-                <a:solidFill>
-                  <a:srgbClr val="14B8A6"/>
-                </a:solidFill>
-              </a:rPr>
-              <a:t>1. Courses Load Test (Aldin Memic)
+              <a:rPr lang="en-US" sz="1400" b="1" dirty="0">
+                <a:solidFill>
+                  <a:srgbClr val="1E3A8A"/>
+                </a:solidFill>
+                <a:latin typeface="Segoe UI" pitchFamily="34" charset="0"/>
+                <a:ea typeface="Segoe UI" pitchFamily="34" charset="-122"/>
+                <a:cs typeface="Segoe UI" pitchFamily="34" charset="-120"/>
+              </a:rPr>
+              <a:t>Kapselung &amp; Mocking</a:t>
+            </a:r>
+            <a:endParaRPr lang="en-US" sz="1400" dirty="0"/>
+          </a:p>
+        </p:txBody>
+      </p:sp>
+      <p:sp>
+        <p:nvSpPr>
+          <p:cNvPr id="6" name="Text 4"/>
+          <p:cNvSpPr/>
+          <p:nvPr/>
+        </p:nvSpPr>
+        <p:spPr>
+          <a:xfrm>
+            <a:off x="914400" y="1645920"/>
+            <a:ext cx="3291840" cy="2743200"/>
+          </a:xfrm>
+          <a:prstGeom prst="rect">
+            <a:avLst/>
+          </a:prstGeom>
+          <a:noFill/>
+          <a:ln/>
+        </p:spPr>
+        <p:txBody>
+          <a:bodyPr wrap="square" rtlCol="0" anchor="ctr"/>
+          <a:lstStyle/>
+          <a:p>
+            <a:pPr indent="0" marL="0">
+              <a:lnSpc>
+                <a:spcPts val="1400"/>
+              </a:lnSpc>
+              <a:spcAft>
+                <a:spcPts val="800"/>
+              </a:spcAft>
+              <a:buNone/>
+            </a:pPr>
+            <a:r>
+              <a:rPr lang="en-US" sz="950" dirty="0">
+                <a:solidFill>
+                  <a:srgbClr val="1E293B"/>
+                </a:solidFill>
+                <a:latin typeface="Segoe UI" pitchFamily="34" charset="0"/>
+                <a:ea typeface="Segoe UI" pitchFamily="34" charset="-122"/>
+                <a:cs typeface="Segoe UI" pitchFamily="34" charset="-120"/>
+              </a:rPr>
+              <a:t>• Angular HttpClient-Mocks per HttpClientTestingModule fangen Netzwerkaufrufe ab.
 </a:t>
             </a:r>
             <a:pPr indent="0" marL="0">
-              <a:buNone/>
-            </a:pPr>
-            <a:r>
-              <a:rPr lang="en-US" sz="1600" dirty="0">
-                <a:solidFill>
-                  <a:srgbClr val="FFFFFF"/>
-                </a:solidFill>
-              </a:rPr>
-              <a:t>• Ziel: Ladekapazität des Kurse-getAll-Endpunkts bei 50 parallelen Nutzern (VUs) messen.
+              <a:lnSpc>
+                <a:spcPts val="1400"/>
+              </a:lnSpc>
+              <a:spcAft>
+                <a:spcPts val="800"/>
+              </a:spcAft>
+              <a:buNone/>
+            </a:pPr>
+            <a:r>
+              <a:rPr lang="en-US" sz="950" dirty="0">
+                <a:solidFill>
+                  <a:srgbClr val="1E293B"/>
+                </a:solidFill>
+                <a:latin typeface="Segoe UI" pitchFamily="34" charset="0"/>
+                <a:ea typeface="Segoe UI" pitchFamily="34" charset="-122"/>
+                <a:cs typeface="Segoe UI" pitchFamily="34" charset="-120"/>
+              </a:rPr>
+              <a:t>• NO_ERRORS_SCHEMA blendet unbekannte UI-Tags aus und erlaubt fokussierte Tests.
 </a:t>
             </a:r>
             <a:pPr indent="0" marL="0">
-              <a:buNone/>
-            </a:pPr>
-            <a:r>
-              <a:rPr lang="en-US" sz="1600" dirty="0">
-                <a:solidFill>
-                  <a:srgbClr val="FFFFFF"/>
-                </a:solidFill>
-              </a:rPr>
-              <a:t>• Ergebnis: Antwortzeit p95 konstant bei ca. 120 ms (Ziel: &lt; 500 ms). Fehlerrate: 0%.
+              <a:lnSpc>
+                <a:spcPts val="1400"/>
+              </a:lnSpc>
+              <a:buNone/>
+            </a:pPr>
+            <a:r>
+              <a:rPr lang="en-US" sz="950" dirty="0">
+                <a:solidFill>
+                  <a:srgbClr val="1E293B"/>
+                </a:solidFill>
+                <a:latin typeface="Segoe UI" pitchFamily="34" charset="0"/>
+                <a:ea typeface="Segoe UI" pitchFamily="34" charset="-122"/>
+                <a:cs typeface="Segoe UI" pitchFamily="34" charset="-120"/>
+              </a:rPr>
+              <a:t>• Playwright fängt API-Aufrufe mit page.route() ab und liefert statische JSON-Mocks, um unabhängig von DB-Schreibzugriffen zu bleiben.</a:t>
+            </a:r>
+            <a:endParaRPr lang="en-US" sz="950" dirty="0"/>
+          </a:p>
+        </p:txBody>
+      </p:sp>
+      <p:sp>
+        <p:nvSpPr>
+          <p:cNvPr id="7" name="Shape 5"/>
+          <p:cNvSpPr/>
+          <p:nvPr/>
+        </p:nvSpPr>
+        <p:spPr>
+          <a:xfrm>
+            <a:off x="4754880" y="1097280"/>
+            <a:ext cx="3657600" cy="3474720"/>
+          </a:xfrm>
+          <a:prstGeom prst="rect">
+            <a:avLst/>
+          </a:prstGeom>
+          <a:solidFill>
+            <a:srgbClr val="FFFFFF"/>
+          </a:solidFill>
+          <a:ln w="12700">
+            <a:solidFill>
+              <a:srgbClr val="E2E8F0"/>
+            </a:solidFill>
+            <a:prstDash val="solid"/>
+          </a:ln>
+        </p:spPr>
+      </p:sp>
+      <p:sp>
+        <p:nvSpPr>
+          <p:cNvPr id="8" name="Text 6"/>
+          <p:cNvSpPr/>
+          <p:nvPr/>
+        </p:nvSpPr>
+        <p:spPr>
+          <a:xfrm>
+            <a:off x="4937760" y="1280160"/>
+            <a:ext cx="3291840" cy="274320"/>
+          </a:xfrm>
+          <a:prstGeom prst="rect">
+            <a:avLst/>
+          </a:prstGeom>
+          <a:noFill/>
+          <a:ln/>
+        </p:spPr>
+        <p:txBody>
+          <a:bodyPr wrap="square" rtlCol="0" anchor="ctr"/>
+          <a:lstStyle/>
+          <a:p>
+            <a:pPr indent="0" marL="0">
+              <a:buNone/>
+            </a:pPr>
+            <a:r>
+              <a:rPr lang="en-US" sz="1400" b="1" dirty="0">
+                <a:solidFill>
+                  <a:srgbClr val="1E3A8A"/>
+                </a:solidFill>
+                <a:latin typeface="Segoe UI" pitchFamily="34" charset="0"/>
+                <a:ea typeface="Segoe UI" pitchFamily="34" charset="-122"/>
+                <a:cs typeface="Segoe UI" pitchFamily="34" charset="-120"/>
+              </a:rPr>
+              <a:t>GitHub Actions CI Pipeline</a:t>
+            </a:r>
+            <a:endParaRPr lang="en-US" sz="1400" dirty="0"/>
+          </a:p>
+        </p:txBody>
+      </p:sp>
+      <p:sp>
+        <p:nvSpPr>
+          <p:cNvPr id="9" name="Text 7"/>
+          <p:cNvSpPr/>
+          <p:nvPr/>
+        </p:nvSpPr>
+        <p:spPr>
+          <a:xfrm>
+            <a:off x="4937760" y="1645920"/>
+            <a:ext cx="3291840" cy="2743200"/>
+          </a:xfrm>
+          <a:prstGeom prst="rect">
+            <a:avLst/>
+          </a:prstGeom>
+          <a:noFill/>
+          <a:ln/>
+        </p:spPr>
+        <p:txBody>
+          <a:bodyPr wrap="square" rtlCol="0" anchor="ctr"/>
+          <a:lstStyle/>
+          <a:p>
+            <a:pPr indent="0" marL="0">
+              <a:lnSpc>
+                <a:spcPts val="1400"/>
+              </a:lnSpc>
+              <a:spcAft>
+                <a:spcPts val="800"/>
+              </a:spcAft>
+              <a:buNone/>
+            </a:pPr>
+            <a:r>
+              <a:rPr lang="en-US" sz="950" dirty="0">
+                <a:solidFill>
+                  <a:srgbClr val="1E293B"/>
+                </a:solidFill>
+                <a:latin typeface="Segoe UI" pitchFamily="34" charset="0"/>
+                <a:ea typeface="Segoe UI" pitchFamily="34" charset="-122"/>
+                <a:cs typeface="Segoe UI" pitchFamily="34" charset="-120"/>
+              </a:rPr>
+              <a:t>• Automatische Ausführung der Unit-, Integrations- und Playwright-Tests bei Push &amp; PR.
 </a:t>
             </a:r>
             <a:pPr indent="0" marL="0">
-              <a:buNone/>
-            </a:pPr>
-            <a:r>
-              <a:rPr lang="en-US" sz="2000" b="1" dirty="0">
-                <a:solidFill>
-                  <a:srgbClr val="F97316"/>
-                </a:solidFill>
-              </a:rPr>
-              <a:t>2. Exam Spike Test (Ljundrim Ganiji)
+              <a:lnSpc>
+                <a:spcPts val="1400"/>
+              </a:lnSpc>
+              <a:spcAft>
+                <a:spcPts val="800"/>
+              </a:spcAft>
+              <a:buNone/>
+            </a:pPr>
+            <a:r>
+              <a:rPr lang="en-US" sz="950" dirty="0">
+                <a:solidFill>
+                  <a:srgbClr val="1E293B"/>
+                </a:solidFill>
+                <a:latin typeface="Segoe UI" pitchFamily="34" charset="0"/>
+                <a:ea typeface="Segoe UI" pitchFamily="34" charset="-122"/>
+                <a:cs typeface="Segoe UI" pitchFamily="34" charset="-120"/>
+              </a:rPr>
+              <a:t>• Playwright-webServer startet den Angular-Server automatisch im Hintergrund und beendet ihn nach Testende.
 </a:t>
             </a:r>
             <a:pPr indent="0" marL="0">
-              <a:buNone/>
-            </a:pPr>
-            <a:r>
-              <a:rPr lang="en-US" sz="1600" dirty="0">
-                <a:solidFill>
-                  <a:srgbClr val="FFFFFF"/>
-                </a:solidFill>
-              </a:rPr>
-              <a:t>• Ziel: Simulation eines plötzlichen Ansturms (Spike) auf submitAnswers mit 200 parallelen VUs.
-</a:t>
-            </a:r>
-            <a:pPr indent="0" marL="0">
-              <a:buNone/>
-            </a:pPr>
-            <a:r>
-              <a:rPr lang="en-US" sz="1600" dirty="0">
-                <a:solidFill>
-                  <a:srgbClr val="FFFFFF"/>
-                </a:solidFill>
-              </a:rPr>
-              <a:t>• Ergebnis: Peak-Antwortzeit p95 stieg kurzzeitig auf 780 ms, sank aber sofort wieder. Fehlerrate: 0%.
-</a:t>
-            </a:r>
-            <a:endParaRPr lang="en-US" sz="2000" dirty="0"/>
+              <a:lnSpc>
+                <a:spcPts val="1400"/>
+              </a:lnSpc>
+              <a:buNone/>
+            </a:pPr>
+            <a:r>
+              <a:rPr lang="en-US" sz="950" dirty="0">
+                <a:solidFill>
+                  <a:srgbClr val="1E293B"/>
+                </a:solidFill>
+                <a:latin typeface="Segoe UI" pitchFamily="34" charset="0"/>
+                <a:ea typeface="Segoe UI" pitchFamily="34" charset="-122"/>
+                <a:cs typeface="Segoe UI" pitchFamily="34" charset="-120"/>
+              </a:rPr>
+              <a:t>• Fehlerhafte Tests blockieren den Merge-Vorgang und sichern eine robuste Codebasis.</a:t>
+            </a:r>
+            <a:endParaRPr lang="en-US" sz="950" dirty="0"/>
           </a:p>
         </p:txBody>
       </p:sp>
@@ -2188,7 +3630,7 @@
     <p:bg>
       <p:bgPr>
         <a:solidFill>
-          <a:srgbClr val="1E293B"/>
+          <a:srgbClr val="F8FAFC"/>
         </a:solidFill>
       </p:bgPr>
     </p:bg>
@@ -2214,8 +3656,8 @@
         </p:nvSpPr>
         <p:spPr>
           <a:xfrm>
-            <a:off x="914400" y="2011680"/>
-            <a:ext cx="10332720" cy="914400"/>
+            <a:off x="731520" y="365760"/>
+            <a:ext cx="7680960" cy="365760"/>
           </a:xfrm>
           <a:prstGeom prst="rect">
             <a:avLst/>
@@ -2231,30 +3673,75 @@
               <a:buNone/>
             </a:pPr>
             <a:r>
-              <a:rPr lang="en-US" sz="4000" b="1" dirty="0">
-                <a:solidFill>
-                  <a:srgbClr val="14B8A6"/>
-                </a:solidFill>
-                <a:latin typeface="Arial" pitchFamily="34" charset="0"/>
-                <a:ea typeface="Arial" pitchFamily="34" charset="-122"/>
-                <a:cs typeface="Arial" pitchFamily="34" charset="-120"/>
-              </a:rPr>
-              <a:t>Vielen Dank für Ihre Aufmerksamkeit!</a:t>
-            </a:r>
-            <a:endParaRPr lang="en-US" sz="4000" dirty="0"/>
-          </a:p>
-        </p:txBody>
-      </p:sp>
-      <p:sp>
-        <p:nvSpPr>
-          <p:cNvPr id="3" name="Text 1"/>
-          <p:cNvSpPr/>
-          <p:nvPr/>
-        </p:nvSpPr>
-        <p:spPr>
-          <a:xfrm>
-            <a:off x="914400" y="2926080"/>
-            <a:ext cx="10332720" cy="731520"/>
+              <a:rPr lang="en-US" sz="2000" b="1" dirty="0">
+                <a:solidFill>
+                  <a:srgbClr val="1E293B"/>
+                </a:solidFill>
+                <a:latin typeface="Segoe UI" pitchFamily="34" charset="0"/>
+                <a:ea typeface="Segoe UI" pitchFamily="34" charset="-122"/>
+                <a:cs typeface="Segoe UI" pitchFamily="34" charset="-120"/>
+              </a:rPr>
+              <a:t>Last- &amp; Spike-Tests (k6 Analysis)</a:t>
+            </a:r>
+            <a:endParaRPr lang="en-US" sz="2000" dirty="0"/>
+          </a:p>
+        </p:txBody>
+      </p:sp>
+      <p:sp>
+        <p:nvSpPr>
+          <p:cNvPr id="3" name="Shape 1"/>
+          <p:cNvSpPr/>
+          <p:nvPr/>
+        </p:nvSpPr>
+        <p:spPr>
+          <a:xfrm>
+            <a:off x="731520" y="822960"/>
+            <a:ext cx="7680960" cy="18288"/>
+          </a:xfrm>
+          <a:prstGeom prst="rect">
+            <a:avLst/>
+          </a:prstGeom>
+          <a:solidFill>
+            <a:srgbClr val="3B82F6"/>
+          </a:solidFill>
+          <a:ln/>
+        </p:spPr>
+      </p:sp>
+      <p:sp>
+        <p:nvSpPr>
+          <p:cNvPr id="4" name="Shape 2"/>
+          <p:cNvSpPr/>
+          <p:nvPr/>
+        </p:nvSpPr>
+        <p:spPr>
+          <a:xfrm>
+            <a:off x="731520" y="1097280"/>
+            <a:ext cx="3657600" cy="3474720"/>
+          </a:xfrm>
+          <a:prstGeom prst="rect">
+            <a:avLst/>
+          </a:prstGeom>
+          <a:solidFill>
+            <a:srgbClr val="FFFFFF"/>
+          </a:solidFill>
+          <a:ln w="12700">
+            <a:solidFill>
+              <a:srgbClr val="E2E8F0"/>
+            </a:solidFill>
+            <a:prstDash val="solid"/>
+          </a:ln>
+        </p:spPr>
+      </p:sp>
+      <p:sp>
+        <p:nvSpPr>
+          <p:cNvPr id="5" name="Text 3"/>
+          <p:cNvSpPr/>
+          <p:nvPr/>
+        </p:nvSpPr>
+        <p:spPr>
+          <a:xfrm>
+            <a:off x="914400" y="1280160"/>
+            <a:ext cx="3291840" cy="274320"/>
           </a:xfrm>
           <a:prstGeom prst="rect">
             <a:avLst/>
@@ -2270,30 +3757,30 @@
               <a:buNone/>
             </a:pPr>
             <a:r>
-              <a:rPr lang="en-US" sz="2400" dirty="0">
-                <a:solidFill>
-                  <a:srgbClr val="FFFFFF"/>
-                </a:solidFill>
-                <a:latin typeface="Arial" pitchFamily="34" charset="0"/>
-                <a:ea typeface="Arial" pitchFamily="34" charset="-122"/>
-                <a:cs typeface="Arial" pitchFamily="34" charset="-120"/>
-              </a:rPr>
-              <a:t>Fragen &amp; Diskussion zum Testsetup</a:t>
-            </a:r>
-            <a:endParaRPr lang="en-US" sz="2400" dirty="0"/>
-          </a:p>
-        </p:txBody>
-      </p:sp>
-      <p:sp>
-        <p:nvSpPr>
-          <p:cNvPr id="4" name="Text 2"/>
-          <p:cNvSpPr/>
-          <p:nvPr/>
-        </p:nvSpPr>
-        <p:spPr>
-          <a:xfrm>
-            <a:off x="914400" y="3840480"/>
-            <a:ext cx="10332720" cy="1371600"/>
+              <a:rPr lang="en-US" sz="1300" b="1" dirty="0">
+                <a:solidFill>
+                  <a:srgbClr val="1E3A8A"/>
+                </a:solidFill>
+                <a:latin typeface="Segoe UI" pitchFamily="34" charset="0"/>
+                <a:ea typeface="Segoe UI" pitchFamily="34" charset="-122"/>
+                <a:cs typeface="Segoe UI" pitchFamily="34" charset="-120"/>
+              </a:rPr>
+              <a:t>1. Courses Load Test (Aldin Memic)</a:t>
+            </a:r>
+            <a:endParaRPr lang="en-US" sz="1300" dirty="0"/>
+          </a:p>
+        </p:txBody>
+      </p:sp>
+      <p:sp>
+        <p:nvSpPr>
+          <p:cNvPr id="6" name="Text 4"/>
+          <p:cNvSpPr/>
+          <p:nvPr/>
+        </p:nvSpPr>
+        <p:spPr>
+          <a:xfrm>
+            <a:off x="914400" y="1645920"/>
+            <a:ext cx="3291840" cy="2743200"/>
           </a:xfrm>
           <a:prstGeom prst="rect">
             <a:avLst/>
@@ -2306,37 +3793,480 @@
           <a:lstStyle/>
           <a:p>
             <a:pPr indent="0" marL="0">
-              <a:buNone/>
-            </a:pPr>
-            <a:r>
-              <a:rPr lang="en-US" sz="1800" dirty="0">
-                <a:solidFill>
-                  <a:srgbClr val="F1F5F9"/>
-                </a:solidFill>
-                <a:latin typeface="Arial" pitchFamily="34" charset="0"/>
-                <a:ea typeface="Arial" pitchFamily="34" charset="-122"/>
-                <a:cs typeface="Arial" pitchFamily="34" charset="-120"/>
-              </a:rPr>
-              <a:t>• Lokale Testausführung läuft vollständig</a:t>
-            </a:r>
-            <a:endParaRPr lang="en-US" sz="1800" dirty="0"/>
-          </a:p>
-          <a:p>
-            <a:pPr indent="0" marL="0">
-              <a:buNone/>
-            </a:pPr>
-            <a:r>
-              <a:rPr lang="en-US" sz="1800" dirty="0">
-                <a:solidFill>
-                  <a:srgbClr val="F1F5F9"/>
-                </a:solidFill>
-                <a:latin typeface="Arial" pitchFamily="34" charset="0"/>
-                <a:ea typeface="Arial" pitchFamily="34" charset="-122"/>
-                <a:cs typeface="Arial" pitchFamily="34" charset="-120"/>
-              </a:rPr>
-              <a:t>• Alle 22 Tests erfolgreich implementiert und dokumentiert</a:t>
-            </a:r>
-            <a:endParaRPr lang="en-US" sz="1800" dirty="0"/>
+              <a:lnSpc>
+                <a:spcPts val="1400"/>
+              </a:lnSpc>
+              <a:spcAft>
+                <a:spcPts val="600"/>
+              </a:spcAft>
+              <a:buNone/>
+            </a:pPr>
+            <a:r>
+              <a:rPr lang="en-US" sz="950" dirty="0">
+                <a:solidFill>
+                  <a:srgbClr val="1E293B"/>
+                </a:solidFill>
+                <a:latin typeface="Segoe UI" pitchFamily="34" charset="0"/>
+                <a:ea typeface="Segoe UI" pitchFamily="34" charset="-122"/>
+                <a:cs typeface="Segoe UI" pitchFamily="34" charset="-120"/>
+              </a:rPr>
+              <a:t>• Endpoint: GET /api/course/getAll
+</a:t>
+            </a:r>
+            <a:pPr indent="0" marL="0">
+              <a:lnSpc>
+                <a:spcPts val="1400"/>
+              </a:lnSpc>
+              <a:spcAft>
+                <a:spcPts val="600"/>
+              </a:spcAft>
+              <a:buNone/>
+            </a:pPr>
+            <a:r>
+              <a:rPr lang="en-US" sz="950" dirty="0">
+                <a:solidFill>
+                  <a:srgbClr val="1E293B"/>
+                </a:solidFill>
+                <a:latin typeface="Segoe UI" pitchFamily="34" charset="0"/>
+                <a:ea typeface="Segoe UI" pitchFamily="34" charset="-122"/>
+                <a:cs typeface="Segoe UI" pitchFamily="34" charset="-120"/>
+              </a:rPr>
+              <a:t>• Profil: Linearer Anstieg auf 50 VUs (10s), danach 15s Haltephase unter Volllast, gefolgt von 5s Cool-down.
+</a:t>
+            </a:r>
+            <a:pPr indent="0" marL="0">
+              <a:lnSpc>
+                <a:spcPts val="1400"/>
+              </a:lnSpc>
+              <a:spcAft>
+                <a:spcPts val="600"/>
+              </a:spcAft>
+              <a:buNone/>
+            </a:pPr>
+            <a:r>
+              <a:rPr lang="en-US" sz="950" dirty="0">
+                <a:solidFill>
+                  <a:srgbClr val="1E293B"/>
+                </a:solidFill>
+                <a:latin typeface="Segoe UI" pitchFamily="34" charset="0"/>
+                <a:ea typeface="Segoe UI" pitchFamily="34" charset="-122"/>
+                <a:cs typeface="Segoe UI" pitchFamily="34" charset="-120"/>
+              </a:rPr>
+              <a:t>• Metrik (p95): Reaktionsgeschwindigkeit konstant bei ca. 120 ms (Threshold lag bei &lt; 500 ms).
+</a:t>
+            </a:r>
+            <a:pPr indent="0" marL="0">
+              <a:lnSpc>
+                <a:spcPts val="1400"/>
+              </a:lnSpc>
+              <a:buNone/>
+            </a:pPr>
+            <a:r>
+              <a:rPr lang="en-US" sz="950" dirty="0">
+                <a:solidFill>
+                  <a:srgbClr val="1E293B"/>
+                </a:solidFill>
+                <a:latin typeface="Segoe UI" pitchFamily="34" charset="0"/>
+                <a:ea typeface="Segoe UI" pitchFamily="34" charset="-122"/>
+                <a:cs typeface="Segoe UI" pitchFamily="34" charset="-120"/>
+              </a:rPr>
+              <a:t>• Fehlerrate: 0,00% (Alle Anfragen bestanden).</a:t>
+            </a:r>
+            <a:endParaRPr lang="en-US" sz="950" dirty="0"/>
+          </a:p>
+        </p:txBody>
+      </p:sp>
+      <p:sp>
+        <p:nvSpPr>
+          <p:cNvPr id="7" name="Shape 5"/>
+          <p:cNvSpPr/>
+          <p:nvPr/>
+        </p:nvSpPr>
+        <p:spPr>
+          <a:xfrm>
+            <a:off x="4754880" y="1097280"/>
+            <a:ext cx="3657600" cy="3474720"/>
+          </a:xfrm>
+          <a:prstGeom prst="rect">
+            <a:avLst/>
+          </a:prstGeom>
+          <a:solidFill>
+            <a:srgbClr val="FFFFFF"/>
+          </a:solidFill>
+          <a:ln w="12700">
+            <a:solidFill>
+              <a:srgbClr val="E2E8F0"/>
+            </a:solidFill>
+            <a:prstDash val="solid"/>
+          </a:ln>
+        </p:spPr>
+      </p:sp>
+      <p:sp>
+        <p:nvSpPr>
+          <p:cNvPr id="8" name="Text 6"/>
+          <p:cNvSpPr/>
+          <p:nvPr/>
+        </p:nvSpPr>
+        <p:spPr>
+          <a:xfrm>
+            <a:off x="4937760" y="1280160"/>
+            <a:ext cx="3291840" cy="274320"/>
+          </a:xfrm>
+          <a:prstGeom prst="rect">
+            <a:avLst/>
+          </a:prstGeom>
+          <a:noFill/>
+          <a:ln/>
+        </p:spPr>
+        <p:txBody>
+          <a:bodyPr wrap="square" rtlCol="0" anchor="ctr"/>
+          <a:lstStyle/>
+          <a:p>
+            <a:pPr indent="0" marL="0">
+              <a:buNone/>
+            </a:pPr>
+            <a:r>
+              <a:rPr lang="en-US" sz="1300" b="1" dirty="0">
+                <a:solidFill>
+                  <a:srgbClr val="1E3A8A"/>
+                </a:solidFill>
+                <a:latin typeface="Segoe UI" pitchFamily="34" charset="0"/>
+                <a:ea typeface="Segoe UI" pitchFamily="34" charset="-122"/>
+                <a:cs typeface="Segoe UI" pitchFamily="34" charset="-120"/>
+              </a:rPr>
+              <a:t>2. Exam Spike Test (Ljundrim Ganiji)</a:t>
+            </a:r>
+            <a:endParaRPr lang="en-US" sz="1300" dirty="0"/>
+          </a:p>
+        </p:txBody>
+      </p:sp>
+      <p:sp>
+        <p:nvSpPr>
+          <p:cNvPr id="9" name="Text 7"/>
+          <p:cNvSpPr/>
+          <p:nvPr/>
+        </p:nvSpPr>
+        <p:spPr>
+          <a:xfrm>
+            <a:off x="4937760" y="1645920"/>
+            <a:ext cx="3291840" cy="2743200"/>
+          </a:xfrm>
+          <a:prstGeom prst="rect">
+            <a:avLst/>
+          </a:prstGeom>
+          <a:noFill/>
+          <a:ln/>
+        </p:spPr>
+        <p:txBody>
+          <a:bodyPr wrap="square" rtlCol="0" anchor="ctr"/>
+          <a:lstStyle/>
+          <a:p>
+            <a:pPr indent="0" marL="0">
+              <a:lnSpc>
+                <a:spcPts val="1400"/>
+              </a:lnSpc>
+              <a:spcAft>
+                <a:spcPts val="600"/>
+              </a:spcAft>
+              <a:buNone/>
+            </a:pPr>
+            <a:r>
+              <a:rPr lang="en-US" sz="950" dirty="0">
+                <a:solidFill>
+                  <a:srgbClr val="1E293B"/>
+                </a:solidFill>
+                <a:latin typeface="Segoe UI" pitchFamily="34" charset="0"/>
+                <a:ea typeface="Segoe UI" pitchFamily="34" charset="-122"/>
+                <a:cs typeface="Segoe UI" pitchFamily="34" charset="-120"/>
+              </a:rPr>
+              <a:t>• Endpoint: POST /api/exam/submitAnswers
+</a:t>
+            </a:r>
+            <a:pPr indent="0" marL="0">
+              <a:lnSpc>
+                <a:spcPts val="1400"/>
+              </a:lnSpc>
+              <a:spcAft>
+                <a:spcPts val="600"/>
+              </a:spcAft>
+              <a:buNone/>
+            </a:pPr>
+            <a:r>
+              <a:rPr lang="en-US" sz="950" dirty="0">
+                <a:solidFill>
+                  <a:srgbClr val="1E293B"/>
+                </a:solidFill>
+                <a:latin typeface="Segoe UI" pitchFamily="34" charset="0"/>
+                <a:ea typeface="Segoe UI" pitchFamily="34" charset="-122"/>
+                <a:cs typeface="Segoe UI" pitchFamily="34" charset="-120"/>
+              </a:rPr>
+              <a:t>• Profil: Rapider Anstieg von 20 auf 200 VUs innerhalb von 5s, gefolgt von 15s dauerhafter Lastspitze.
+</a:t>
+            </a:r>
+            <a:pPr indent="0" marL="0">
+              <a:lnSpc>
+                <a:spcPts val="1400"/>
+              </a:lnSpc>
+              <a:spcAft>
+                <a:spcPts val="600"/>
+              </a:spcAft>
+              <a:buNone/>
+            </a:pPr>
+            <a:r>
+              <a:rPr lang="en-US" sz="950" dirty="0">
+                <a:solidFill>
+                  <a:srgbClr val="1E293B"/>
+                </a:solidFill>
+                <a:latin typeface="Segoe UI" pitchFamily="34" charset="0"/>
+                <a:ea typeface="Segoe UI" pitchFamily="34" charset="-122"/>
+                <a:cs typeface="Segoe UI" pitchFamily="34" charset="-120"/>
+              </a:rPr>
+              <a:t>• Metrik (p95): Antwortzeit stieg kurz auf maximal 780 ms an, sank aber schnell auf ca. 150 ms.
+</a:t>
+            </a:r>
+            <a:pPr indent="0" marL="0">
+              <a:lnSpc>
+                <a:spcPts val="1400"/>
+              </a:lnSpc>
+              <a:buNone/>
+            </a:pPr>
+            <a:r>
+              <a:rPr lang="en-US" sz="950" dirty="0">
+                <a:solidFill>
+                  <a:srgbClr val="1E293B"/>
+                </a:solidFill>
+                <a:latin typeface="Segoe UI" pitchFamily="34" charset="0"/>
+                <a:ea typeface="Segoe UI" pitchFamily="34" charset="-122"/>
+                <a:cs typeface="Segoe UI" pitchFamily="34" charset="-120"/>
+              </a:rPr>
+              <a:t>• Fehlerrate: 0,00% (Kein Verbindungsabbruch).</a:t>
+            </a:r>
+            <a:endParaRPr lang="en-US" sz="950" dirty="0"/>
+          </a:p>
+        </p:txBody>
+      </p:sp>
+    </p:spTree>
+  </p:cSld>
+  <p:clrMapOvr>
+    <a:masterClrMapping/>
+  </p:clrMapOvr>
+</p:sld>
+</file>
+
+<file path=ppt/slides/slide7.xml><?xml version="1.0" encoding="utf-8"?>
+<p:sld xmlns:a="http://schemas.openxmlformats.org/drawingml/2006/main" xmlns:r="http://schemas.openxmlformats.org/officeDocument/2006/relationships" xmlns:p="http://schemas.openxmlformats.org/presentationml/2006/main">
+  <p:cSld name="Slide 7">
+    <p:bg>
+      <p:bgPr>
+        <a:solidFill>
+          <a:srgbClr val="0F172A"/>
+        </a:solidFill>
+      </p:bgPr>
+    </p:bg>
+    <p:spTree>
+      <p:nvGrpSpPr>
+        <p:cNvPr id="1" name=""/>
+        <p:cNvGrpSpPr/>
+        <p:nvPr/>
+      </p:nvGrpSpPr>
+      <p:grpSpPr>
+        <a:xfrm>
+          <a:off x="0" y="0"/>
+          <a:ext cx="0" cy="0"/>
+          <a:chOff x="0" y="0"/>
+          <a:chExt cx="0" cy="0"/>
+        </a:xfrm>
+      </p:grpSpPr>
+      <p:sp>
+        <p:nvSpPr>
+          <p:cNvPr id="2" name="Text 0"/>
+          <p:cNvSpPr/>
+          <p:nvPr/>
+        </p:nvSpPr>
+        <p:spPr>
+          <a:xfrm>
+            <a:off x="457200" y="731520"/>
+            <a:ext cx="8229600" cy="457200"/>
+          </a:xfrm>
+          <a:prstGeom prst="rect">
+            <a:avLst/>
+          </a:prstGeom>
+          <a:noFill/>
+          <a:ln/>
+        </p:spPr>
+        <p:txBody>
+          <a:bodyPr wrap="square" rtlCol="0" anchor="ctr"/>
+          <a:lstStyle/>
+          <a:p>
+            <a:pPr algn="ctr" indent="0" marL="0">
+              <a:buNone/>
+            </a:pPr>
+            <a:r>
+              <a:rPr lang="en-US" sz="2400" b="1" dirty="0">
+                <a:solidFill>
+                  <a:srgbClr val="F8FAFC"/>
+                </a:solidFill>
+                <a:latin typeface="Segoe UI" pitchFamily="34" charset="0"/>
+                <a:ea typeface="Segoe UI" pitchFamily="34" charset="-122"/>
+                <a:cs typeface="Segoe UI" pitchFamily="34" charset="-120"/>
+              </a:rPr>
+              <a:t>Fazit &amp; Projektergebnis</a:t>
+            </a:r>
+            <a:endParaRPr lang="en-US" sz="2400" dirty="0"/>
+          </a:p>
+        </p:txBody>
+      </p:sp>
+      <p:sp>
+        <p:nvSpPr>
+          <p:cNvPr id="3" name="Shape 1"/>
+          <p:cNvSpPr/>
+          <p:nvPr/>
+        </p:nvSpPr>
+        <p:spPr>
+          <a:xfrm>
+            <a:off x="3200400" y="1280160"/>
+            <a:ext cx="2743200" cy="27432"/>
+          </a:xfrm>
+          <a:prstGeom prst="rect">
+            <a:avLst/>
+          </a:prstGeom>
+          <a:solidFill>
+            <a:srgbClr val="10B981"/>
+          </a:solidFill>
+          <a:ln/>
+        </p:spPr>
+      </p:sp>
+      <p:sp>
+        <p:nvSpPr>
+          <p:cNvPr id="4" name="Shape 2"/>
+          <p:cNvSpPr/>
+          <p:nvPr/>
+        </p:nvSpPr>
+        <p:spPr>
+          <a:xfrm>
+            <a:off x="1371600" y="1645920"/>
+            <a:ext cx="6400800" cy="2926080"/>
+          </a:xfrm>
+          <a:prstGeom prst="rect">
+            <a:avLst/>
+          </a:prstGeom>
+          <a:solidFill>
+            <a:srgbClr val="1E293B"/>
+          </a:solidFill>
+          <a:ln/>
+        </p:spPr>
+      </p:sp>
+      <p:sp>
+        <p:nvSpPr>
+          <p:cNvPr id="5" name="Text 3"/>
+          <p:cNvSpPr/>
+          <p:nvPr/>
+        </p:nvSpPr>
+        <p:spPr>
+          <a:xfrm>
+            <a:off x="1645920" y="1828800"/>
+            <a:ext cx="5852160" cy="2560320"/>
+          </a:xfrm>
+          <a:prstGeom prst="rect">
+            <a:avLst/>
+          </a:prstGeom>
+          <a:noFill/>
+          <a:ln/>
+        </p:spPr>
+        <p:txBody>
+          <a:bodyPr wrap="square" rtlCol="0" anchor="ctr"/>
+          <a:lstStyle/>
+          <a:p>
+            <a:pPr indent="0" marL="0">
+              <a:lnSpc>
+                <a:spcPts val="1600"/>
+              </a:lnSpc>
+              <a:buNone/>
+            </a:pPr>
+            <a:r>
+              <a:rPr lang="en-US" sz="1100" dirty="0">
+                <a:solidFill>
+                  <a:srgbClr val="F8FAFC"/>
+                </a:solidFill>
+                <a:latin typeface="Segoe UI" pitchFamily="34" charset="0"/>
+                <a:ea typeface="Segoe UI" pitchFamily="34" charset="-122"/>
+                <a:cs typeface="Segoe UI" pitchFamily="34" charset="-120"/>
+              </a:rPr>
+              <a:t>✓ Erfolgreiche Jest-Migration (Karma komplett abgelöst)
+</a:t>
+            </a:r>
+            <a:pPr indent="0" marL="0">
+              <a:lnSpc>
+                <a:spcPts val="1600"/>
+              </a:lnSpc>
+              <a:buNone/>
+            </a:pPr>
+            <a:r>
+              <a:rPr lang="en-US" sz="1100" dirty="0">
+                <a:solidFill>
+                  <a:srgbClr val="F8FAFC"/>
+                </a:solidFill>
+                <a:latin typeface="Segoe UI" pitchFamily="34" charset="0"/>
+                <a:ea typeface="Segoe UI" pitchFamily="34" charset="-122"/>
+                <a:cs typeface="Segoe UI" pitchFamily="34" charset="-120"/>
+              </a:rPr>
+              <a:t>✓ Hohe Absicherung: 22 Tests insgesamt (genau 11 pro Person)
+</a:t>
+            </a:r>
+            <a:pPr indent="0" marL="0">
+              <a:lnSpc>
+                <a:spcPts val="1600"/>
+              </a:lnSpc>
+              <a:buNone/>
+            </a:pPr>
+            <a:r>
+              <a:rPr lang="en-US" sz="1100" dirty="0">
+                <a:solidFill>
+                  <a:srgbClr val="F8FAFC"/>
+                </a:solidFill>
+                <a:latin typeface="Segoe UI" pitchFamily="34" charset="0"/>
+                <a:ea typeface="Segoe UI" pitchFamily="34" charset="-122"/>
+                <a:cs typeface="Segoe UI" pitchFamily="34" charset="-120"/>
+              </a:rPr>
+              <a:t>✓ Stabile Playwright E2E-Tests durch API-Netzwerk-Mocking im CI
+</a:t>
+            </a:r>
+            <a:pPr indent="0" marL="0">
+              <a:lnSpc>
+                <a:spcPts val="1600"/>
+              </a:lnSpc>
+              <a:buNone/>
+            </a:pPr>
+            <a:r>
+              <a:rPr lang="en-US" sz="1100" dirty="0">
+                <a:solidFill>
+                  <a:srgbClr val="F8FAFC"/>
+                </a:solidFill>
+                <a:latin typeface="Segoe UI" pitchFamily="34" charset="0"/>
+                <a:ea typeface="Segoe UI" pitchFamily="34" charset="-122"/>
+                <a:cs typeface="Segoe UI" pitchFamily="34" charset="-120"/>
+              </a:rPr>
+              <a:t>✓ Performance-Nachweis: k6 Lasttests belegen Stabilität der API
+</a:t>
+            </a:r>
+            <a:pPr indent="0" marL="0">
+              <a:lnSpc>
+                <a:spcPts val="1600"/>
+              </a:lnSpc>
+              <a:buNone/>
+            </a:pPr>
+            <a:r>
+              <a:rPr lang="en-US" sz="1100" dirty="0">
+                <a:solidFill>
+                  <a:srgbClr val="F8FAFC"/>
+                </a:solidFill>
+                <a:latin typeface="Segoe UI" pitchFamily="34" charset="0"/>
+                <a:ea typeface="Segoe UI" pitchFamily="34" charset="-122"/>
+                <a:cs typeface="Segoe UI" pitchFamily="34" charset="-120"/>
+              </a:rPr>
+              <a:t>✓ Vollautomatische Validierung über GitHub Actions Build-Pipeline</a:t>
+            </a:r>
+            <a:endParaRPr lang="en-US" sz="1100" dirty="0"/>
           </a:p>
         </p:txBody>
       </p:sp>

--- a/PRESENTATION.pptx
+++ b/PRESENTATION.pptx
@@ -4,6 +4,9 @@
   <p:sldMasterIdLst>
     <p:sldMasterId id="2147483648" r:id="rId1"/>
   </p:sldMasterIdLst>
+  <p:notesMasterIdLst>
+    <p:notesMasterId r:id="rId9"/>
+  </p:notesMasterIdLst>
   <p:sldIdLst>
     <p:sldId id="256" r:id="rId2"/>
     <p:sldId id="257" r:id="rId3"/>
@@ -13,10 +16,7 @@
     <p:sldId id="261" r:id="rId7"/>
     <p:sldId id="262" r:id="rId8"/>
   </p:sldIdLst>
-  <p:notesMasterIdLst>
-    <p:notesMasterId r:id="rId9"/>
-  </p:notesMasterIdLst>
-  <p:sldSz cx="9144000" cy="5143500"/>
+  <p:sldSz cx="9144000" cy="5143500" type="screen16x9"/>
   <p:notesSz cx="5143500" cy="9144000"/>
   <p:defaultTextStyle>
     <a:lvl1pPr marL="0" algn="l" defTabSz="914400" rtl="0" eaLnBrk="1" latinLnBrk="0" hangingPunct="1">
@@ -110,6 +110,11 @@
       </a:defRPr>
     </a:lvl9pPr>
   </p:defaultTextStyle>
+  <p:extLst>
+    <p:ext uri="{EFAFB233-063F-42B5-8137-9DF3F51BA10A}">
+      <p15:sldGuideLst xmlns:p15="http://schemas.microsoft.com/office/powerpoint/2012/main"/>
+    </p:ext>
+  </p:extLst>
 </p:presentation>
 </file>
 
@@ -135,234 +140,10 @@
           <a:chExt cx="0" cy="0"/>
         </a:xfrm>
       </p:grpSpPr>
-      <p:sp>
-        <p:nvSpPr>
-          <p:cNvPr id="2" name="Header Placeholder 1"/>
-          <p:cNvSpPr>
-            <a:spLocks noGrp="1"/>
-          </p:cNvSpPr>
-          <p:nvPr>
-            <p:ph type="hdr" sz="quarter"/>
-          </p:nvPr>
-        </p:nvSpPr>
-        <p:spPr>
-          <a:xfrm>
-            <a:off x="0" y="0"/>
-            <a:ext cx="2971800" cy="458788"/>
-          </a:xfrm>
-          <a:prstGeom prst="rect">
-            <a:avLst/>
-          </a:prstGeom>
-        </p:spPr>
-        <p:txBody>
-          <a:bodyPr vert="horz" lIns="91440" tIns="45720" rIns="91440" bIns="45720" rtlCol="0"/>
-          <a:lstStyle>
-            <a:lvl1pPr algn="l">
-              <a:defRPr sz="1200"/>
-            </a:lvl1pPr>
-          </a:lstStyle>
-          <a:p>
-            <a:endParaRPr lang="en-US"/>
-          </a:p>
-        </p:txBody>
-      </p:sp>
-      <p:sp>
-        <p:nvSpPr>
-          <p:cNvPr id="3" name="Date Placeholder 2"/>
-          <p:cNvSpPr>
-            <a:spLocks noGrp="1"/>
-          </p:cNvSpPr>
-          <p:nvPr>
-            <p:ph type="dt" idx="1"/>
-          </p:nvPr>
-        </p:nvSpPr>
-        <p:spPr>
-          <a:xfrm>
-            <a:off x="3884613" y="0"/>
-            <a:ext cx="2971800" cy="458788"/>
-          </a:xfrm>
-          <a:prstGeom prst="rect">
-            <a:avLst/>
-          </a:prstGeom>
-        </p:spPr>
-        <p:txBody>
-          <a:bodyPr vert="horz" lIns="91440" tIns="45720" rIns="91440" bIns="45720" rtlCol="0"/>
-          <a:lstStyle>
-            <a:lvl1pPr algn="r">
-              <a:defRPr sz="1200"/>
-            </a:lvl1pPr>
-          </a:lstStyle>
-          <a:p>
-            <a:fld id="{5282F153-3F37-0F45-9E97-73ACFA13230C}" type="datetimeFigureOut">
-              <a:rPr lang="en-US"/>
-              <a:t>7/23/19</a:t>
-            </a:fld>
-            <a:endParaRPr lang="en-US"/>
-          </a:p>
-        </p:txBody>
-      </p:sp>
-      <p:sp>
-        <p:nvSpPr>
-          <p:cNvPr id="4" name="Slide Image Placeholder 3"/>
-          <p:cNvSpPr>
-            <a:spLocks noGrp="1" noRot="1" noChangeAspect="1"/>
-          </p:cNvSpPr>
-          <p:nvPr>
-            <p:ph type="sldImg" idx="2"/>
-          </p:nvPr>
-        </p:nvSpPr>
-        <p:spPr>
-          <a:xfrm>
-            <a:off x="685800" y="1143000"/>
-            <a:ext cx="5486400" cy="3086100"/>
-          </a:xfrm>
-          <a:prstGeom prst="rect">
-            <a:avLst/>
-          </a:prstGeom>
-          <a:noFill/>
-          <a:ln w="12700">
-            <a:solidFill>
-              <a:prstClr val="black"/>
-            </a:solidFill>
-          </a:ln>
-        </p:spPr>
-        <p:txBody>
-          <a:bodyPr vert="horz" lIns="91440" tIns="45720" rIns="91440" bIns="45720" rtlCol="0" anchor="ctr"/>
-          <a:lstStyle/>
-          <a:p>
-            <a:endParaRPr lang="en-US"/>
-          </a:p>
-        </p:txBody>
-      </p:sp>
-      <p:sp>
-        <p:nvSpPr>
-          <p:cNvPr id="5" name="Notes Placeholder 4"/>
-          <p:cNvSpPr>
-            <a:spLocks noGrp="1"/>
-          </p:cNvSpPr>
-          <p:nvPr>
-            <p:ph type="body" sz="quarter" idx="3"/>
-          </p:nvPr>
-        </p:nvSpPr>
-        <p:spPr>
-          <a:xfrm>
-            <a:off x="685800" y="4400550"/>
-            <a:ext cx="5486400" cy="3600450"/>
-          </a:xfrm>
-          <a:prstGeom prst="rect">
-            <a:avLst/>
-          </a:prstGeom>
-        </p:spPr>
-        <p:txBody>
-          <a:bodyPr vert="horz" lIns="91440" tIns="45720" rIns="91440" bIns="45720" rtlCol="0"/>
-          <a:lstStyle/>
-          <a:p>
-            <a:pPr lvl="0"/>
-            <a:r>
-              <a:rPr lang="en-US"/>
-              <a:t>Click to edit Master text styles</a:t>
-            </a:r>
-          </a:p>
-          <a:p>
-            <a:pPr lvl="1"/>
-            <a:r>
-              <a:rPr lang="en-US"/>
-              <a:t>Second level</a:t>
-            </a:r>
-          </a:p>
-          <a:p>
-            <a:pPr lvl="2"/>
-            <a:r>
-              <a:rPr lang="en-US"/>
-              <a:t>Third level</a:t>
-            </a:r>
-          </a:p>
-          <a:p>
-            <a:pPr lvl="3"/>
-            <a:r>
-              <a:rPr lang="en-US"/>
-              <a:t>Fourth level</a:t>
-            </a:r>
-          </a:p>
-          <a:p>
-            <a:pPr lvl="4"/>
-            <a:r>
-              <a:rPr lang="en-US"/>
-              <a:t>Fifth level</a:t>
-            </a:r>
-          </a:p>
-        </p:txBody>
-      </p:sp>
-      <p:sp>
-        <p:nvSpPr>
-          <p:cNvPr id="6" name="Footer Placeholder 5"/>
-          <p:cNvSpPr>
-            <a:spLocks noGrp="1"/>
-          </p:cNvSpPr>
-          <p:nvPr>
-            <p:ph type="ftr" sz="quarter" idx="4"/>
-          </p:nvPr>
-        </p:nvSpPr>
-        <p:spPr>
-          <a:xfrm>
-            <a:off x="0" y="8685213"/>
-            <a:ext cx="2971800" cy="458787"/>
-          </a:xfrm>
-          <a:prstGeom prst="rect">
-            <a:avLst/>
-          </a:prstGeom>
-        </p:spPr>
-        <p:txBody>
-          <a:bodyPr vert="horz" lIns="91440" tIns="45720" rIns="91440" bIns="45720" rtlCol="0" anchor="b"/>
-          <a:lstStyle>
-            <a:lvl1pPr algn="l">
-              <a:defRPr sz="1200"/>
-            </a:lvl1pPr>
-          </a:lstStyle>
-          <a:p>
-            <a:endParaRPr lang="en-US"/>
-          </a:p>
-        </p:txBody>
-      </p:sp>
-      <p:sp>
-        <p:nvSpPr>
-          <p:cNvPr id="7" name="Slide Number Placeholder 6"/>
-          <p:cNvSpPr>
-            <a:spLocks noGrp="1"/>
-          </p:cNvSpPr>
-          <p:nvPr>
-            <p:ph type="sldNum" sz="quarter" idx="5"/>
-          </p:nvPr>
-        </p:nvSpPr>
-        <p:spPr>
-          <a:xfrm>
-            <a:off x="3884613" y="8685213"/>
-            <a:ext cx="2971800" cy="458787"/>
-          </a:xfrm>
-          <a:prstGeom prst="rect">
-            <a:avLst/>
-          </a:prstGeom>
-        </p:spPr>
-        <p:txBody>
-          <a:bodyPr vert="horz" lIns="91440" tIns="45720" rIns="91440" bIns="45720" rtlCol="0" anchor="b"/>
-          <a:lstStyle>
-            <a:lvl1pPr algn="r">
-              <a:defRPr sz="1200"/>
-            </a:lvl1pPr>
-          </a:lstStyle>
-          <a:p>
-            <a:fld id="{CE5E9CC1-C706-0F49-92D6-E571CC5EEA8F}" type="slidenum">
-              <a:rPr lang="en-US"/>
-              <a:t>‹#›</a:t>
-            </a:fld>
-            <a:endParaRPr lang="en-US"/>
-          </a:p>
-        </p:txBody>
-      </p:sp>
     </p:spTree>
     <p:extLst>
       <p:ext uri="{BB962C8B-B14F-4D97-AF65-F5344CB8AC3E}">
-        <p14:creationId xmlns:p14="http://schemas.microsoft.com/office/powerpoint/2010/main" val="1024086991"/>
+        <p14:creationId xmlns:p14="http://schemas.microsoft.com/office/powerpoint/2010/main" val="3603862936"/>
       </p:ext>
     </p:extLst>
   </p:cSld>
@@ -506,10 +287,6 @@
           <a:bodyPr/>
           <a:lstStyle/>
           <a:p>
-            <a:r>
-              <a:rPr lang="en-US" dirty="0"/>
-              <a:t/>
-            </a:r>
             <a:endParaRPr lang="en-US" dirty="0"/>
           </a:p>
         </p:txBody>
@@ -594,10 +371,6 @@
           <a:bodyPr/>
           <a:lstStyle/>
           <a:p>
-            <a:r>
-              <a:rPr lang="en-US" dirty="0"/>
-              <a:t/>
-            </a:r>
             <a:endParaRPr lang="en-US" dirty="0"/>
           </a:p>
         </p:txBody>
@@ -682,10 +455,6 @@
           <a:bodyPr/>
           <a:lstStyle/>
           <a:p>
-            <a:r>
-              <a:rPr lang="en-US" dirty="0"/>
-              <a:t/>
-            </a:r>
             <a:endParaRPr lang="en-US" dirty="0"/>
           </a:p>
         </p:txBody>
@@ -770,10 +539,6 @@
           <a:bodyPr/>
           <a:lstStyle/>
           <a:p>
-            <a:r>
-              <a:rPr lang="en-US" dirty="0"/>
-              <a:t/>
-            </a:r>
             <a:endParaRPr lang="en-US" dirty="0"/>
           </a:p>
         </p:txBody>
@@ -858,10 +623,6 @@
           <a:bodyPr/>
           <a:lstStyle/>
           <a:p>
-            <a:r>
-              <a:rPr lang="en-US" dirty="0"/>
-              <a:t/>
-            </a:r>
             <a:endParaRPr lang="en-US" dirty="0"/>
           </a:p>
         </p:txBody>
@@ -946,10 +707,6 @@
           <a:bodyPr/>
           <a:lstStyle/>
           <a:p>
-            <a:r>
-              <a:rPr lang="en-US" dirty="0"/>
-              <a:t/>
-            </a:r>
             <a:endParaRPr lang="en-US" dirty="0"/>
           </a:p>
         </p:txBody>
@@ -1034,10 +791,6 @@
           <a:bodyPr/>
           <a:lstStyle/>
           <a:p>
-            <a:r>
-              <a:rPr lang="en-US" dirty="0"/>
-              <a:t/>
-            </a:r>
             <a:endParaRPr lang="en-US" dirty="0"/>
           </a:p>
         </p:txBody>
@@ -1111,6 +864,11 @@
 <file path=ppt/slideMasters/slideMaster1.xml><?xml version="1.0" encoding="utf-8"?>
 <p:sldMaster xmlns:a="http://schemas.openxmlformats.org/drawingml/2006/main" xmlns:r="http://schemas.openxmlformats.org/officeDocument/2006/relationships" xmlns:p="http://schemas.openxmlformats.org/presentationml/2006/main">
   <p:cSld>
+    <p:bg>
+      <p:bgRef idx="1001">
+        <a:schemeClr val="bg1"/>
+      </p:bgRef>
+    </p:bg>
     <p:spTree>
       <p:nvGrpSpPr>
         <p:cNvPr id="1" name=""/>
@@ -1393,6 +1151,7 @@
         <a:solidFill>
           <a:srgbClr val="0F172A"/>
         </a:solidFill>
+        <a:effectLst/>
       </p:bgPr>
     </p:bg>
     <p:spTree>
@@ -1430,7 +1189,7 @@
           <a:bodyPr wrap="square" rtlCol="0" anchor="ctr"/>
           <a:lstStyle/>
           <a:p>
-            <a:pPr algn="ctr" indent="0" marL="0">
+            <a:pPr marL="0" indent="0" algn="ctr">
               <a:buNone/>
             </a:pPr>
             <a:r>
@@ -1467,6 +1226,13 @@
           </a:solidFill>
           <a:ln/>
         </p:spPr>
+        <p:txBody>
+          <a:bodyPr/>
+          <a:lstStyle/>
+          <a:p>
+            <a:endParaRPr lang="de-DE"/>
+          </a:p>
+        </p:txBody>
       </p:sp>
       <p:sp>
         <p:nvSpPr>
@@ -1489,13 +1255,13 @@
           <a:bodyPr wrap="square" rtlCol="0" anchor="ctr"/>
           <a:lstStyle/>
           <a:p>
-            <a:pPr algn="ctr" indent="0" marL="0">
+            <a:pPr marL="0" indent="0" algn="ctr">
               <a:buNone/>
             </a:pPr>
             <a:r>
               <a:rPr lang="en-US" sz="1600" dirty="0">
                 <a:solidFill>
-                  <a:srgbClr val="3B82F6"/>
+                  <a:schemeClr val="bg1"/>
                 </a:solidFill>
                 <a:latin typeface="Segoe UI" pitchFamily="34" charset="0"/>
                 <a:ea typeface="Segoe UI" pitchFamily="34" charset="-122"/>
@@ -1503,7 +1269,11 @@
               </a:rPr>
               <a:t>Projektarbeit – Testdokumentation &amp; Setup</a:t>
             </a:r>
-            <a:endParaRPr lang="en-US" sz="1600" dirty="0"/>
+            <a:endParaRPr lang="en-US" sz="1600" dirty="0">
+              <a:solidFill>
+                <a:schemeClr val="bg1"/>
+              </a:solidFill>
+            </a:endParaRPr>
           </a:p>
         </p:txBody>
       </p:sp>
@@ -1528,7 +1298,7 @@
           <a:bodyPr wrap="square" rtlCol="0" anchor="ctr"/>
           <a:lstStyle/>
           <a:p>
-            <a:pPr algn="ctr" indent="0" marL="0">
+            <a:pPr marL="0" indent="0" algn="ctr">
               <a:lnSpc>
                 <a:spcPts val="1600"/>
               </a:lnSpc>
@@ -1548,7 +1318,7 @@
             <a:endParaRPr lang="en-US" sz="1200" dirty="0"/>
           </a:p>
           <a:p>
-            <a:pPr algn="ctr" indent="0" marL="0">
+            <a:pPr marL="0" indent="0" algn="ctr">
               <a:lnSpc>
                 <a:spcPts val="1600"/>
               </a:lnSpc>
@@ -1585,6 +1355,7 @@
         <a:solidFill>
           <a:srgbClr val="F8FAFC"/>
         </a:solidFill>
+        <a:effectLst/>
       </p:bgPr>
     </p:bg>
     <p:spTree>
@@ -1622,7 +1393,7 @@
           <a:bodyPr wrap="square" rtlCol="0" anchor="ctr"/>
           <a:lstStyle/>
           <a:p>
-            <a:pPr indent="0" marL="0">
+            <a:pPr marL="0" indent="0">
               <a:buNone/>
             </a:pPr>
             <a:r>
@@ -1659,6 +1430,13 @@
           </a:solidFill>
           <a:ln/>
         </p:spPr>
+        <p:txBody>
+          <a:bodyPr/>
+          <a:lstStyle/>
+          <a:p>
+            <a:endParaRPr lang="de-DE"/>
+          </a:p>
+        </p:txBody>
       </p:sp>
       <p:sp>
         <p:nvSpPr>
@@ -1684,6 +1462,13 @@
             <a:prstDash val="solid"/>
           </a:ln>
         </p:spPr>
+        <p:txBody>
+          <a:bodyPr/>
+          <a:lstStyle/>
+          <a:p>
+            <a:endParaRPr lang="de-DE"/>
+          </a:p>
+        </p:txBody>
       </p:sp>
       <p:sp>
         <p:nvSpPr>
@@ -1706,7 +1491,7 @@
           <a:bodyPr wrap="square" rtlCol="0" anchor="ctr"/>
           <a:lstStyle/>
           <a:p>
-            <a:pPr indent="0" marL="0">
+            <a:pPr marL="0" indent="0">
               <a:buNone/>
             </a:pPr>
             <a:r>
@@ -1745,7 +1530,7 @@
           <a:bodyPr wrap="square" rtlCol="0" anchor="ctr"/>
           <a:lstStyle/>
           <a:p>
-            <a:pPr indent="0" marL="0">
+            <a:pPr marL="0" indent="0">
               <a:lnSpc>
                 <a:spcPts val="1500"/>
               </a:lnSpc>
@@ -1764,9 +1549,108 @@
                 <a:cs typeface="Segoe UI" pitchFamily="34" charset="-120"/>
               </a:rPr>
               <a:t>• Angular 17 SPA (sakai-ng Dashboard-Template)
-</a:t>
-            </a:r>
-            <a:pPr indent="0" marL="0">
+• PrimeNG 17 &amp; PrimeFlex UI-Komponenten
+• RxJS für reaktive Datenströme &amp; HTTP-Requests
+• Jest für performante Unit- &amp; Integrationstests
+• Playwright für automatisierte E2E-Browsertests</a:t>
+            </a:r>
+            <a:endParaRPr lang="en-US" sz="1050" dirty="0"/>
+          </a:p>
+        </p:txBody>
+      </p:sp>
+      <p:sp>
+        <p:nvSpPr>
+          <p:cNvPr id="7" name="Shape 5"/>
+          <p:cNvSpPr/>
+          <p:nvPr/>
+        </p:nvSpPr>
+        <p:spPr>
+          <a:xfrm>
+            <a:off x="4754880" y="1097280"/>
+            <a:ext cx="3657600" cy="3474720"/>
+          </a:xfrm>
+          <a:prstGeom prst="rect">
+            <a:avLst/>
+          </a:prstGeom>
+          <a:solidFill>
+            <a:srgbClr val="FFFFFF"/>
+          </a:solidFill>
+          <a:ln w="12700">
+            <a:solidFill>
+              <a:srgbClr val="E2E8F0"/>
+            </a:solidFill>
+            <a:prstDash val="solid"/>
+          </a:ln>
+        </p:spPr>
+        <p:txBody>
+          <a:bodyPr/>
+          <a:lstStyle/>
+          <a:p>
+            <a:endParaRPr lang="de-DE"/>
+          </a:p>
+        </p:txBody>
+      </p:sp>
+      <p:sp>
+        <p:nvSpPr>
+          <p:cNvPr id="8" name="Text 6"/>
+          <p:cNvSpPr/>
+          <p:nvPr/>
+        </p:nvSpPr>
+        <p:spPr>
+          <a:xfrm>
+            <a:off x="4937760" y="1280160"/>
+            <a:ext cx="3291840" cy="274320"/>
+          </a:xfrm>
+          <a:prstGeom prst="rect">
+            <a:avLst/>
+          </a:prstGeom>
+          <a:noFill/>
+          <a:ln/>
+        </p:spPr>
+        <p:txBody>
+          <a:bodyPr wrap="square" rtlCol="0" anchor="ctr"/>
+          <a:lstStyle/>
+          <a:p>
+            <a:pPr marL="0" indent="0">
+              <a:buNone/>
+            </a:pPr>
+            <a:r>
+              <a:rPr lang="en-US" sz="1400" b="1" dirty="0">
+                <a:solidFill>
+                  <a:srgbClr val="1E3A8A"/>
+                </a:solidFill>
+                <a:latin typeface="Segoe UI" pitchFamily="34" charset="0"/>
+                <a:ea typeface="Segoe UI" pitchFamily="34" charset="-122"/>
+                <a:cs typeface="Segoe UI" pitchFamily="34" charset="-120"/>
+              </a:rPr>
+              <a:t>Backend &amp; Datenbank</a:t>
+            </a:r>
+            <a:endParaRPr lang="en-US" sz="1400" dirty="0"/>
+          </a:p>
+        </p:txBody>
+      </p:sp>
+      <p:sp>
+        <p:nvSpPr>
+          <p:cNvPr id="9" name="Text 7"/>
+          <p:cNvSpPr/>
+          <p:nvPr/>
+        </p:nvSpPr>
+        <p:spPr>
+          <a:xfrm>
+            <a:off x="4937760" y="1577340"/>
+            <a:ext cx="3291840" cy="2743200"/>
+          </a:xfrm>
+          <a:prstGeom prst="rect">
+            <a:avLst/>
+          </a:prstGeom>
+          <a:noFill/>
+          <a:ln/>
+        </p:spPr>
+        <p:txBody>
+          <a:bodyPr wrap="square" rtlCol="0" anchor="ctr"/>
+          <a:lstStyle/>
+          <a:p>
+            <a:pPr marL="0" indent="0">
               <a:lnSpc>
                 <a:spcPts val="1500"/>
               </a:lnSpc>
@@ -1784,18 +1668,22 @@
                 <a:ea typeface="Segoe UI" pitchFamily="34" charset="-122"/>
                 <a:cs typeface="Segoe UI" pitchFamily="34" charset="-120"/>
               </a:rPr>
-              <a:t>• PrimeNG 17 &amp; PrimeFlex UI-Komponenten
-</a:t>
-            </a:r>
-            <a:pPr indent="0" marL="0">
-              <a:lnSpc>
-                <a:spcPts val="1500"/>
-              </a:lnSpc>
-              <a:spcAft>
-                <a:spcPts val="800"/>
-              </a:spcAft>
-              <a:buNone/>
-            </a:pPr>
+              <a:t>• ASP.NET Core 8.0 Web-API (REST-Schnittstellen)
+• Entity Framework Core 6.0 mit SQL Server
+• SignalR für Echtzeit-Kommunikation &amp; Notifikationen
+• AutoMapper für </a:t>
+            </a:r>
+            <a:r>
+              <a:rPr lang="en-US" sz="1050" dirty="0" err="1">
+                <a:solidFill>
+                  <a:srgbClr val="1E293B"/>
+                </a:solidFill>
+                <a:latin typeface="Segoe UI" pitchFamily="34" charset="0"/>
+                <a:ea typeface="Segoe UI" pitchFamily="34" charset="-122"/>
+                <a:cs typeface="Segoe UI" pitchFamily="34" charset="-120"/>
+              </a:rPr>
+              <a:t>sauberes</a:t>
+            </a:r>
             <a:r>
               <a:rPr lang="en-US" sz="1050" dirty="0">
                 <a:solidFill>
@@ -1805,20 +1693,10 @@
                 <a:ea typeface="Segoe UI" pitchFamily="34" charset="-122"/>
                 <a:cs typeface="Segoe UI" pitchFamily="34" charset="-120"/>
               </a:rPr>
-              <a:t>• RxJS für reaktive Datenströme &amp; HTTP-Requests
-</a:t>
-            </a:r>
-            <a:pPr indent="0" marL="0">
-              <a:lnSpc>
-                <a:spcPts val="1500"/>
-              </a:lnSpc>
-              <a:spcAft>
-                <a:spcPts val="800"/>
-              </a:spcAft>
-              <a:buNone/>
-            </a:pPr>
-            <a:r>
-              <a:rPr lang="en-US" sz="1050" dirty="0">
+              <a:t> DTO-</a:t>
+            </a:r>
+            <a:r>
+              <a:rPr lang="en-US" sz="1050" dirty="0" err="1">
                 <a:solidFill>
                   <a:srgbClr val="1E293B"/>
                 </a:solidFill>
@@ -1826,215 +1704,7 @@
                 <a:ea typeface="Segoe UI" pitchFamily="34" charset="-122"/>
                 <a:cs typeface="Segoe UI" pitchFamily="34" charset="-120"/>
               </a:rPr>
-              <a:t>• Jest für performante Unit- &amp; Integrationstests
-</a:t>
-            </a:r>
-            <a:pPr indent="0" marL="0">
-              <a:lnSpc>
-                <a:spcPts val="1500"/>
-              </a:lnSpc>
-              <a:buNone/>
-            </a:pPr>
-            <a:r>
-              <a:rPr lang="en-US" sz="1050" dirty="0">
-                <a:solidFill>
-                  <a:srgbClr val="1E293B"/>
-                </a:solidFill>
-                <a:latin typeface="Segoe UI" pitchFamily="34" charset="0"/>
-                <a:ea typeface="Segoe UI" pitchFamily="34" charset="-122"/>
-                <a:cs typeface="Segoe UI" pitchFamily="34" charset="-120"/>
-              </a:rPr>
-              <a:t>• Playwright für automatisierte E2E-Browsertests</a:t>
-            </a:r>
-            <a:endParaRPr lang="en-US" sz="1050" dirty="0"/>
-          </a:p>
-        </p:txBody>
-      </p:sp>
-      <p:sp>
-        <p:nvSpPr>
-          <p:cNvPr id="7" name="Shape 5"/>
-          <p:cNvSpPr/>
-          <p:nvPr/>
-        </p:nvSpPr>
-        <p:spPr>
-          <a:xfrm>
-            <a:off x="4754880" y="1097280"/>
-            <a:ext cx="3657600" cy="3474720"/>
-          </a:xfrm>
-          <a:prstGeom prst="rect">
-            <a:avLst/>
-          </a:prstGeom>
-          <a:solidFill>
-            <a:srgbClr val="FFFFFF"/>
-          </a:solidFill>
-          <a:ln w="12700">
-            <a:solidFill>
-              <a:srgbClr val="E2E8F0"/>
-            </a:solidFill>
-            <a:prstDash val="solid"/>
-          </a:ln>
-        </p:spPr>
-      </p:sp>
-      <p:sp>
-        <p:nvSpPr>
-          <p:cNvPr id="8" name="Text 6"/>
-          <p:cNvSpPr/>
-          <p:nvPr/>
-        </p:nvSpPr>
-        <p:spPr>
-          <a:xfrm>
-            <a:off x="4937760" y="1280160"/>
-            <a:ext cx="3291840" cy="274320"/>
-          </a:xfrm>
-          <a:prstGeom prst="rect">
-            <a:avLst/>
-          </a:prstGeom>
-          <a:noFill/>
-          <a:ln/>
-        </p:spPr>
-        <p:txBody>
-          <a:bodyPr wrap="square" rtlCol="0" anchor="ctr"/>
-          <a:lstStyle/>
-          <a:p>
-            <a:pPr indent="0" marL="0">
-              <a:buNone/>
-            </a:pPr>
-            <a:r>
-              <a:rPr lang="en-US" sz="1400" b="1" dirty="0">
-                <a:solidFill>
-                  <a:srgbClr val="1E3A8A"/>
-                </a:solidFill>
-                <a:latin typeface="Segoe UI" pitchFamily="34" charset="0"/>
-                <a:ea typeface="Segoe UI" pitchFamily="34" charset="-122"/>
-                <a:cs typeface="Segoe UI" pitchFamily="34" charset="-120"/>
-              </a:rPr>
-              <a:t>Backend &amp; Datenbank</a:t>
-            </a:r>
-            <a:endParaRPr lang="en-US" sz="1400" dirty="0"/>
-          </a:p>
-        </p:txBody>
-      </p:sp>
-      <p:sp>
-        <p:nvSpPr>
-          <p:cNvPr id="9" name="Text 7"/>
-          <p:cNvSpPr/>
-          <p:nvPr/>
-        </p:nvSpPr>
-        <p:spPr>
-          <a:xfrm>
-            <a:off x="4937760" y="1645920"/>
-            <a:ext cx="3291840" cy="2743200"/>
-          </a:xfrm>
-          <a:prstGeom prst="rect">
-            <a:avLst/>
-          </a:prstGeom>
-          <a:noFill/>
-          <a:ln/>
-        </p:spPr>
-        <p:txBody>
-          <a:bodyPr wrap="square" rtlCol="0" anchor="ctr"/>
-          <a:lstStyle/>
-          <a:p>
-            <a:pPr indent="0" marL="0">
-              <a:lnSpc>
-                <a:spcPts val="1500"/>
-              </a:lnSpc>
-              <a:spcAft>
-                <a:spcPts val="800"/>
-              </a:spcAft>
-              <a:buNone/>
-            </a:pPr>
-            <a:r>
-              <a:rPr lang="en-US" sz="1050" dirty="0">
-                <a:solidFill>
-                  <a:srgbClr val="1E293B"/>
-                </a:solidFill>
-                <a:latin typeface="Segoe UI" pitchFamily="34" charset="0"/>
-                <a:ea typeface="Segoe UI" pitchFamily="34" charset="-122"/>
-                <a:cs typeface="Segoe UI" pitchFamily="34" charset="-120"/>
-              </a:rPr>
-              <a:t>• ASP.NET Core 8.0 Web-API (REST-Schnittstellen)
-</a:t>
-            </a:r>
-            <a:pPr indent="0" marL="0">
-              <a:lnSpc>
-                <a:spcPts val="1500"/>
-              </a:lnSpc>
-              <a:spcAft>
-                <a:spcPts val="800"/>
-              </a:spcAft>
-              <a:buNone/>
-            </a:pPr>
-            <a:r>
-              <a:rPr lang="en-US" sz="1050" dirty="0">
-                <a:solidFill>
-                  <a:srgbClr val="1E293B"/>
-                </a:solidFill>
-                <a:latin typeface="Segoe UI" pitchFamily="34" charset="0"/>
-                <a:ea typeface="Segoe UI" pitchFamily="34" charset="-122"/>
-                <a:cs typeface="Segoe UI" pitchFamily="34" charset="-120"/>
-              </a:rPr>
-              <a:t>• Entity Framework Core 6.0 mit SQL Server
-</a:t>
-            </a:r>
-            <a:pPr indent="0" marL="0">
-              <a:lnSpc>
-                <a:spcPts val="1500"/>
-              </a:lnSpc>
-              <a:spcAft>
-                <a:spcPts val="800"/>
-              </a:spcAft>
-              <a:buNone/>
-            </a:pPr>
-            <a:r>
-              <a:rPr lang="en-US" sz="1050" dirty="0">
-                <a:solidFill>
-                  <a:srgbClr val="1E293B"/>
-                </a:solidFill>
-                <a:latin typeface="Segoe UI" pitchFamily="34" charset="0"/>
-                <a:ea typeface="Segoe UI" pitchFamily="34" charset="-122"/>
-                <a:cs typeface="Segoe UI" pitchFamily="34" charset="-120"/>
-              </a:rPr>
-              <a:t>• SignalR für Echtzeit-Kommunikation &amp; Notifikationen
-</a:t>
-            </a:r>
-            <a:pPr indent="0" marL="0">
-              <a:lnSpc>
-                <a:spcPts val="1500"/>
-              </a:lnSpc>
-              <a:spcAft>
-                <a:spcPts val="800"/>
-              </a:spcAft>
-              <a:buNone/>
-            </a:pPr>
-            <a:r>
-              <a:rPr lang="en-US" sz="1050" dirty="0">
-                <a:solidFill>
-                  <a:srgbClr val="1E293B"/>
-                </a:solidFill>
-                <a:latin typeface="Segoe UI" pitchFamily="34" charset="0"/>
-                <a:ea typeface="Segoe UI" pitchFamily="34" charset="-122"/>
-                <a:cs typeface="Segoe UI" pitchFamily="34" charset="-120"/>
-              </a:rPr>
-              <a:t>• AutoMapper für sauberes DTO-Objektmapping
-</a:t>
-            </a:r>
-            <a:pPr indent="0" marL="0">
-              <a:lnSpc>
-                <a:spcPts val="1500"/>
-              </a:lnSpc>
-              <a:buNone/>
-            </a:pPr>
-            <a:r>
-              <a:rPr lang="en-US" sz="1050" dirty="0">
-                <a:solidFill>
-                  <a:srgbClr val="1E293B"/>
-                </a:solidFill>
-                <a:latin typeface="Segoe UI" pitchFamily="34" charset="0"/>
-                <a:ea typeface="Segoe UI" pitchFamily="34" charset="-122"/>
-                <a:cs typeface="Segoe UI" pitchFamily="34" charset="-120"/>
-              </a:rPr>
-              <a:t>• Repository-Muster (Unit of Work) zur Kapselung</a:t>
+              <a:t>Objektmapping</a:t>
             </a:r>
             <a:endParaRPr lang="en-US" sz="1050" dirty="0"/>
           </a:p>
@@ -2056,6 +1726,7 @@
         <a:solidFill>
           <a:srgbClr val="F8FAFC"/>
         </a:solidFill>
+        <a:effectLst/>
       </p:bgPr>
     </p:bg>
     <p:spTree>
@@ -2093,7 +1764,7 @@
           <a:bodyPr wrap="square" rtlCol="0" anchor="ctr"/>
           <a:lstStyle/>
           <a:p>
-            <a:pPr indent="0" marL="0">
+            <a:pPr marL="0" indent="0">
               <a:buNone/>
             </a:pPr>
             <a:r>
@@ -2130,6 +1801,13 @@
           </a:solidFill>
           <a:ln/>
         </p:spPr>
+        <p:txBody>
+          <a:bodyPr/>
+          <a:lstStyle/>
+          <a:p>
+            <a:endParaRPr lang="de-DE"/>
+          </a:p>
+        </p:txBody>
       </p:sp>
       <p:sp>
         <p:nvSpPr>
@@ -2155,6 +1833,13 @@
             <a:prstDash val="solid"/>
           </a:ln>
         </p:spPr>
+        <p:txBody>
+          <a:bodyPr/>
+          <a:lstStyle/>
+          <a:p>
+            <a:endParaRPr lang="de-DE"/>
+          </a:p>
+        </p:txBody>
       </p:sp>
       <p:sp>
         <p:nvSpPr>
@@ -2177,7 +1862,7 @@
           <a:bodyPr wrap="square" rtlCol="0" anchor="ctr"/>
           <a:lstStyle/>
           <a:p>
-            <a:pPr indent="0" marL="0">
+            <a:pPr marL="0" indent="0">
               <a:buNone/>
             </a:pPr>
             <a:r>
@@ -2216,7 +1901,7 @@
           <a:bodyPr wrap="square" rtlCol="0" anchor="ctr"/>
           <a:lstStyle/>
           <a:p>
-            <a:pPr indent="0" marL="0">
+            <a:pPr marL="0" indent="0">
               <a:lnSpc>
                 <a:spcPts val="1400"/>
               </a:lnSpc>
@@ -2236,7 +1921,7 @@
             <a:endParaRPr lang="en-US" sz="950" dirty="0"/>
           </a:p>
           <a:p>
-            <a:pPr indent="0" marL="0">
+            <a:pPr marL="0" indent="0">
               <a:lnSpc>
                 <a:spcPts val="1400"/>
               </a:lnSpc>
@@ -2281,6 +1966,13 @@
             <a:prstDash val="solid"/>
           </a:ln>
         </p:spPr>
+        <p:txBody>
+          <a:bodyPr/>
+          <a:lstStyle/>
+          <a:p>
+            <a:endParaRPr lang="de-DE"/>
+          </a:p>
+        </p:txBody>
       </p:sp>
       <p:sp>
         <p:nvSpPr>
@@ -2303,7 +1995,7 @@
           <a:bodyPr wrap="square" rtlCol="0" anchor="ctr"/>
           <a:lstStyle/>
           <a:p>
-            <a:pPr indent="0" marL="0">
+            <a:pPr marL="0" indent="0">
               <a:buNone/>
             </a:pPr>
             <a:r>
@@ -2342,7 +2034,7 @@
           <a:bodyPr wrap="square" rtlCol="0" anchor="ctr"/>
           <a:lstStyle/>
           <a:p>
-            <a:pPr indent="0" marL="0">
+            <a:pPr marL="0" indent="0">
               <a:lnSpc>
                 <a:spcPts val="1400"/>
               </a:lnSpc>
@@ -2362,7 +2054,7 @@
             <a:endParaRPr lang="en-US" sz="950" dirty="0"/>
           </a:p>
           <a:p>
-            <a:pPr indent="0" marL="0">
+            <a:pPr marL="0" indent="0">
               <a:lnSpc>
                 <a:spcPts val="1400"/>
               </a:lnSpc>
@@ -2407,6 +2099,13 @@
             <a:prstDash val="solid"/>
           </a:ln>
         </p:spPr>
+        <p:txBody>
+          <a:bodyPr/>
+          <a:lstStyle/>
+          <a:p>
+            <a:endParaRPr lang="de-DE"/>
+          </a:p>
+        </p:txBody>
       </p:sp>
       <p:sp>
         <p:nvSpPr>
@@ -2429,7 +2128,7 @@
           <a:bodyPr wrap="square" rtlCol="0" anchor="ctr"/>
           <a:lstStyle/>
           <a:p>
-            <a:pPr indent="0" marL="0">
+            <a:pPr marL="0" indent="0">
               <a:buNone/>
             </a:pPr>
             <a:r>
@@ -2468,7 +2167,7 @@
           <a:bodyPr wrap="square" rtlCol="0" anchor="ctr"/>
           <a:lstStyle/>
           <a:p>
-            <a:pPr indent="0" marL="0">
+            <a:pPr marL="0" indent="0">
               <a:lnSpc>
                 <a:spcPts val="1400"/>
               </a:lnSpc>
@@ -2488,7 +2187,7 @@
             <a:endParaRPr lang="en-US" sz="950" dirty="0"/>
           </a:p>
           <a:p>
-            <a:pPr indent="0" marL="0">
+            <a:pPr marL="0" indent="0">
               <a:lnSpc>
                 <a:spcPts val="1400"/>
               </a:lnSpc>
@@ -2533,6 +2232,13 @@
             <a:prstDash val="solid"/>
           </a:ln>
         </p:spPr>
+        <p:txBody>
+          <a:bodyPr/>
+          <a:lstStyle/>
+          <a:p>
+            <a:endParaRPr lang="de-DE"/>
+          </a:p>
+        </p:txBody>
       </p:sp>
       <p:sp>
         <p:nvSpPr>
@@ -2555,7 +2261,7 @@
           <a:bodyPr wrap="square" rtlCol="0" anchor="ctr"/>
           <a:lstStyle/>
           <a:p>
-            <a:pPr indent="0" marL="0">
+            <a:pPr marL="0" indent="0">
               <a:buNone/>
             </a:pPr>
             <a:r>
@@ -2594,7 +2300,7 @@
           <a:bodyPr wrap="square" rtlCol="0" anchor="ctr"/>
           <a:lstStyle/>
           <a:p>
-            <a:pPr indent="0" marL="0">
+            <a:pPr marL="0" indent="0">
               <a:lnSpc>
                 <a:spcPts val="1400"/>
               </a:lnSpc>
@@ -2614,7 +2320,7 @@
             <a:endParaRPr lang="en-US" sz="950" dirty="0"/>
           </a:p>
           <a:p>
-            <a:pPr indent="0" marL="0">
+            <a:pPr marL="0" indent="0">
               <a:lnSpc>
                 <a:spcPts val="1400"/>
               </a:lnSpc>
@@ -2654,6 +2360,13 @@
           </a:solidFill>
           <a:ln/>
         </p:spPr>
+        <p:txBody>
+          <a:bodyPr/>
+          <a:lstStyle/>
+          <a:p>
+            <a:endParaRPr lang="de-DE"/>
+          </a:p>
+        </p:txBody>
       </p:sp>
       <p:sp>
         <p:nvSpPr>
@@ -2676,13 +2389,13 @@
           <a:bodyPr wrap="square" rtlCol="0" anchor="ctr"/>
           <a:lstStyle/>
           <a:p>
-            <a:pPr algn="ctr" indent="0" marL="0">
+            <a:pPr marL="0" indent="0" algn="ctr">
               <a:buNone/>
             </a:pPr>
             <a:r>
               <a:rPr lang="en-US" sz="1100" b="1" dirty="0">
                 <a:solidFill>
-                  <a:srgbClr val="10B981"/>
+                  <a:schemeClr val="bg1"/>
                 </a:solidFill>
                 <a:latin typeface="Segoe UI" pitchFamily="34" charset="0"/>
                 <a:ea typeface="Segoe UI" pitchFamily="34" charset="-122"/>
@@ -2690,7 +2403,11 @@
               </a:rPr>
               <a:t>✓ Jeder Entwickler deckt genau 11 Tests ab (Gesamtzahl: 22 Tests)</a:t>
             </a:r>
-            <a:endParaRPr lang="en-US" sz="1100" dirty="0"/>
+            <a:endParaRPr lang="en-US" sz="1100" dirty="0">
+              <a:solidFill>
+                <a:schemeClr val="bg1"/>
+              </a:solidFill>
+            </a:endParaRPr>
           </a:p>
         </p:txBody>
       </p:sp>
@@ -2710,6 +2427,7 @@
         <a:solidFill>
           <a:srgbClr val="F8FAFC"/>
         </a:solidFill>
+        <a:effectLst/>
       </p:bgPr>
     </p:bg>
     <p:spTree>
@@ -2747,7 +2465,7 @@
           <a:bodyPr wrap="square" rtlCol="0" anchor="ctr"/>
           <a:lstStyle/>
           <a:p>
-            <a:pPr indent="0" marL="0">
+            <a:pPr marL="0" indent="0">
               <a:buNone/>
             </a:pPr>
             <a:r>
@@ -2784,6 +2502,13 @@
           </a:solidFill>
           <a:ln/>
         </p:spPr>
+        <p:txBody>
+          <a:bodyPr/>
+          <a:lstStyle/>
+          <a:p>
+            <a:endParaRPr lang="de-DE"/>
+          </a:p>
+        </p:txBody>
       </p:sp>
       <p:sp>
         <p:nvSpPr>
@@ -2809,6 +2534,13 @@
             <a:prstDash val="solid"/>
           </a:ln>
         </p:spPr>
+        <p:txBody>
+          <a:bodyPr/>
+          <a:lstStyle/>
+          <a:p>
+            <a:endParaRPr lang="de-DE"/>
+          </a:p>
+        </p:txBody>
       </p:sp>
       <p:sp>
         <p:nvSpPr>
@@ -2831,7 +2563,7 @@
           <a:bodyPr wrap="square" rtlCol="0" anchor="ctr"/>
           <a:lstStyle/>
           <a:p>
-            <a:pPr indent="0" marL="0">
+            <a:pPr marL="0" indent="0">
               <a:buNone/>
             </a:pPr>
             <a:r>
@@ -2870,7 +2602,7 @@
           <a:bodyPr wrap="square" rtlCol="0" anchor="ctr"/>
           <a:lstStyle/>
           <a:p>
-            <a:pPr indent="0" marL="0">
+            <a:pPr marL="0" indent="0">
               <a:lnSpc>
                 <a:spcPts val="1400"/>
               </a:lnSpc>
@@ -2889,9 +2621,105 @@
                 <a:cs typeface="Segoe UI" pitchFamily="34" charset="-120"/>
               </a:rPr>
               <a:t>• Karma/Jasmine vollständig aus Angular entfernt.
-</a:t>
-            </a:r>
-            <a:pPr indent="0" marL="0">
+• Testläufe nativ in Node.js unter Verwendung eines schnellen jsdom (virtuelles DOM).</a:t>
+            </a:r>
+            <a:endParaRPr lang="en-US" sz="950" dirty="0"/>
+          </a:p>
+        </p:txBody>
+      </p:sp>
+      <p:sp>
+        <p:nvSpPr>
+          <p:cNvPr id="7" name="Shape 5"/>
+          <p:cNvSpPr/>
+          <p:nvPr/>
+        </p:nvSpPr>
+        <p:spPr>
+          <a:xfrm>
+            <a:off x="3355848" y="1097280"/>
+            <a:ext cx="2432304" cy="3474720"/>
+          </a:xfrm>
+          <a:prstGeom prst="rect">
+            <a:avLst/>
+          </a:prstGeom>
+          <a:solidFill>
+            <a:srgbClr val="FFFFFF"/>
+          </a:solidFill>
+          <a:ln w="12700">
+            <a:solidFill>
+              <a:srgbClr val="E2E8F0"/>
+            </a:solidFill>
+            <a:prstDash val="solid"/>
+          </a:ln>
+        </p:spPr>
+        <p:txBody>
+          <a:bodyPr/>
+          <a:lstStyle/>
+          <a:p>
+            <a:endParaRPr lang="de-DE"/>
+          </a:p>
+        </p:txBody>
+      </p:sp>
+      <p:sp>
+        <p:nvSpPr>
+          <p:cNvPr id="8" name="Text 6"/>
+          <p:cNvSpPr/>
+          <p:nvPr/>
+        </p:nvSpPr>
+        <p:spPr>
+          <a:xfrm>
+            <a:off x="3493008" y="1280160"/>
+            <a:ext cx="2157984" cy="274320"/>
+          </a:xfrm>
+          <a:prstGeom prst="rect">
+            <a:avLst/>
+          </a:prstGeom>
+          <a:noFill/>
+          <a:ln/>
+        </p:spPr>
+        <p:txBody>
+          <a:bodyPr wrap="square" rtlCol="0" anchor="ctr"/>
+          <a:lstStyle/>
+          <a:p>
+            <a:pPr marL="0" indent="0">
+              <a:buNone/>
+            </a:pPr>
+            <a:r>
+              <a:rPr lang="en-US" sz="1300" b="1" dirty="0">
+                <a:solidFill>
+                  <a:srgbClr val="1E3A8A"/>
+                </a:solidFill>
+                <a:latin typeface="Segoe UI" pitchFamily="34" charset="0"/>
+                <a:ea typeface="Segoe UI" pitchFamily="34" charset="-122"/>
+                <a:cs typeface="Segoe UI" pitchFamily="34" charset="-120"/>
+              </a:rPr>
+              <a:t>2. Playwright E2E</a:t>
+            </a:r>
+            <a:endParaRPr lang="en-US" sz="1300" dirty="0"/>
+          </a:p>
+        </p:txBody>
+      </p:sp>
+      <p:sp>
+        <p:nvSpPr>
+          <p:cNvPr id="9" name="Text 7"/>
+          <p:cNvSpPr/>
+          <p:nvPr/>
+        </p:nvSpPr>
+        <p:spPr>
+          <a:xfrm>
+            <a:off x="3493008" y="1338943"/>
+            <a:ext cx="2157984" cy="3050177"/>
+          </a:xfrm>
+          <a:prstGeom prst="rect">
+            <a:avLst/>
+          </a:prstGeom>
+          <a:noFill/>
+          <a:ln/>
+        </p:spPr>
+        <p:txBody>
+          <a:bodyPr wrap="square" rtlCol="0" anchor="ctr"/>
+          <a:lstStyle/>
+          <a:p>
+            <a:pPr marL="0" indent="0">
               <a:lnSpc>
                 <a:spcPts val="1400"/>
               </a:lnSpc>
@@ -2909,15 +2737,19 @@
                 <a:ea typeface="Segoe UI" pitchFamily="34" charset="-122"/>
                 <a:cs typeface="Segoe UI" pitchFamily="34" charset="-120"/>
               </a:rPr>
-              <a:t>• Testläufe nativ in Node.js unter Verwendung eines schnellen jsdom (virtuelles DOM).
-</a:t>
-            </a:r>
-            <a:pPr indent="0" marL="0">
-              <a:lnSpc>
-                <a:spcPts val="1400"/>
-              </a:lnSpc>
-              <a:buNone/>
-            </a:pPr>
+              <a:t>• Führt E2E-Tests in echten Browsern (Chromium/Firefox/</a:t>
+            </a:r>
+            <a:r>
+              <a:rPr lang="en-US" sz="950" dirty="0" err="1">
+                <a:solidFill>
+                  <a:srgbClr val="1E293B"/>
+                </a:solidFill>
+                <a:latin typeface="Segoe UI" pitchFamily="34" charset="0"/>
+                <a:ea typeface="Segoe UI" pitchFamily="34" charset="-122"/>
+                <a:cs typeface="Segoe UI" pitchFamily="34" charset="-120"/>
+              </a:rPr>
+              <a:t>Webkit</a:t>
+            </a:r>
             <a:r>
               <a:rPr lang="en-US" sz="950" dirty="0">
                 <a:solidFill>
@@ -2927,7 +2759,30 @@
                 <a:ea typeface="Segoe UI" pitchFamily="34" charset="-122"/>
                 <a:cs typeface="Segoe UI" pitchFamily="34" charset="-120"/>
               </a:rPr>
-              <a:t>• Signifikante Reduktion der lokalen CI-Ausführungszeit.</a:t>
+              <a:t>) </a:t>
+            </a:r>
+            <a:r>
+              <a:rPr lang="en-US" sz="950" dirty="0" err="1">
+                <a:solidFill>
+                  <a:srgbClr val="1E293B"/>
+                </a:solidFill>
+                <a:latin typeface="Segoe UI" pitchFamily="34" charset="0"/>
+                <a:ea typeface="Segoe UI" pitchFamily="34" charset="-122"/>
+                <a:cs typeface="Segoe UI" pitchFamily="34" charset="-120"/>
+              </a:rPr>
+              <a:t>aus.</a:t>
+            </a:r>
+            <a:r>
+              <a:rPr lang="en-US" sz="950" dirty="0">
+                <a:solidFill>
+                  <a:srgbClr val="1E293B"/>
+                </a:solidFill>
+                <a:latin typeface="Segoe UI" pitchFamily="34" charset="0"/>
+                <a:ea typeface="Segoe UI" pitchFamily="34" charset="-122"/>
+                <a:cs typeface="Segoe UI" pitchFamily="34" charset="-120"/>
+              </a:rPr>
+              <a:t>
+• Vollständig isolierte Kontexte pro Browserinstanz.</a:t>
             </a:r>
             <a:endParaRPr lang="en-US" sz="950" dirty="0"/>
           </a:p>
@@ -2935,14 +2790,14 @@
       </p:sp>
       <p:sp>
         <p:nvSpPr>
-          <p:cNvPr id="7" name="Shape 5"/>
-          <p:cNvSpPr/>
-          <p:nvPr/>
-        </p:nvSpPr>
-        <p:spPr>
-          <a:xfrm>
-            <a:off x="3355848" y="1097280"/>
-            <a:ext cx="2432304" cy="3474720"/>
+          <p:cNvPr id="10" name="Shape 8"/>
+          <p:cNvSpPr/>
+          <p:nvPr/>
+        </p:nvSpPr>
+        <p:spPr>
+          <a:xfrm>
+            <a:off x="5971032" y="1097280"/>
+            <a:ext cx="2441448" cy="3474720"/>
           </a:xfrm>
           <a:prstGeom prst="rect">
             <a:avLst/>
@@ -2957,17 +2812,24 @@
             <a:prstDash val="solid"/>
           </a:ln>
         </p:spPr>
-      </p:sp>
-      <p:sp>
-        <p:nvSpPr>
-          <p:cNvPr id="8" name="Text 6"/>
-          <p:cNvSpPr/>
-          <p:nvPr/>
-        </p:nvSpPr>
-        <p:spPr>
-          <a:xfrm>
-            <a:off x="3493008" y="1280160"/>
-            <a:ext cx="2157984" cy="274320"/>
+        <p:txBody>
+          <a:bodyPr/>
+          <a:lstStyle/>
+          <a:p>
+            <a:endParaRPr lang="de-DE"/>
+          </a:p>
+        </p:txBody>
+      </p:sp>
+      <p:sp>
+        <p:nvSpPr>
+          <p:cNvPr id="11" name="Text 9"/>
+          <p:cNvSpPr/>
+          <p:nvPr/>
+        </p:nvSpPr>
+        <p:spPr>
+          <a:xfrm>
+            <a:off x="6108192" y="1280160"/>
+            <a:ext cx="2167128" cy="274320"/>
           </a:xfrm>
           <a:prstGeom prst="rect">
             <a:avLst/>
@@ -2979,7 +2841,7 @@
           <a:bodyPr wrap="square" rtlCol="0" anchor="ctr"/>
           <a:lstStyle/>
           <a:p>
-            <a:pPr indent="0" marL="0">
+            <a:pPr marL="0" indent="0">
               <a:buNone/>
             </a:pPr>
             <a:r>
@@ -2991,7 +2853,7 @@
                 <a:ea typeface="Segoe UI" pitchFamily="34" charset="-122"/>
                 <a:cs typeface="Segoe UI" pitchFamily="34" charset="-120"/>
               </a:rPr>
-              <a:t>2. Playwright E2E</a:t>
+              <a:t>3. k6 Lasttests</a:t>
             </a:r>
             <a:endParaRPr lang="en-US" sz="1300" dirty="0"/>
           </a:p>
@@ -2999,14 +2861,14 @@
       </p:sp>
       <p:sp>
         <p:nvSpPr>
-          <p:cNvPr id="9" name="Text 7"/>
-          <p:cNvSpPr/>
-          <p:nvPr/>
-        </p:nvSpPr>
-        <p:spPr>
-          <a:xfrm>
-            <a:off x="3493008" y="1645920"/>
-            <a:ext cx="2157984" cy="2743200"/>
+          <p:cNvPr id="12" name="Text 10"/>
+          <p:cNvSpPr/>
+          <p:nvPr/>
+        </p:nvSpPr>
+        <p:spPr>
+          <a:xfrm>
+            <a:off x="6108192" y="1280160"/>
+            <a:ext cx="2167128" cy="3108960"/>
           </a:xfrm>
           <a:prstGeom prst="rect">
             <a:avLst/>
@@ -3018,7 +2880,7 @@
           <a:bodyPr wrap="square" rtlCol="0" anchor="ctr"/>
           <a:lstStyle/>
           <a:p>
-            <a:pPr indent="0" marL="0">
+            <a:pPr marL="0" indent="0">
               <a:lnSpc>
                 <a:spcPts val="1400"/>
               </a:lnSpc>
@@ -3036,18 +2898,19 @@
                 <a:ea typeface="Segoe UI" pitchFamily="34" charset="-122"/>
                 <a:cs typeface="Segoe UI" pitchFamily="34" charset="-120"/>
               </a:rPr>
-              <a:t>• Führt E2E-Tests in echten Browsern (Chromium/Firefox/Webkit) aus.
-</a:t>
-            </a:r>
-            <a:pPr indent="0" marL="0">
-              <a:lnSpc>
-                <a:spcPts val="1400"/>
-              </a:lnSpc>
-              <a:spcAft>
-                <a:spcPts val="800"/>
-              </a:spcAft>
-              <a:buNone/>
-            </a:pPr>
+              <a:t>• Lastprofile in modernem ES6 JavaScript </a:t>
+            </a:r>
+            <a:r>
+              <a:rPr lang="en-US" sz="950" dirty="0" err="1">
+                <a:solidFill>
+                  <a:srgbClr val="1E293B"/>
+                </a:solidFill>
+                <a:latin typeface="Segoe UI" pitchFamily="34" charset="0"/>
+                <a:ea typeface="Segoe UI" pitchFamily="34" charset="-122"/>
+                <a:cs typeface="Segoe UI" pitchFamily="34" charset="-120"/>
+              </a:rPr>
+              <a:t>formulierbar</a:t>
+            </a:r>
             <a:r>
               <a:rPr lang="en-US" sz="950" dirty="0">
                 <a:solidFill>
@@ -3057,173 +2920,8 @@
                 <a:ea typeface="Segoe UI" pitchFamily="34" charset="-122"/>
                 <a:cs typeface="Segoe UI" pitchFamily="34" charset="-120"/>
               </a:rPr>
-              <a:t>• Auto-waiting verringert instabile Testläufe ("Flakiness").
-</a:t>
-            </a:r>
-            <a:pPr indent="0" marL="0">
-              <a:lnSpc>
-                <a:spcPts val="1400"/>
-              </a:lnSpc>
-              <a:buNone/>
-            </a:pPr>
-            <a:r>
-              <a:rPr lang="en-US" sz="950" dirty="0">
-                <a:solidFill>
-                  <a:srgbClr val="1E293B"/>
-                </a:solidFill>
-                <a:latin typeface="Segoe UI" pitchFamily="34" charset="0"/>
-                <a:ea typeface="Segoe UI" pitchFamily="34" charset="-122"/>
-                <a:cs typeface="Segoe UI" pitchFamily="34" charset="-120"/>
-              </a:rPr>
-              <a:t>• Vollständig isolierte Kontexte pro Browserinstanz.</a:t>
-            </a:r>
-            <a:endParaRPr lang="en-US" sz="950" dirty="0"/>
-          </a:p>
-        </p:txBody>
-      </p:sp>
-      <p:sp>
-        <p:nvSpPr>
-          <p:cNvPr id="10" name="Shape 8"/>
-          <p:cNvSpPr/>
-          <p:nvPr/>
-        </p:nvSpPr>
-        <p:spPr>
-          <a:xfrm>
-            <a:off x="5971032" y="1097280"/>
-            <a:ext cx="2441448" cy="3474720"/>
-          </a:xfrm>
-          <a:prstGeom prst="rect">
-            <a:avLst/>
-          </a:prstGeom>
-          <a:solidFill>
-            <a:srgbClr val="FFFFFF"/>
-          </a:solidFill>
-          <a:ln w="12700">
-            <a:solidFill>
-              <a:srgbClr val="E2E8F0"/>
-            </a:solidFill>
-            <a:prstDash val="solid"/>
-          </a:ln>
-        </p:spPr>
-      </p:sp>
-      <p:sp>
-        <p:nvSpPr>
-          <p:cNvPr id="11" name="Text 9"/>
-          <p:cNvSpPr/>
-          <p:nvPr/>
-        </p:nvSpPr>
-        <p:spPr>
-          <a:xfrm>
-            <a:off x="6108192" y="1280160"/>
-            <a:ext cx="2167128" cy="274320"/>
-          </a:xfrm>
-          <a:prstGeom prst="rect">
-            <a:avLst/>
-          </a:prstGeom>
-          <a:noFill/>
-          <a:ln/>
-        </p:spPr>
-        <p:txBody>
-          <a:bodyPr wrap="square" rtlCol="0" anchor="ctr"/>
-          <a:lstStyle/>
-          <a:p>
-            <a:pPr indent="0" marL="0">
-              <a:buNone/>
-            </a:pPr>
-            <a:r>
-              <a:rPr lang="en-US" sz="1300" b="1" dirty="0">
-                <a:solidFill>
-                  <a:srgbClr val="1E3A8A"/>
-                </a:solidFill>
-                <a:latin typeface="Segoe UI" pitchFamily="34" charset="0"/>
-                <a:ea typeface="Segoe UI" pitchFamily="34" charset="-122"/>
-                <a:cs typeface="Segoe UI" pitchFamily="34" charset="-120"/>
-              </a:rPr>
-              <a:t>3. k6 Lasttests</a:t>
-            </a:r>
-            <a:endParaRPr lang="en-US" sz="1300" dirty="0"/>
-          </a:p>
-        </p:txBody>
-      </p:sp>
-      <p:sp>
-        <p:nvSpPr>
-          <p:cNvPr id="12" name="Text 10"/>
-          <p:cNvSpPr/>
-          <p:nvPr/>
-        </p:nvSpPr>
-        <p:spPr>
-          <a:xfrm>
-            <a:off x="6108192" y="1645920"/>
-            <a:ext cx="2167128" cy="2743200"/>
-          </a:xfrm>
-          <a:prstGeom prst="rect">
-            <a:avLst/>
-          </a:prstGeom>
-          <a:noFill/>
-          <a:ln/>
-        </p:spPr>
-        <p:txBody>
-          <a:bodyPr wrap="square" rtlCol="0" anchor="ctr"/>
-          <a:lstStyle/>
-          <a:p>
-            <a:pPr indent="0" marL="0">
-              <a:lnSpc>
-                <a:spcPts val="1400"/>
-              </a:lnSpc>
-              <a:spcAft>
-                <a:spcPts val="800"/>
-              </a:spcAft>
-              <a:buNone/>
-            </a:pPr>
-            <a:r>
-              <a:rPr lang="en-US" sz="950" dirty="0">
-                <a:solidFill>
-                  <a:srgbClr val="1E293B"/>
-                </a:solidFill>
-                <a:latin typeface="Segoe UI" pitchFamily="34" charset="0"/>
-                <a:ea typeface="Segoe UI" pitchFamily="34" charset="-122"/>
-                <a:cs typeface="Segoe UI" pitchFamily="34" charset="-120"/>
-              </a:rPr>
-              <a:t>• Lastprofile in modernem ES6 JavaScript formulierbar.
-</a:t>
-            </a:r>
-            <a:pPr indent="0" marL="0">
-              <a:lnSpc>
-                <a:spcPts val="1400"/>
-              </a:lnSpc>
-              <a:spcAft>
-                <a:spcPts val="800"/>
-              </a:spcAft>
-              <a:buNone/>
-            </a:pPr>
-            <a:r>
-              <a:rPr lang="en-US" sz="950" dirty="0">
-                <a:solidFill>
-                  <a:srgbClr val="1E293B"/>
-                </a:solidFill>
-                <a:latin typeface="Segoe UI" pitchFamily="34" charset="0"/>
-                <a:ea typeface="Segoe UI" pitchFamily="34" charset="-122"/>
-                <a:cs typeface="Segoe UI" pitchFamily="34" charset="-120"/>
-              </a:rPr>
-              <a:t>• Minimale CPU- und RAM-Last dank effizienter Go-Engine.
-</a:t>
-            </a:r>
-            <a:pPr indent="0" marL="0">
-              <a:lnSpc>
-                <a:spcPts val="1400"/>
-              </a:lnSpc>
-              <a:buNone/>
-            </a:pPr>
-            <a:r>
-              <a:rPr lang="en-US" sz="950" dirty="0">
-                <a:solidFill>
-                  <a:srgbClr val="1E293B"/>
-                </a:solidFill>
-                <a:latin typeface="Segoe UI" pitchFamily="34" charset="0"/>
-                <a:ea typeface="Segoe UI" pitchFamily="34" charset="-122"/>
-                <a:cs typeface="Segoe UI" pitchFamily="34" charset="-120"/>
-              </a:rPr>
-              <a:t>• Schnelle Konfiguration von Metrik-Schwellwerten (Thresholds).</a:t>
+              <a:t>.
+• Schnelle Konfiguration von Metrik-Schwellwerten (Thresholds).</a:t>
             </a:r>
             <a:endParaRPr lang="en-US" sz="950" dirty="0"/>
           </a:p>
@@ -3245,6 +2943,7 @@
         <a:solidFill>
           <a:srgbClr val="F8FAFC"/>
         </a:solidFill>
+        <a:effectLst/>
       </p:bgPr>
     </p:bg>
     <p:spTree>
@@ -3282,7 +2981,7 @@
           <a:bodyPr wrap="square" rtlCol="0" anchor="ctr"/>
           <a:lstStyle/>
           <a:p>
-            <a:pPr indent="0" marL="0">
+            <a:pPr marL="0" indent="0">
               <a:buNone/>
             </a:pPr>
             <a:r>
@@ -3294,7 +2993,7 @@
                 <a:ea typeface="Segoe UI" pitchFamily="34" charset="-122"/>
                 <a:cs typeface="Segoe UI" pitchFamily="34" charset="-120"/>
               </a:rPr>
-              <a:t>Test-Isolation &amp; CI/CD Pipeline</a:t>
+              <a:t>Test-Isolation</a:t>
             </a:r>
             <a:endParaRPr lang="en-US" sz="2000" dirty="0"/>
           </a:p>
@@ -3319,6 +3018,13 @@
           </a:solidFill>
           <a:ln/>
         </p:spPr>
+        <p:txBody>
+          <a:bodyPr/>
+          <a:lstStyle/>
+          <a:p>
+            <a:endParaRPr lang="de-DE"/>
+          </a:p>
+        </p:txBody>
       </p:sp>
       <p:sp>
         <p:nvSpPr>
@@ -3329,7 +3035,7 @@
         <p:spPr>
           <a:xfrm>
             <a:off x="731520" y="1097280"/>
-            <a:ext cx="3657600" cy="3474720"/>
+            <a:ext cx="7680960" cy="3474720"/>
           </a:xfrm>
           <a:prstGeom prst="rect">
             <a:avLst/>
@@ -3344,6 +3050,13 @@
             <a:prstDash val="solid"/>
           </a:ln>
         </p:spPr>
+        <p:txBody>
+          <a:bodyPr/>
+          <a:lstStyle/>
+          <a:p>
+            <a:endParaRPr lang="de-DE"/>
+          </a:p>
+        </p:txBody>
       </p:sp>
       <p:sp>
         <p:nvSpPr>
@@ -3366,7 +3079,7 @@
           <a:bodyPr wrap="square" rtlCol="0" anchor="ctr"/>
           <a:lstStyle/>
           <a:p>
-            <a:pPr indent="0" marL="0">
+            <a:pPr marL="0" indent="0">
               <a:buNone/>
             </a:pPr>
             <a:r>
@@ -3392,8 +3105,8 @@
         </p:nvSpPr>
         <p:spPr>
           <a:xfrm>
-            <a:off x="914400" y="1645920"/>
-            <a:ext cx="3291840" cy="2743200"/>
+            <a:off x="914400" y="1554480"/>
+            <a:ext cx="5656217" cy="2834639"/>
           </a:xfrm>
           <a:prstGeom prst="rect">
             <a:avLst/>
@@ -3405,7 +3118,7 @@
           <a:bodyPr wrap="square" rtlCol="0" anchor="ctr"/>
           <a:lstStyle/>
           <a:p>
-            <a:pPr indent="0" marL="0">
+            <a:pPr marL="0" indent="0">
               <a:lnSpc>
                 <a:spcPts val="1400"/>
               </a:lnSpc>
@@ -3424,195 +3137,96 @@
                 <a:cs typeface="Segoe UI" pitchFamily="34" charset="-120"/>
               </a:rPr>
               <a:t>• Angular HttpClient-Mocks per HttpClientTestingModule fangen Netzwerkaufrufe ab.
-</a:t>
-            </a:r>
-            <a:pPr indent="0" marL="0">
+• Playwright fängt API-Aufrufe mit page.route() ab und liefert statische JSON-Mocks, um unabhängig von DB-Schreibzugriffen zu </a:t>
+            </a:r>
+            <a:r>
+              <a:rPr lang="en-US" sz="950" dirty="0" err="1">
+                <a:solidFill>
+                  <a:srgbClr val="1E293B"/>
+                </a:solidFill>
+                <a:latin typeface="Segoe UI" pitchFamily="34" charset="0"/>
+                <a:ea typeface="Segoe UI" pitchFamily="34" charset="-122"/>
+                <a:cs typeface="Segoe UI" pitchFamily="34" charset="-120"/>
+              </a:rPr>
+              <a:t>bleiben</a:t>
+            </a:r>
+            <a:r>
+              <a:rPr lang="en-US" sz="950" dirty="0">
+                <a:solidFill>
+                  <a:srgbClr val="1E293B"/>
+                </a:solidFill>
+                <a:latin typeface="Segoe UI" pitchFamily="34" charset="0"/>
+                <a:ea typeface="Segoe UI" pitchFamily="34" charset="-122"/>
+                <a:cs typeface="Segoe UI" pitchFamily="34" charset="-120"/>
+              </a:rPr>
+              <a:t>.</a:t>
+            </a:r>
+          </a:p>
+          <a:p>
+            <a:pPr>
               <a:lnSpc>
                 <a:spcPts val="1400"/>
               </a:lnSpc>
               <a:spcAft>
                 <a:spcPts val="800"/>
               </a:spcAft>
-              <a:buNone/>
             </a:pPr>
             <a:r>
-              <a:rPr lang="en-US" sz="950" dirty="0">
-                <a:solidFill>
-                  <a:srgbClr val="1E293B"/>
-                </a:solidFill>
-                <a:latin typeface="Segoe UI" pitchFamily="34" charset="0"/>
-                <a:ea typeface="Segoe UI" pitchFamily="34" charset="-122"/>
-                <a:cs typeface="Segoe UI" pitchFamily="34" charset="-120"/>
-              </a:rPr>
-              <a:t>• NO_ERRORS_SCHEMA blendet unbekannte UI-Tags aus und erlaubt fokussierte Tests.
-</a:t>
-            </a:r>
-            <a:pPr indent="0" marL="0">
-              <a:lnSpc>
-                <a:spcPts val="1400"/>
-              </a:lnSpc>
-              <a:buNone/>
-            </a:pPr>
-            <a:r>
-              <a:rPr lang="en-US" sz="950" dirty="0">
-                <a:solidFill>
-                  <a:srgbClr val="1E293B"/>
-                </a:solidFill>
-                <a:latin typeface="Segoe UI" pitchFamily="34" charset="0"/>
-                <a:ea typeface="Segoe UI" pitchFamily="34" charset="-122"/>
-                <a:cs typeface="Segoe UI" pitchFamily="34" charset="-120"/>
-              </a:rPr>
-              <a:t>• Playwright fängt API-Aufrufe mit page.route() ab und liefert statische JSON-Mocks, um unabhängig von DB-Schreibzugriffen zu bleiben.</a:t>
-            </a:r>
-            <a:endParaRPr lang="en-US" sz="950" dirty="0"/>
-          </a:p>
-        </p:txBody>
-      </p:sp>
-      <p:sp>
-        <p:nvSpPr>
-          <p:cNvPr id="7" name="Shape 5"/>
-          <p:cNvSpPr/>
-          <p:nvPr/>
-        </p:nvSpPr>
-        <p:spPr>
-          <a:xfrm>
-            <a:off x="4754880" y="1097280"/>
-            <a:ext cx="3657600" cy="3474720"/>
-          </a:xfrm>
-          <a:prstGeom prst="rect">
-            <a:avLst/>
-          </a:prstGeom>
-          <a:solidFill>
-            <a:srgbClr val="FFFFFF"/>
-          </a:solidFill>
-          <a:ln w="12700">
-            <a:solidFill>
-              <a:srgbClr val="E2E8F0"/>
-            </a:solidFill>
-            <a:prstDash val="solid"/>
-          </a:ln>
-        </p:spPr>
-      </p:sp>
-      <p:sp>
-        <p:nvSpPr>
-          <p:cNvPr id="8" name="Text 6"/>
-          <p:cNvSpPr/>
-          <p:nvPr/>
-        </p:nvSpPr>
-        <p:spPr>
-          <a:xfrm>
-            <a:off x="4937760" y="1280160"/>
-            <a:ext cx="3291840" cy="274320"/>
-          </a:xfrm>
-          <a:prstGeom prst="rect">
-            <a:avLst/>
-          </a:prstGeom>
-          <a:noFill/>
-          <a:ln/>
-        </p:spPr>
-        <p:txBody>
-          <a:bodyPr wrap="square" rtlCol="0" anchor="ctr"/>
-          <a:lstStyle/>
-          <a:p>
-            <a:pPr indent="0" marL="0">
-              <a:buNone/>
-            </a:pPr>
-            <a:r>
-              <a:rPr lang="en-US" sz="1400" b="1" dirty="0">
-                <a:solidFill>
-                  <a:srgbClr val="1E3A8A"/>
-                </a:solidFill>
-                <a:latin typeface="Segoe UI" pitchFamily="34" charset="0"/>
-                <a:ea typeface="Segoe UI" pitchFamily="34" charset="-122"/>
-                <a:cs typeface="Segoe UI" pitchFamily="34" charset="-120"/>
-              </a:rPr>
-              <a:t>GitHub Actions CI Pipeline</a:t>
-            </a:r>
-            <a:endParaRPr lang="en-US" sz="1400" dirty="0"/>
-          </a:p>
-        </p:txBody>
-      </p:sp>
-      <p:sp>
-        <p:nvSpPr>
-          <p:cNvPr id="9" name="Text 7"/>
-          <p:cNvSpPr/>
-          <p:nvPr/>
-        </p:nvSpPr>
-        <p:spPr>
-          <a:xfrm>
-            <a:off x="4937760" y="1645920"/>
-            <a:ext cx="3291840" cy="2743200"/>
-          </a:xfrm>
-          <a:prstGeom prst="rect">
-            <a:avLst/>
-          </a:prstGeom>
-          <a:noFill/>
-          <a:ln/>
-        </p:spPr>
-        <p:txBody>
-          <a:bodyPr wrap="square" rtlCol="0" anchor="ctr"/>
-          <a:lstStyle/>
-          <a:p>
-            <a:pPr indent="0" marL="0">
+              <a:rPr lang="de-DE" sz="950" dirty="0">
+                <a:latin typeface="Segoe UI" panose="020B0502040204020203" pitchFamily="34" charset="0"/>
+                <a:cs typeface="Segoe UI" panose="020B0502040204020203" pitchFamily="34" charset="0"/>
+              </a:rPr>
+              <a:t>• Jest-Spies &amp; Mock-Services simulieren Routing und Business-</a:t>
+            </a:r>
+            <a:r>
+              <a:rPr lang="de-DE" sz="950" dirty="0" err="1">
+                <a:latin typeface="Segoe UI" panose="020B0502040204020203" pitchFamily="34" charset="0"/>
+                <a:cs typeface="Segoe UI" panose="020B0502040204020203" pitchFamily="34" charset="0"/>
+              </a:rPr>
+              <a:t>Logic</a:t>
+            </a:r>
+            <a:r>
+              <a:rPr lang="de-DE" sz="950" dirty="0">
+                <a:latin typeface="Segoe UI" panose="020B0502040204020203" pitchFamily="34" charset="0"/>
+                <a:cs typeface="Segoe UI" panose="020B0502040204020203" pitchFamily="34" charset="0"/>
+              </a:rPr>
+              <a:t> in Komponententests.</a:t>
+            </a:r>
+          </a:p>
+          <a:p>
+            <a:pPr>
               <a:lnSpc>
                 <a:spcPts val="1400"/>
               </a:lnSpc>
               <a:spcAft>
                 <a:spcPts val="800"/>
               </a:spcAft>
-              <a:buNone/>
             </a:pPr>
             <a:r>
-              <a:rPr lang="en-US" sz="950" dirty="0">
-                <a:solidFill>
-                  <a:srgbClr val="1E293B"/>
-                </a:solidFill>
-                <a:latin typeface="Segoe UI" pitchFamily="34" charset="0"/>
-                <a:ea typeface="Segoe UI" pitchFamily="34" charset="-122"/>
-                <a:cs typeface="Segoe UI" pitchFamily="34" charset="-120"/>
-              </a:rPr>
-              <a:t>• Automatische Ausführung der Unit-, Integrations- und Playwright-Tests bei Push &amp; PR.
-</a:t>
-            </a:r>
-            <a:pPr indent="0" marL="0">
+              <a:rPr lang="de-DE" sz="950" dirty="0">
+                <a:latin typeface="Segoe UI" panose="020B0502040204020203" pitchFamily="34" charset="0"/>
+                <a:cs typeface="Segoe UI" panose="020B0502040204020203" pitchFamily="34" charset="0"/>
+              </a:rPr>
+              <a:t>• Mock-Services isolieren Komponenten von API- und Routing-Abhängigkeiten.</a:t>
+            </a:r>
+            <a:endParaRPr lang="en-US" sz="950" dirty="0">
+              <a:latin typeface="Segoe UI" panose="020B0502040204020203" pitchFamily="34" charset="0"/>
+              <a:cs typeface="Segoe UI" panose="020B0502040204020203" pitchFamily="34" charset="0"/>
+            </a:endParaRPr>
+          </a:p>
+          <a:p>
+            <a:pPr>
               <a:lnSpc>
                 <a:spcPts val="1400"/>
               </a:lnSpc>
               <a:spcAft>
                 <a:spcPts val="800"/>
               </a:spcAft>
-              <a:buNone/>
             </a:pPr>
-            <a:r>
-              <a:rPr lang="en-US" sz="950" dirty="0">
-                <a:solidFill>
-                  <a:srgbClr val="1E293B"/>
-                </a:solidFill>
-                <a:latin typeface="Segoe UI" pitchFamily="34" charset="0"/>
-                <a:ea typeface="Segoe UI" pitchFamily="34" charset="-122"/>
-                <a:cs typeface="Segoe UI" pitchFamily="34" charset="-120"/>
-              </a:rPr>
-              <a:t>• Playwright-webServer startet den Angular-Server automatisch im Hintergrund und beendet ihn nach Testende.
-</a:t>
-            </a:r>
-            <a:pPr indent="0" marL="0">
-              <a:lnSpc>
-                <a:spcPts val="1400"/>
-              </a:lnSpc>
-              <a:buNone/>
-            </a:pPr>
-            <a:r>
-              <a:rPr lang="en-US" sz="950" dirty="0">
-                <a:solidFill>
-                  <a:srgbClr val="1E293B"/>
-                </a:solidFill>
-                <a:latin typeface="Segoe UI" pitchFamily="34" charset="0"/>
-                <a:ea typeface="Segoe UI" pitchFamily="34" charset="-122"/>
-                <a:cs typeface="Segoe UI" pitchFamily="34" charset="-120"/>
-              </a:rPr>
-              <a:t>• Fehlerhafte Tests blockieren den Merge-Vorgang und sichern eine robuste Codebasis.</a:t>
-            </a:r>
-            <a:endParaRPr lang="en-US" sz="950" dirty="0"/>
+            <a:endParaRPr lang="de-DE" sz="950" dirty="0">
+              <a:latin typeface="Segoe UI" panose="020B0502040204020203" pitchFamily="34" charset="0"/>
+              <a:cs typeface="Segoe UI" panose="020B0502040204020203" pitchFamily="34" charset="0"/>
+            </a:endParaRPr>
           </a:p>
         </p:txBody>
       </p:sp>
@@ -3632,6 +3246,7 @@
         <a:solidFill>
           <a:srgbClr val="F8FAFC"/>
         </a:solidFill>
+        <a:effectLst/>
       </p:bgPr>
     </p:bg>
     <p:spTree>
@@ -3669,7 +3284,7 @@
           <a:bodyPr wrap="square" rtlCol="0" anchor="ctr"/>
           <a:lstStyle/>
           <a:p>
-            <a:pPr indent="0" marL="0">
+            <a:pPr marL="0" indent="0">
               <a:buNone/>
             </a:pPr>
             <a:r>
@@ -3706,6 +3321,13 @@
           </a:solidFill>
           <a:ln/>
         </p:spPr>
+        <p:txBody>
+          <a:bodyPr/>
+          <a:lstStyle/>
+          <a:p>
+            <a:endParaRPr lang="de-DE"/>
+          </a:p>
+        </p:txBody>
       </p:sp>
       <p:sp>
         <p:nvSpPr>
@@ -3731,6 +3353,13 @@
             <a:prstDash val="solid"/>
           </a:ln>
         </p:spPr>
+        <p:txBody>
+          <a:bodyPr/>
+          <a:lstStyle/>
+          <a:p>
+            <a:endParaRPr lang="de-DE"/>
+          </a:p>
+        </p:txBody>
       </p:sp>
       <p:sp>
         <p:nvSpPr>
@@ -3753,7 +3382,7 @@
           <a:bodyPr wrap="square" rtlCol="0" anchor="ctr"/>
           <a:lstStyle/>
           <a:p>
-            <a:pPr indent="0" marL="0">
+            <a:pPr marL="0" indent="0">
               <a:buNone/>
             </a:pPr>
             <a:r>
@@ -3792,7 +3421,7 @@
           <a:bodyPr wrap="square" rtlCol="0" anchor="ctr"/>
           <a:lstStyle/>
           <a:p>
-            <a:pPr indent="0" marL="0">
+            <a:pPr marL="0" indent="0">
               <a:lnSpc>
                 <a:spcPts val="1400"/>
               </a:lnSpc>
@@ -3811,9 +3440,107 @@
                 <a:cs typeface="Segoe UI" pitchFamily="34" charset="-120"/>
               </a:rPr>
               <a:t>• Endpoint: GET /api/course/getAll
-</a:t>
-            </a:r>
-            <a:pPr indent="0" marL="0">
+• Profil: Linearer Anstieg auf 50 VUs (10s), danach 15s Haltephase unter Volllast, gefolgt von 5s Cool-down.
+• Metrik (p95): Reaktionsgeschwindigkeit konstant bei ca. 120 ms (Threshold lag bei &lt; 500 ms).
+• Fehlerrate: 0,00% (Alle Anfragen bestanden).</a:t>
+            </a:r>
+            <a:endParaRPr lang="en-US" sz="950" dirty="0"/>
+          </a:p>
+        </p:txBody>
+      </p:sp>
+      <p:sp>
+        <p:nvSpPr>
+          <p:cNvPr id="7" name="Shape 5"/>
+          <p:cNvSpPr/>
+          <p:nvPr/>
+        </p:nvSpPr>
+        <p:spPr>
+          <a:xfrm>
+            <a:off x="4754880" y="1097280"/>
+            <a:ext cx="3657600" cy="3474720"/>
+          </a:xfrm>
+          <a:prstGeom prst="rect">
+            <a:avLst/>
+          </a:prstGeom>
+          <a:solidFill>
+            <a:srgbClr val="FFFFFF"/>
+          </a:solidFill>
+          <a:ln w="12700">
+            <a:solidFill>
+              <a:srgbClr val="E2E8F0"/>
+            </a:solidFill>
+            <a:prstDash val="solid"/>
+          </a:ln>
+        </p:spPr>
+        <p:txBody>
+          <a:bodyPr/>
+          <a:lstStyle/>
+          <a:p>
+            <a:endParaRPr lang="de-DE"/>
+          </a:p>
+        </p:txBody>
+      </p:sp>
+      <p:sp>
+        <p:nvSpPr>
+          <p:cNvPr id="8" name="Text 6"/>
+          <p:cNvSpPr/>
+          <p:nvPr/>
+        </p:nvSpPr>
+        <p:spPr>
+          <a:xfrm>
+            <a:off x="4937760" y="1280160"/>
+            <a:ext cx="3291840" cy="274320"/>
+          </a:xfrm>
+          <a:prstGeom prst="rect">
+            <a:avLst/>
+          </a:prstGeom>
+          <a:noFill/>
+          <a:ln/>
+        </p:spPr>
+        <p:txBody>
+          <a:bodyPr wrap="square" rtlCol="0" anchor="ctr"/>
+          <a:lstStyle/>
+          <a:p>
+            <a:pPr marL="0" indent="0">
+              <a:buNone/>
+            </a:pPr>
+            <a:r>
+              <a:rPr lang="en-US" sz="1300" b="1" dirty="0">
+                <a:solidFill>
+                  <a:srgbClr val="1E3A8A"/>
+                </a:solidFill>
+                <a:latin typeface="Segoe UI" pitchFamily="34" charset="0"/>
+                <a:ea typeface="Segoe UI" pitchFamily="34" charset="-122"/>
+                <a:cs typeface="Segoe UI" pitchFamily="34" charset="-120"/>
+              </a:rPr>
+              <a:t>2. Exam Spike Test (Ljundrim Ganiji)</a:t>
+            </a:r>
+            <a:endParaRPr lang="en-US" sz="1300" dirty="0"/>
+          </a:p>
+        </p:txBody>
+      </p:sp>
+      <p:sp>
+        <p:nvSpPr>
+          <p:cNvPr id="9" name="Text 7"/>
+          <p:cNvSpPr/>
+          <p:nvPr/>
+        </p:nvSpPr>
+        <p:spPr>
+          <a:xfrm>
+            <a:off x="4937760" y="1645920"/>
+            <a:ext cx="3291840" cy="2743200"/>
+          </a:xfrm>
+          <a:prstGeom prst="rect">
+            <a:avLst/>
+          </a:prstGeom>
+          <a:noFill/>
+          <a:ln/>
+        </p:spPr>
+        <p:txBody>
+          <a:bodyPr wrap="square" rtlCol="0" anchor="ctr"/>
+          <a:lstStyle/>
+          <a:p>
+            <a:pPr marL="0" indent="0">
               <a:lnSpc>
                 <a:spcPts val="1400"/>
               </a:lnSpc>
@@ -3831,18 +3558,22 @@
                 <a:ea typeface="Segoe UI" pitchFamily="34" charset="-122"/>
                 <a:cs typeface="Segoe UI" pitchFamily="34" charset="-120"/>
               </a:rPr>
-              <a:t>• Profil: Linearer Anstieg auf 50 VUs (10s), danach 15s Haltephase unter Volllast, gefolgt von 5s Cool-down.
-</a:t>
-            </a:r>
-            <a:pPr indent="0" marL="0">
-              <a:lnSpc>
-                <a:spcPts val="1400"/>
-              </a:lnSpc>
-              <a:spcAft>
-                <a:spcPts val="600"/>
-              </a:spcAft>
-              <a:buNone/>
-            </a:pPr>
+              <a:t>• Endpoint: POST /api/exam/submitAnswers
+• Profil: Rapider Anstieg von 20 auf 200 VUs innerhalb von 5s, gefolgt von 15s dauerhafter Lastspitze.
+• Metrik (p95): Antwortzeit stieg kurz auf maximal 780 ms an, sank aber schnell auf ca. 150 ms.
+• </a:t>
+            </a:r>
+            <a:r>
+              <a:rPr lang="en-US" sz="950" dirty="0" err="1">
+                <a:solidFill>
+                  <a:srgbClr val="1E293B"/>
+                </a:solidFill>
+                <a:latin typeface="Segoe UI" pitchFamily="34" charset="0"/>
+                <a:ea typeface="Segoe UI" pitchFamily="34" charset="-122"/>
+                <a:cs typeface="Segoe UI" pitchFamily="34" charset="-120"/>
+              </a:rPr>
+              <a:t>Fehlerrate</a:t>
+            </a:r>
             <a:r>
               <a:rPr lang="en-US" sz="950" dirty="0">
                 <a:solidFill>
@@ -3852,194 +3583,7 @@
                 <a:ea typeface="Segoe UI" pitchFamily="34" charset="-122"/>
                 <a:cs typeface="Segoe UI" pitchFamily="34" charset="-120"/>
               </a:rPr>
-              <a:t>• Metrik (p95): Reaktionsgeschwindigkeit konstant bei ca. 120 ms (Threshold lag bei &lt; 500 ms).
-</a:t>
-            </a:r>
-            <a:pPr indent="0" marL="0">
-              <a:lnSpc>
-                <a:spcPts val="1400"/>
-              </a:lnSpc>
-              <a:buNone/>
-            </a:pPr>
-            <a:r>
-              <a:rPr lang="en-US" sz="950" dirty="0">
-                <a:solidFill>
-                  <a:srgbClr val="1E293B"/>
-                </a:solidFill>
-                <a:latin typeface="Segoe UI" pitchFamily="34" charset="0"/>
-                <a:ea typeface="Segoe UI" pitchFamily="34" charset="-122"/>
-                <a:cs typeface="Segoe UI" pitchFamily="34" charset="-120"/>
-              </a:rPr>
-              <a:t>• Fehlerrate: 0,00% (Alle Anfragen bestanden).</a:t>
-            </a:r>
-            <a:endParaRPr lang="en-US" sz="950" dirty="0"/>
-          </a:p>
-        </p:txBody>
-      </p:sp>
-      <p:sp>
-        <p:nvSpPr>
-          <p:cNvPr id="7" name="Shape 5"/>
-          <p:cNvSpPr/>
-          <p:nvPr/>
-        </p:nvSpPr>
-        <p:spPr>
-          <a:xfrm>
-            <a:off x="4754880" y="1097280"/>
-            <a:ext cx="3657600" cy="3474720"/>
-          </a:xfrm>
-          <a:prstGeom prst="rect">
-            <a:avLst/>
-          </a:prstGeom>
-          <a:solidFill>
-            <a:srgbClr val="FFFFFF"/>
-          </a:solidFill>
-          <a:ln w="12700">
-            <a:solidFill>
-              <a:srgbClr val="E2E8F0"/>
-            </a:solidFill>
-            <a:prstDash val="solid"/>
-          </a:ln>
-        </p:spPr>
-      </p:sp>
-      <p:sp>
-        <p:nvSpPr>
-          <p:cNvPr id="8" name="Text 6"/>
-          <p:cNvSpPr/>
-          <p:nvPr/>
-        </p:nvSpPr>
-        <p:spPr>
-          <a:xfrm>
-            <a:off x="4937760" y="1280160"/>
-            <a:ext cx="3291840" cy="274320"/>
-          </a:xfrm>
-          <a:prstGeom prst="rect">
-            <a:avLst/>
-          </a:prstGeom>
-          <a:noFill/>
-          <a:ln/>
-        </p:spPr>
-        <p:txBody>
-          <a:bodyPr wrap="square" rtlCol="0" anchor="ctr"/>
-          <a:lstStyle/>
-          <a:p>
-            <a:pPr indent="0" marL="0">
-              <a:buNone/>
-            </a:pPr>
-            <a:r>
-              <a:rPr lang="en-US" sz="1300" b="1" dirty="0">
-                <a:solidFill>
-                  <a:srgbClr val="1E3A8A"/>
-                </a:solidFill>
-                <a:latin typeface="Segoe UI" pitchFamily="34" charset="0"/>
-                <a:ea typeface="Segoe UI" pitchFamily="34" charset="-122"/>
-                <a:cs typeface="Segoe UI" pitchFamily="34" charset="-120"/>
-              </a:rPr>
-              <a:t>2. Exam Spike Test (Ljundrim Ganiji)</a:t>
-            </a:r>
-            <a:endParaRPr lang="en-US" sz="1300" dirty="0"/>
-          </a:p>
-        </p:txBody>
-      </p:sp>
-      <p:sp>
-        <p:nvSpPr>
-          <p:cNvPr id="9" name="Text 7"/>
-          <p:cNvSpPr/>
-          <p:nvPr/>
-        </p:nvSpPr>
-        <p:spPr>
-          <a:xfrm>
-            <a:off x="4937760" y="1645920"/>
-            <a:ext cx="3291840" cy="2743200"/>
-          </a:xfrm>
-          <a:prstGeom prst="rect">
-            <a:avLst/>
-          </a:prstGeom>
-          <a:noFill/>
-          <a:ln/>
-        </p:spPr>
-        <p:txBody>
-          <a:bodyPr wrap="square" rtlCol="0" anchor="ctr"/>
-          <a:lstStyle/>
-          <a:p>
-            <a:pPr indent="0" marL="0">
-              <a:lnSpc>
-                <a:spcPts val="1400"/>
-              </a:lnSpc>
-              <a:spcAft>
-                <a:spcPts val="600"/>
-              </a:spcAft>
-              <a:buNone/>
-            </a:pPr>
-            <a:r>
-              <a:rPr lang="en-US" sz="950" dirty="0">
-                <a:solidFill>
-                  <a:srgbClr val="1E293B"/>
-                </a:solidFill>
-                <a:latin typeface="Segoe UI" pitchFamily="34" charset="0"/>
-                <a:ea typeface="Segoe UI" pitchFamily="34" charset="-122"/>
-                <a:cs typeface="Segoe UI" pitchFamily="34" charset="-120"/>
-              </a:rPr>
-              <a:t>• Endpoint: POST /api/exam/submitAnswers
-</a:t>
-            </a:r>
-            <a:pPr indent="0" marL="0">
-              <a:lnSpc>
-                <a:spcPts val="1400"/>
-              </a:lnSpc>
-              <a:spcAft>
-                <a:spcPts val="600"/>
-              </a:spcAft>
-              <a:buNone/>
-            </a:pPr>
-            <a:r>
-              <a:rPr lang="en-US" sz="950" dirty="0">
-                <a:solidFill>
-                  <a:srgbClr val="1E293B"/>
-                </a:solidFill>
-                <a:latin typeface="Segoe UI" pitchFamily="34" charset="0"/>
-                <a:ea typeface="Segoe UI" pitchFamily="34" charset="-122"/>
-                <a:cs typeface="Segoe UI" pitchFamily="34" charset="-120"/>
-              </a:rPr>
-              <a:t>• Profil: Rapider Anstieg von 20 auf 200 VUs innerhalb von 5s, gefolgt von 15s dauerhafter Lastspitze.
-</a:t>
-            </a:r>
-            <a:pPr indent="0" marL="0">
-              <a:lnSpc>
-                <a:spcPts val="1400"/>
-              </a:lnSpc>
-              <a:spcAft>
-                <a:spcPts val="600"/>
-              </a:spcAft>
-              <a:buNone/>
-            </a:pPr>
-            <a:r>
-              <a:rPr lang="en-US" sz="950" dirty="0">
-                <a:solidFill>
-                  <a:srgbClr val="1E293B"/>
-                </a:solidFill>
-                <a:latin typeface="Segoe UI" pitchFamily="34" charset="0"/>
-                <a:ea typeface="Segoe UI" pitchFamily="34" charset="-122"/>
-                <a:cs typeface="Segoe UI" pitchFamily="34" charset="-120"/>
-              </a:rPr>
-              <a:t>• Metrik (p95): Antwortzeit stieg kurz auf maximal 780 ms an, sank aber schnell auf ca. 150 ms.
-</a:t>
-            </a:r>
-            <a:pPr indent="0" marL="0">
-              <a:lnSpc>
-                <a:spcPts val="1400"/>
-              </a:lnSpc>
-              <a:buNone/>
-            </a:pPr>
-            <a:r>
-              <a:rPr lang="en-US" sz="950" dirty="0">
-                <a:solidFill>
-                  <a:srgbClr val="1E293B"/>
-                </a:solidFill>
-                <a:latin typeface="Segoe UI" pitchFamily="34" charset="0"/>
-                <a:ea typeface="Segoe UI" pitchFamily="34" charset="-122"/>
-                <a:cs typeface="Segoe UI" pitchFamily="34" charset="-120"/>
-              </a:rPr>
-              <a:t>• Fehlerrate: 0,00% (Kein Verbindungsabbruch).</a:t>
+              <a:t>: 0,00% (Kein Verbindungsabbruch).</a:t>
             </a:r>
             <a:endParaRPr lang="en-US" sz="950" dirty="0"/>
           </a:p>
@@ -4061,6 +3605,7 @@
         <a:solidFill>
           <a:srgbClr val="0F172A"/>
         </a:solidFill>
+        <a:effectLst/>
       </p:bgPr>
     </p:bg>
     <p:spTree>
@@ -4098,7 +3643,7 @@
           <a:bodyPr wrap="square" rtlCol="0" anchor="ctr"/>
           <a:lstStyle/>
           <a:p>
-            <a:pPr algn="ctr" indent="0" marL="0">
+            <a:pPr marL="0" indent="0" algn="ctr">
               <a:buNone/>
             </a:pPr>
             <a:r>
@@ -4135,6 +3680,13 @@
           </a:solidFill>
           <a:ln/>
         </p:spPr>
+        <p:txBody>
+          <a:bodyPr/>
+          <a:lstStyle/>
+          <a:p>
+            <a:endParaRPr lang="de-DE"/>
+          </a:p>
+        </p:txBody>
       </p:sp>
       <p:sp>
         <p:nvSpPr>
@@ -4155,6 +3707,13 @@
           </a:solidFill>
           <a:ln/>
         </p:spPr>
+        <p:txBody>
+          <a:bodyPr/>
+          <a:lstStyle/>
+          <a:p>
+            <a:endParaRPr lang="de-DE"/>
+          </a:p>
+        </p:txBody>
       </p:sp>
       <p:sp>
         <p:nvSpPr>
@@ -4177,7 +3736,7 @@
           <a:bodyPr wrap="square" rtlCol="0" anchor="ctr"/>
           <a:lstStyle/>
           <a:p>
-            <a:pPr indent="0" marL="0">
+            <a:pPr marL="0" indent="0">
               <a:lnSpc>
                 <a:spcPts val="1600"/>
               </a:lnSpc>
@@ -4193,78 +3752,10 @@
                 <a:cs typeface="Segoe UI" pitchFamily="34" charset="-120"/>
               </a:rPr>
               <a:t>✓ Erfolgreiche Jest-Migration (Karma komplett abgelöst)
-</a:t>
-            </a:r>
-            <a:pPr indent="0" marL="0">
-              <a:lnSpc>
-                <a:spcPts val="1600"/>
-              </a:lnSpc>
-              <a:buNone/>
-            </a:pPr>
-            <a:r>
-              <a:rPr lang="en-US" sz="1100" dirty="0">
-                <a:solidFill>
-                  <a:srgbClr val="F8FAFC"/>
-                </a:solidFill>
-                <a:latin typeface="Segoe UI" pitchFamily="34" charset="0"/>
-                <a:ea typeface="Segoe UI" pitchFamily="34" charset="-122"/>
-                <a:cs typeface="Segoe UI" pitchFamily="34" charset="-120"/>
-              </a:rPr>
-              <a:t>✓ Hohe Absicherung: 22 Tests insgesamt (genau 11 pro Person)
-</a:t>
-            </a:r>
-            <a:pPr indent="0" marL="0">
-              <a:lnSpc>
-                <a:spcPts val="1600"/>
-              </a:lnSpc>
-              <a:buNone/>
-            </a:pPr>
-            <a:r>
-              <a:rPr lang="en-US" sz="1100" dirty="0">
-                <a:solidFill>
-                  <a:srgbClr val="F8FAFC"/>
-                </a:solidFill>
-                <a:latin typeface="Segoe UI" pitchFamily="34" charset="0"/>
-                <a:ea typeface="Segoe UI" pitchFamily="34" charset="-122"/>
-                <a:cs typeface="Segoe UI" pitchFamily="34" charset="-120"/>
-              </a:rPr>
-              <a:t>✓ Stabile Playwright E2E-Tests durch API-Netzwerk-Mocking im CI
-</a:t>
-            </a:r>
-            <a:pPr indent="0" marL="0">
-              <a:lnSpc>
-                <a:spcPts val="1600"/>
-              </a:lnSpc>
-              <a:buNone/>
-            </a:pPr>
-            <a:r>
-              <a:rPr lang="en-US" sz="1100" dirty="0">
-                <a:solidFill>
-                  <a:srgbClr val="F8FAFC"/>
-                </a:solidFill>
-                <a:latin typeface="Segoe UI" pitchFamily="34" charset="0"/>
-                <a:ea typeface="Segoe UI" pitchFamily="34" charset="-122"/>
-                <a:cs typeface="Segoe UI" pitchFamily="34" charset="-120"/>
-              </a:rPr>
-              <a:t>✓ Performance-Nachweis: k6 Lasttests belegen Stabilität der API
-</a:t>
-            </a:r>
-            <a:pPr indent="0" marL="0">
-              <a:lnSpc>
-                <a:spcPts val="1600"/>
-              </a:lnSpc>
-              <a:buNone/>
-            </a:pPr>
-            <a:r>
-              <a:rPr lang="en-US" sz="1100" dirty="0">
-                <a:solidFill>
-                  <a:srgbClr val="F8FAFC"/>
-                </a:solidFill>
-                <a:latin typeface="Segoe UI" pitchFamily="34" charset="0"/>
-                <a:ea typeface="Segoe UI" pitchFamily="34" charset="-122"/>
-                <a:cs typeface="Segoe UI" pitchFamily="34" charset="-120"/>
-              </a:rPr>
-              <a:t>✓ Vollautomatische Validierung über GitHub Actions Build-Pipeline</a:t>
+✓ Hohe Absicherung: 22 Tests insgesamt (genau 11 pro Person)
+✓ Stabile Playwright E2E-Tests durch API-Netzwerk-Mocking im CI
+✓ Performance-Nachweis: k6 Lasttests belegen Stabilität der API
+✓ Vollautomatische Validierung über GitHub Actions Build-Pipeline</a:t>
             </a:r>
             <a:endParaRPr lang="en-US" sz="1100" dirty="0"/>
           </a:p>
@@ -4571,4 +4062,319 @@
     </a:ext>
   </a:extLst>
 </a:theme>
+</file>
+
+<file path=ppt/theme/theme2.xml><?xml version="1.0" encoding="utf-8"?>
+<a:theme xmlns:a="http://schemas.openxmlformats.org/drawingml/2006/main" name="Office">
+  <a:themeElements>
+    <a:clrScheme name="Office">
+      <a:dk1>
+        <a:sysClr val="windowText" lastClr="000000"/>
+      </a:dk1>
+      <a:lt1>
+        <a:sysClr val="window" lastClr="FFFFFF"/>
+      </a:lt1>
+      <a:dk2>
+        <a:srgbClr val="0E2841"/>
+      </a:dk2>
+      <a:lt2>
+        <a:srgbClr val="E8E8E8"/>
+      </a:lt2>
+      <a:accent1>
+        <a:srgbClr val="156082"/>
+      </a:accent1>
+      <a:accent2>
+        <a:srgbClr val="E97132"/>
+      </a:accent2>
+      <a:accent3>
+        <a:srgbClr val="196B24"/>
+      </a:accent3>
+      <a:accent4>
+        <a:srgbClr val="0F9ED5"/>
+      </a:accent4>
+      <a:accent5>
+        <a:srgbClr val="A02B93"/>
+      </a:accent5>
+      <a:accent6>
+        <a:srgbClr val="4EA72E"/>
+      </a:accent6>
+      <a:hlink>
+        <a:srgbClr val="467886"/>
+      </a:hlink>
+      <a:folHlink>
+        <a:srgbClr val="96607D"/>
+      </a:folHlink>
+    </a:clrScheme>
+    <a:fontScheme name="Office">
+      <a:majorFont>
+        <a:latin typeface="Aptos Display" panose="02110004020202020204"/>
+        <a:ea typeface=""/>
+        <a:cs typeface=""/>
+        <a:font script="Jpan" typeface="游ゴシック Light"/>
+        <a:font script="Hang" typeface="맑은 고딕"/>
+        <a:font script="Hans" typeface="等线 Light"/>
+        <a:font script="Hant" typeface="新細明體"/>
+        <a:font script="Arab" typeface="Times New Roman"/>
+        <a:font script="Hebr" typeface="Times New Roman"/>
+        <a:font script="Thai" typeface="Angsana New"/>
+        <a:font script="Ethi" typeface="Nyala"/>
+        <a:font script="Beng" typeface="Vrinda"/>
+        <a:font script="Gujr" typeface="Shruti"/>
+        <a:font script="Khmr" typeface="MoolBoran"/>
+        <a:font script="Knda" typeface="Tunga"/>
+        <a:font script="Guru" typeface="Raavi"/>
+        <a:font script="Cans" typeface="Euphemia"/>
+        <a:font script="Cher" typeface="Plantagenet Cherokee"/>
+        <a:font script="Yiii" typeface="Microsoft Yi Baiti"/>
+        <a:font script="Tibt" typeface="Microsoft Himalaya"/>
+        <a:font script="Thaa" typeface="MV Boli"/>
+        <a:font script="Deva" typeface="Mangal"/>
+        <a:font script="Telu" typeface="Gautami"/>
+        <a:font script="Taml" typeface="Latha"/>
+        <a:font script="Syrc" typeface="Estrangelo Edessa"/>
+        <a:font script="Orya" typeface="Kalinga"/>
+        <a:font script="Mlym" typeface="Kartika"/>
+        <a:font script="Laoo" typeface="DokChampa"/>
+        <a:font script="Sinh" typeface="Iskoola Pota"/>
+        <a:font script="Mong" typeface="Mongolian Baiti"/>
+        <a:font script="Viet" typeface="Times New Roman"/>
+        <a:font script="Uigh" typeface="Microsoft Uighur"/>
+        <a:font script="Geor" typeface="Sylfaen"/>
+        <a:font script="Armn" typeface="Arial"/>
+        <a:font script="Bugi" typeface="Leelawadee UI"/>
+        <a:font script="Bopo" typeface="Microsoft JhengHei"/>
+        <a:font script="Java" typeface="Javanese Text"/>
+        <a:font script="Lisu" typeface="Segoe UI"/>
+        <a:font script="Mymr" typeface="Myanmar Text"/>
+        <a:font script="Nkoo" typeface="Ebrima"/>
+        <a:font script="Olck" typeface="Nirmala UI"/>
+        <a:font script="Osma" typeface="Ebrima"/>
+        <a:font script="Phag" typeface="Phagspa"/>
+        <a:font script="Syrn" typeface="Estrangelo Edessa"/>
+        <a:font script="Syrj" typeface="Estrangelo Edessa"/>
+        <a:font script="Syre" typeface="Estrangelo Edessa"/>
+        <a:font script="Sora" typeface="Nirmala UI"/>
+        <a:font script="Tale" typeface="Microsoft Tai Le"/>
+        <a:font script="Talu" typeface="Microsoft New Tai Lue"/>
+        <a:font script="Tfng" typeface="Ebrima"/>
+      </a:majorFont>
+      <a:minorFont>
+        <a:latin typeface="Aptos" panose="02110004020202020204"/>
+        <a:ea typeface=""/>
+        <a:cs typeface=""/>
+        <a:font script="Jpan" typeface="游ゴシック"/>
+        <a:font script="Hang" typeface="맑은 고딕"/>
+        <a:font script="Hans" typeface="等线"/>
+        <a:font script="Hant" typeface="新細明體"/>
+        <a:font script="Arab" typeface="Arial"/>
+        <a:font script="Hebr" typeface="Arial"/>
+        <a:font script="Thai" typeface="Cordia New"/>
+        <a:font script="Ethi" typeface="Nyala"/>
+        <a:font script="Beng" typeface="Vrinda"/>
+        <a:font script="Gujr" typeface="Shruti"/>
+        <a:font script="Khmr" typeface="DaunPenh"/>
+        <a:font script="Knda" typeface="Tunga"/>
+        <a:font script="Guru" typeface="Raavi"/>
+        <a:font script="Cans" typeface="Euphemia"/>
+        <a:font script="Cher" typeface="Plantagenet Cherokee"/>
+        <a:font script="Yiii" typeface="Microsoft Yi Baiti"/>
+        <a:font script="Tibt" typeface="Microsoft Himalaya"/>
+        <a:font script="Thaa" typeface="MV Boli"/>
+        <a:font script="Deva" typeface="Mangal"/>
+        <a:font script="Telu" typeface="Gautami"/>
+        <a:font script="Taml" typeface="Latha"/>
+        <a:font script="Syrc" typeface="Estrangelo Edessa"/>
+        <a:font script="Orya" typeface="Kalinga"/>
+        <a:font script="Mlym" typeface="Kartika"/>
+        <a:font script="Laoo" typeface="DokChampa"/>
+        <a:font script="Sinh" typeface="Iskoola Pota"/>
+        <a:font script="Mong" typeface="Mongolian Baiti"/>
+        <a:font script="Viet" typeface="Arial"/>
+        <a:font script="Uigh" typeface="Microsoft Uighur"/>
+        <a:font script="Geor" typeface="Sylfaen"/>
+        <a:font script="Armn" typeface="Arial"/>
+        <a:font script="Bugi" typeface="Leelawadee UI"/>
+        <a:font script="Bopo" typeface="Microsoft JhengHei"/>
+        <a:font script="Java" typeface="Javanese Text"/>
+        <a:font script="Lisu" typeface="Segoe UI"/>
+        <a:font script="Mymr" typeface="Myanmar Text"/>
+        <a:font script="Nkoo" typeface="Ebrima"/>
+        <a:font script="Olck" typeface="Nirmala UI"/>
+        <a:font script="Osma" typeface="Ebrima"/>
+        <a:font script="Phag" typeface="Phagspa"/>
+        <a:font script="Syrn" typeface="Estrangelo Edessa"/>
+        <a:font script="Syrj" typeface="Estrangelo Edessa"/>
+        <a:font script="Syre" typeface="Estrangelo Edessa"/>
+        <a:font script="Sora" typeface="Nirmala UI"/>
+        <a:font script="Tale" typeface="Microsoft Tai Le"/>
+        <a:font script="Talu" typeface="Microsoft New Tai Lue"/>
+        <a:font script="Tfng" typeface="Ebrima"/>
+      </a:minorFont>
+    </a:fontScheme>
+    <a:fmtScheme name="Office">
+      <a:fillStyleLst>
+        <a:solidFill>
+          <a:schemeClr val="phClr"/>
+        </a:solidFill>
+        <a:gradFill rotWithShape="1">
+          <a:gsLst>
+            <a:gs pos="0">
+              <a:schemeClr val="phClr">
+                <a:lumMod val="110000"/>
+                <a:satMod val="105000"/>
+                <a:tint val="67000"/>
+              </a:schemeClr>
+            </a:gs>
+            <a:gs pos="50000">
+              <a:schemeClr val="phClr">
+                <a:lumMod val="105000"/>
+                <a:satMod val="103000"/>
+                <a:tint val="73000"/>
+              </a:schemeClr>
+            </a:gs>
+            <a:gs pos="100000">
+              <a:schemeClr val="phClr">
+                <a:lumMod val="105000"/>
+                <a:satMod val="109000"/>
+                <a:tint val="81000"/>
+              </a:schemeClr>
+            </a:gs>
+          </a:gsLst>
+          <a:lin ang="5400000" scaled="0"/>
+        </a:gradFill>
+        <a:gradFill rotWithShape="1">
+          <a:gsLst>
+            <a:gs pos="0">
+              <a:schemeClr val="phClr">
+                <a:satMod val="103000"/>
+                <a:lumMod val="102000"/>
+                <a:tint val="94000"/>
+              </a:schemeClr>
+            </a:gs>
+            <a:gs pos="50000">
+              <a:schemeClr val="phClr">
+                <a:satMod val="110000"/>
+                <a:lumMod val="100000"/>
+                <a:shade val="100000"/>
+              </a:schemeClr>
+            </a:gs>
+            <a:gs pos="100000">
+              <a:schemeClr val="phClr">
+                <a:lumMod val="99000"/>
+                <a:satMod val="120000"/>
+                <a:shade val="78000"/>
+              </a:schemeClr>
+            </a:gs>
+          </a:gsLst>
+          <a:lin ang="5400000" scaled="0"/>
+        </a:gradFill>
+      </a:fillStyleLst>
+      <a:lnStyleLst>
+        <a:ln w="12700" cap="flat" cmpd="sng" algn="ctr">
+          <a:solidFill>
+            <a:schemeClr val="phClr"/>
+          </a:solidFill>
+          <a:prstDash val="solid"/>
+          <a:miter lim="800000"/>
+        </a:ln>
+        <a:ln w="19050" cap="flat" cmpd="sng" algn="ctr">
+          <a:solidFill>
+            <a:schemeClr val="phClr"/>
+          </a:solidFill>
+          <a:prstDash val="solid"/>
+          <a:miter lim="800000"/>
+        </a:ln>
+        <a:ln w="25400" cap="flat" cmpd="sng" algn="ctr">
+          <a:solidFill>
+            <a:schemeClr val="phClr"/>
+          </a:solidFill>
+          <a:prstDash val="solid"/>
+          <a:miter lim="800000"/>
+        </a:ln>
+      </a:lnStyleLst>
+      <a:effectStyleLst>
+        <a:effectStyle>
+          <a:effectLst/>
+        </a:effectStyle>
+        <a:effectStyle>
+          <a:effectLst/>
+        </a:effectStyle>
+        <a:effectStyle>
+          <a:effectLst>
+            <a:outerShdw blurRad="57150" dist="19050" dir="5400000" algn="ctr" rotWithShape="0">
+              <a:srgbClr val="000000">
+                <a:alpha val="63000"/>
+              </a:srgbClr>
+            </a:outerShdw>
+          </a:effectLst>
+        </a:effectStyle>
+      </a:effectStyleLst>
+      <a:bgFillStyleLst>
+        <a:solidFill>
+          <a:schemeClr val="phClr"/>
+        </a:solidFill>
+        <a:solidFill>
+          <a:schemeClr val="phClr">
+            <a:tint val="95000"/>
+            <a:satMod val="170000"/>
+          </a:schemeClr>
+        </a:solidFill>
+        <a:gradFill rotWithShape="1">
+          <a:gsLst>
+            <a:gs pos="0">
+              <a:schemeClr val="phClr">
+                <a:tint val="93000"/>
+                <a:satMod val="150000"/>
+                <a:shade val="98000"/>
+                <a:lumMod val="102000"/>
+              </a:schemeClr>
+            </a:gs>
+            <a:gs pos="50000">
+              <a:schemeClr val="phClr">
+                <a:tint val="98000"/>
+                <a:satMod val="130000"/>
+                <a:shade val="90000"/>
+                <a:lumMod val="103000"/>
+              </a:schemeClr>
+            </a:gs>
+            <a:gs pos="100000">
+              <a:schemeClr val="phClr">
+                <a:shade val="63000"/>
+                <a:satMod val="120000"/>
+              </a:schemeClr>
+            </a:gs>
+          </a:gsLst>
+          <a:lin ang="5400000" scaled="0"/>
+        </a:gradFill>
+      </a:bgFillStyleLst>
+    </a:fmtScheme>
+  </a:themeElements>
+  <a:objectDefaults>
+    <a:lnDef>
+      <a:spPr/>
+      <a:bodyPr/>
+      <a:lstStyle/>
+      <a:style>
+        <a:lnRef idx="2">
+          <a:schemeClr val="accent1"/>
+        </a:lnRef>
+        <a:fillRef idx="0">
+          <a:schemeClr val="accent1"/>
+        </a:fillRef>
+        <a:effectRef idx="1">
+          <a:schemeClr val="accent1"/>
+        </a:effectRef>
+        <a:fontRef idx="minor">
+          <a:schemeClr val="tx1"/>
+        </a:fontRef>
+      </a:style>
+    </a:lnDef>
+  </a:objectDefaults>
+  <a:extraClrSchemeLst/>
+  <a:extLst>
+    <a:ext uri="{05A4C25C-085E-4340-85A3-A5531E510DB2}">
+      <thm15:themeFamily xmlns:thm15="http://schemas.microsoft.com/office/thememl/2012/main" name="Office Theme" id="{2E142A2C-CD16-42D6-873A-C26D2A0506FA}" vid="{1BDDFF52-6CD6-40A5-AB3C-68EB2F1E4D0A}"/>
+    </a:ext>
+  </a:extLst>
+</a:theme>
 </file>
--- a/PRESENTATION.pptx
+++ b/PRESENTATION.pptx
@@ -1637,7 +1637,7 @@
         </p:nvSpPr>
         <p:spPr>
           <a:xfrm>
-            <a:off x="4937760" y="1577340"/>
+            <a:off x="4937760" y="1564278"/>
             <a:ext cx="3291840" cy="2743200"/>
           </a:xfrm>
           <a:prstGeom prst="rect">
@@ -3755,7 +3755,7 @@
 ✓ Hohe Absicherung: 22 Tests insgesamt (genau 11 pro Person)
 ✓ Stabile Playwright E2E-Tests durch API-Netzwerk-Mocking im CI
 ✓ Performance-Nachweis: k6 Lasttests belegen Stabilität der API
-✓ Vollautomatische Validierung über GitHub Actions Build-Pipeline</a:t>
+</a:t>
             </a:r>
             <a:endParaRPr lang="en-US" sz="1100" dirty="0"/>
           </a:p>
